--- a/a7/build/out/u3/A7 3.04  Slides.pptx
+++ b/a7/build/out/u3/A7 3.04  Slides.pptx
@@ -7568,7 +7568,7 @@
         <p:spPr>
           <a:xfrm>
             <a:off x="1874519" y="1801368"/>
-            <a:ext cx="3395979" cy="457200"/>
+            <a:ext cx="3551936" cy="457200"/>
           </a:xfrm>
           <a:prstGeom prst="rect">
             <a:avLst/>
@@ -7610,7 +7610,7 @@
         </p:blipFill>
         <p:spPr>
           <a:xfrm>
-            <a:off x="5133340" y="1783080"/>
+            <a:off x="5289296" y="1783080"/>
             <a:ext cx="557784" cy="493776"/>
           </a:xfrm>
           <a:prstGeom prst="rect">
@@ -7627,7 +7627,7 @@
         <p:spPr>
           <a:xfrm>
             <a:off x="1874519" y="2455164"/>
-            <a:ext cx="3542030" cy="457200"/>
+            <a:ext cx="3703828" cy="457200"/>
           </a:xfrm>
           <a:prstGeom prst="rect">
             <a:avLst/>
@@ -7669,7 +7669,7 @@
         </p:blipFill>
         <p:spPr>
           <a:xfrm>
-            <a:off x="5279389" y="2479548"/>
+            <a:off x="5441188" y="2479548"/>
             <a:ext cx="688848" cy="408432"/>
           </a:xfrm>
           <a:prstGeom prst="rect">
@@ -7685,8 +7685,8 @@
         </p:nvSpPr>
         <p:spPr>
           <a:xfrm>
-            <a:off x="5968237" y="2455164"/>
-            <a:ext cx="1351279" cy="457200"/>
+            <a:off x="6130036" y="2455164"/>
+            <a:ext cx="1425448" cy="457200"/>
           </a:xfrm>
           <a:prstGeom prst="rect">
             <a:avLst/>
@@ -7721,7 +7721,7 @@
         <p:spPr>
           <a:xfrm>
             <a:off x="1874519" y="3067812"/>
-            <a:ext cx="1935480" cy="457200"/>
+            <a:ext cx="2033015" cy="457200"/>
           </a:xfrm>
           <a:prstGeom prst="rect">
             <a:avLst/>
@@ -7763,7 +7763,7 @@
         </p:blipFill>
         <p:spPr>
           <a:xfrm>
-            <a:off x="3672840" y="3180588"/>
+            <a:off x="3770375" y="3180588"/>
             <a:ext cx="1136904" cy="231648"/>
           </a:xfrm>
           <a:prstGeom prst="rect">
@@ -7780,7 +7780,7 @@
         <p:spPr>
           <a:xfrm>
             <a:off x="1874519" y="3686556"/>
-            <a:ext cx="4710430" cy="457200"/>
+            <a:ext cx="4918964" cy="457200"/>
           </a:xfrm>
           <a:prstGeom prst="rect">
             <a:avLst/>
@@ -7822,7 +7822,7 @@
         </p:blipFill>
         <p:spPr>
           <a:xfrm>
-            <a:off x="6447790" y="3703320"/>
+            <a:off x="6656324" y="3703320"/>
             <a:ext cx="118872" cy="423672"/>
           </a:xfrm>
           <a:prstGeom prst="rect">
@@ -7838,8 +7838,8 @@
         </p:nvSpPr>
         <p:spPr>
           <a:xfrm>
-            <a:off x="6566662" y="3686556"/>
-            <a:ext cx="4126230" cy="457200"/>
+            <a:off x="6775196" y="3686556"/>
+            <a:ext cx="4311396" cy="457200"/>
           </a:xfrm>
           <a:prstGeom prst="rect">
             <a:avLst/>
@@ -7881,7 +7881,7 @@
         </p:blipFill>
         <p:spPr>
           <a:xfrm>
-            <a:off x="10555732" y="3703320"/>
+            <a:off x="10949432" y="3703320"/>
             <a:ext cx="118872" cy="423672"/>
           </a:xfrm>
           <a:prstGeom prst="rect">
@@ -7897,8 +7897,8 @@
         </p:nvSpPr>
         <p:spPr>
           <a:xfrm>
-            <a:off x="10674604" y="3686556"/>
-            <a:ext cx="328929" cy="457200"/>
+            <a:off x="11068304" y="3686556"/>
+            <a:ext cx="362204" cy="457200"/>
           </a:xfrm>
           <a:prstGeom prst="rect">
             <a:avLst/>
@@ -12629,7 +12629,7 @@
         <p:spPr>
           <a:xfrm>
             <a:off x="1874519" y="1801368"/>
-            <a:ext cx="3395979" cy="457200"/>
+            <a:ext cx="3551936" cy="457200"/>
           </a:xfrm>
           <a:prstGeom prst="rect">
             <a:avLst/>
@@ -12671,7 +12671,7 @@
         </p:blipFill>
         <p:spPr>
           <a:xfrm>
-            <a:off x="5133340" y="1783080"/>
+            <a:off x="5289296" y="1783080"/>
             <a:ext cx="557784" cy="493776"/>
           </a:xfrm>
           <a:prstGeom prst="rect">
@@ -12687,8 +12687,8 @@
         </p:nvSpPr>
         <p:spPr>
           <a:xfrm>
-            <a:off x="6239763" y="1760220"/>
-            <a:ext cx="474979" cy="457200"/>
+            <a:off x="6395720" y="1760220"/>
+            <a:ext cx="549148" cy="457200"/>
           </a:xfrm>
           <a:prstGeom prst="rect">
             <a:avLst/>
@@ -12723,7 +12723,7 @@
         <p:spPr>
           <a:xfrm>
             <a:off x="1874519" y="2455164"/>
-            <a:ext cx="3542030" cy="457200"/>
+            <a:ext cx="3703828" cy="457200"/>
           </a:xfrm>
           <a:prstGeom prst="rect">
             <a:avLst/>
@@ -12765,7 +12765,7 @@
         </p:blipFill>
         <p:spPr>
           <a:xfrm>
-            <a:off x="5279389" y="2479548"/>
+            <a:off x="5441188" y="2479548"/>
             <a:ext cx="688848" cy="408432"/>
           </a:xfrm>
           <a:prstGeom prst="rect">
@@ -12781,8 +12781,8 @@
         </p:nvSpPr>
         <p:spPr>
           <a:xfrm>
-            <a:off x="5968237" y="2455164"/>
-            <a:ext cx="1351279" cy="457200"/>
+            <a:off x="6130036" y="2455164"/>
+            <a:ext cx="1425448" cy="457200"/>
           </a:xfrm>
           <a:prstGeom prst="rect">
             <a:avLst/>
@@ -12816,8 +12816,8 @@
         </p:nvSpPr>
         <p:spPr>
           <a:xfrm>
-            <a:off x="7730997" y="2455164"/>
-            <a:ext cx="621030" cy="457200"/>
+            <a:off x="7966964" y="2455164"/>
+            <a:ext cx="718566" cy="457200"/>
           </a:xfrm>
           <a:prstGeom prst="rect">
             <a:avLst/>
@@ -12852,7 +12852,7 @@
         <p:spPr>
           <a:xfrm>
             <a:off x="1874519" y="3067812"/>
-            <a:ext cx="1935480" cy="457200"/>
+            <a:ext cx="2033015" cy="457200"/>
           </a:xfrm>
           <a:prstGeom prst="rect">
             <a:avLst/>
@@ -12894,7 +12894,7 @@
         </p:blipFill>
         <p:spPr>
           <a:xfrm>
-            <a:off x="3672840" y="3180588"/>
+            <a:off x="3770375" y="3180588"/>
             <a:ext cx="1136904" cy="231648"/>
           </a:xfrm>
           <a:prstGeom prst="rect">
@@ -12910,8 +12910,8 @@
         </p:nvSpPr>
         <p:spPr>
           <a:xfrm>
-            <a:off x="5358383" y="3067812"/>
-            <a:ext cx="1059180" cy="457200"/>
+            <a:off x="5455919" y="3067812"/>
+            <a:ext cx="1226820" cy="457200"/>
           </a:xfrm>
           <a:prstGeom prst="rect">
             <a:avLst/>
@@ -12946,7 +12946,7 @@
         <p:spPr>
           <a:xfrm>
             <a:off x="1874519" y="3686556"/>
-            <a:ext cx="4710430" cy="457200"/>
+            <a:ext cx="4918964" cy="457200"/>
           </a:xfrm>
           <a:prstGeom prst="rect">
             <a:avLst/>
@@ -12988,7 +12988,7 @@
         </p:blipFill>
         <p:spPr>
           <a:xfrm>
-            <a:off x="6447790" y="3703320"/>
+            <a:off x="6656324" y="3703320"/>
             <a:ext cx="118872" cy="423672"/>
           </a:xfrm>
           <a:prstGeom prst="rect">
@@ -13004,8 +13004,8 @@
         </p:nvSpPr>
         <p:spPr>
           <a:xfrm>
-            <a:off x="6566662" y="3686556"/>
-            <a:ext cx="4126230" cy="457200"/>
+            <a:off x="6775196" y="3686556"/>
+            <a:ext cx="4311396" cy="457200"/>
           </a:xfrm>
           <a:prstGeom prst="rect">
             <a:avLst/>
@@ -13047,7 +13047,7 @@
         </p:blipFill>
         <p:spPr>
           <a:xfrm>
-            <a:off x="10555732" y="3703320"/>
+            <a:off x="10949432" y="3703320"/>
             <a:ext cx="118872" cy="423672"/>
           </a:xfrm>
           <a:prstGeom prst="rect">
@@ -13063,8 +13063,8 @@
         </p:nvSpPr>
         <p:spPr>
           <a:xfrm>
-            <a:off x="10674604" y="3686556"/>
-            <a:ext cx="328929" cy="457200"/>
+            <a:off x="11068304" y="3686556"/>
+            <a:ext cx="362204" cy="457200"/>
           </a:xfrm>
           <a:prstGeom prst="rect">
             <a:avLst/>
@@ -13123,7 +13123,7 @@
         <p:spPr>
           <a:xfrm>
             <a:off x="2724912" y="4155948"/>
-            <a:ext cx="1205230" cy="457200"/>
+            <a:ext cx="1396238" cy="457200"/>
           </a:xfrm>
           <a:prstGeom prst="rect">
             <a:avLst/>
@@ -13165,7 +13165,7 @@
         </p:blipFill>
         <p:spPr>
           <a:xfrm>
-            <a:off x="3792982" y="4172712"/>
+            <a:off x="3983990" y="4172712"/>
             <a:ext cx="329184" cy="423672"/>
           </a:xfrm>
           <a:prstGeom prst="rect">
@@ -13834,8 +13834,8 @@
         </p:nvSpPr>
         <p:spPr>
           <a:xfrm>
-            <a:off x="2882137" y="2171700"/>
-            <a:ext cx="4310380" cy="457200"/>
+            <a:off x="2739136" y="2171700"/>
+            <a:ext cx="4502912" cy="457200"/>
           </a:xfrm>
           <a:prstGeom prst="rect">
             <a:avLst/>
@@ -13877,7 +13877,7 @@
         </p:blipFill>
         <p:spPr>
           <a:xfrm>
-            <a:off x="7055357" y="2229612"/>
+            <a:off x="7104888" y="2229612"/>
             <a:ext cx="527304" cy="341376"/>
           </a:xfrm>
           <a:prstGeom prst="rect">
@@ -13893,8 +13893,8 @@
         </p:nvSpPr>
         <p:spPr>
           <a:xfrm>
-            <a:off x="7582661" y="2171700"/>
-            <a:ext cx="1833880" cy="457200"/>
+            <a:off x="7632191" y="2171700"/>
+            <a:ext cx="1927352" cy="457200"/>
           </a:xfrm>
           <a:prstGeom prst="rect">
             <a:avLst/>
@@ -14296,8 +14296,8 @@
         </p:nvSpPr>
         <p:spPr>
           <a:xfrm>
-            <a:off x="2882137" y="2080260"/>
-            <a:ext cx="4310380" cy="457200"/>
+            <a:off x="2739136" y="2080260"/>
+            <a:ext cx="4502912" cy="457200"/>
           </a:xfrm>
           <a:prstGeom prst="rect">
             <a:avLst/>
@@ -14339,7 +14339,7 @@
         </p:blipFill>
         <p:spPr>
           <a:xfrm>
-            <a:off x="7055357" y="2138171"/>
+            <a:off x="7104888" y="2138171"/>
             <a:ext cx="527304" cy="341376"/>
           </a:xfrm>
           <a:prstGeom prst="rect">
@@ -14355,8 +14355,8 @@
         </p:nvSpPr>
         <p:spPr>
           <a:xfrm>
-            <a:off x="7582661" y="2080260"/>
-            <a:ext cx="1833880" cy="457200"/>
+            <a:off x="7632191" y="2080260"/>
+            <a:ext cx="1927352" cy="457200"/>
           </a:xfrm>
           <a:prstGeom prst="rect">
             <a:avLst/>
@@ -16310,7 +16310,7 @@
         </p:blipFill>
         <p:spPr>
           <a:xfrm>
-            <a:off x="2301747" y="3337560"/>
+            <a:off x="2221483" y="3337560"/>
             <a:ext cx="1216152" cy="557784"/>
           </a:xfrm>
           <a:prstGeom prst="rect">
@@ -16326,8 +16326,8 @@
         </p:nvSpPr>
         <p:spPr>
           <a:xfrm>
-            <a:off x="3517899" y="3387852"/>
-            <a:ext cx="1503680" cy="457200"/>
+            <a:off x="3437635" y="3387852"/>
+            <a:ext cx="1583944" cy="457200"/>
           </a:xfrm>
           <a:prstGeom prst="rect">
             <a:avLst/>
@@ -16369,7 +16369,7 @@
         </p:blipFill>
         <p:spPr>
           <a:xfrm>
-            <a:off x="4884420" y="3337560"/>
+            <a:off x="4884419" y="3337560"/>
             <a:ext cx="1804416" cy="557784"/>
           </a:xfrm>
           <a:prstGeom prst="rect">
@@ -16386,7 +16386,7 @@
         <p:spPr>
           <a:xfrm>
             <a:off x="6688836" y="3387852"/>
-            <a:ext cx="1503680" cy="457200"/>
+            <a:ext cx="1583944" cy="457200"/>
           </a:xfrm>
           <a:prstGeom prst="rect">
             <a:avLst/>
@@ -16428,7 +16428,7 @@
         </p:blipFill>
         <p:spPr>
           <a:xfrm>
-            <a:off x="8055356" y="3339083"/>
+            <a:off x="8135620" y="3339083"/>
             <a:ext cx="1804416" cy="554736"/>
           </a:xfrm>
           <a:prstGeom prst="rect">
@@ -16750,7 +16750,7 @@
         </p:blipFill>
         <p:spPr>
           <a:xfrm>
-            <a:off x="2565400" y="2340864"/>
+            <a:off x="2451607" y="2340864"/>
             <a:ext cx="1252728" cy="512064"/>
           </a:xfrm>
           <a:prstGeom prst="rect">
@@ -16766,8 +16766,8 @@
         </p:nvSpPr>
         <p:spPr>
           <a:xfrm>
-            <a:off x="3818128" y="2368296"/>
-            <a:ext cx="1833880" cy="457200"/>
+            <a:off x="3704335" y="2368296"/>
+            <a:ext cx="1927352" cy="457200"/>
           </a:xfrm>
           <a:prstGeom prst="rect">
             <a:avLst/>
@@ -16809,7 +16809,7 @@
         </p:blipFill>
         <p:spPr>
           <a:xfrm>
-            <a:off x="5514848" y="2340864"/>
+            <a:off x="5494528" y="2340864"/>
             <a:ext cx="1222248" cy="512064"/>
           </a:xfrm>
           <a:prstGeom prst="rect">
@@ -16825,8 +16825,8 @@
         </p:nvSpPr>
         <p:spPr>
           <a:xfrm>
-            <a:off x="6737096" y="2368296"/>
-            <a:ext cx="1998979" cy="457200"/>
+            <a:off x="6716776" y="2368296"/>
+            <a:ext cx="2099056" cy="457200"/>
           </a:xfrm>
           <a:prstGeom prst="rect">
             <a:avLst/>
@@ -16868,7 +16868,7 @@
         </p:blipFill>
         <p:spPr>
           <a:xfrm>
-            <a:off x="8598916" y="2427732"/>
+            <a:off x="8678672" y="2427732"/>
             <a:ext cx="786384" cy="338328"/>
           </a:xfrm>
           <a:prstGeom prst="rect">
@@ -16884,8 +16884,8 @@
         </p:nvSpPr>
         <p:spPr>
           <a:xfrm>
-            <a:off x="9385300" y="2368296"/>
-            <a:ext cx="347980" cy="457200"/>
+            <a:off x="9465056" y="2368296"/>
+            <a:ext cx="382016" cy="457200"/>
           </a:xfrm>
           <a:prstGeom prst="rect">
             <a:avLst/>
@@ -16927,7 +16927,7 @@
         </p:blipFill>
         <p:spPr>
           <a:xfrm>
-            <a:off x="906779" y="3127248"/>
+            <a:off x="780287" y="3127248"/>
             <a:ext cx="1944623" cy="560832"/>
           </a:xfrm>
           <a:prstGeom prst="rect">
@@ -16943,8 +16943,8 @@
         </p:nvSpPr>
         <p:spPr>
           <a:xfrm>
-            <a:off x="2851404" y="3179064"/>
-            <a:ext cx="2659380" cy="457200"/>
+            <a:off x="2724911" y="3179064"/>
+            <a:ext cx="2785872" cy="457200"/>
           </a:xfrm>
           <a:prstGeom prst="rect">
             <a:avLst/>
@@ -17003,7 +17003,7 @@
         <p:spPr>
           <a:xfrm>
             <a:off x="7053072" y="3179064"/>
-            <a:ext cx="2659380" cy="457200"/>
+            <a:ext cx="2785872" cy="457200"/>
           </a:xfrm>
           <a:prstGeom prst="rect">
             <a:avLst/>
@@ -17045,7 +17045,7 @@
         </p:blipFill>
         <p:spPr>
           <a:xfrm>
-            <a:off x="9575292" y="3203448"/>
+            <a:off x="9701784" y="3203448"/>
             <a:ext cx="1679448" cy="408432"/>
           </a:xfrm>
           <a:prstGeom prst="rect">
@@ -17097,7 +17097,7 @@
         <p:spPr>
           <a:xfrm>
             <a:off x="987552" y="4814316"/>
-            <a:ext cx="4564380" cy="457200"/>
+            <a:ext cx="4767072" cy="457200"/>
           </a:xfrm>
           <a:prstGeom prst="rect">
             <a:avLst/>
@@ -17139,7 +17139,7 @@
         </p:blipFill>
         <p:spPr>
           <a:xfrm>
-            <a:off x="5414772" y="4739639"/>
+            <a:off x="5617464" y="4739639"/>
             <a:ext cx="3791712" cy="606552"/>
           </a:xfrm>
           <a:prstGeom prst="rect">
@@ -17477,8 +17477,8 @@
         </p:nvSpPr>
         <p:spPr>
           <a:xfrm>
-            <a:off x="3250184" y="3159252"/>
-            <a:ext cx="1503680" cy="457200"/>
+            <a:off x="3210052" y="3159252"/>
+            <a:ext cx="1583944" cy="457200"/>
           </a:xfrm>
           <a:prstGeom prst="rect">
             <a:avLst/>
@@ -17520,7 +17520,7 @@
         </p:blipFill>
         <p:spPr>
           <a:xfrm>
-            <a:off x="4616704" y="3214116"/>
+            <a:off x="4656836" y="3214116"/>
             <a:ext cx="4294632" cy="347472"/>
           </a:xfrm>
           <a:prstGeom prst="rect">

--- a/a7/build/out/u3/A7 3.04  Slides.pptx
+++ b/a7/build/out/u3/A7 3.04  Slides.pptx
@@ -38,6 +38,7 @@
     <p:sldId id="286" r:id="rId37"/>
     <p:sldId id="287" r:id="rId38"/>
     <p:sldId id="288" r:id="rId39"/>
+    <p:sldId id="289" r:id="rId40"/>
   </p:sldIdLst>
   <p:sldSz cx="12191969" cy="6858000" type="screen4x3"/>
   <p:notesSz cx="6858000" cy="9144000"/>
@@ -6455,9 +6456,44 @@
           </a:p>
         </p:txBody>
       </p:sp>
+      <p:sp>
+        <p:nvSpPr>
+          <p:cNvPr id="9" name="TextBox 8"/>
+          <p:cNvSpPr txBox="1"/>
+          <p:nvPr/>
+        </p:nvSpPr>
+        <p:spPr>
+          <a:xfrm>
+            <a:off x="2480056" y="2171700"/>
+            <a:ext cx="4674616" cy="457200"/>
+          </a:xfrm>
+          <a:prstGeom prst="rect">
+            <a:avLst/>
+          </a:prstGeom>
+          <a:noFill/>
+        </p:spPr>
+        <p:txBody>
+          <a:bodyPr wrap="none" lIns="45720" rIns="45720" tIns="18288" bIns="18288" anchor="ctr">
+            <a:spAutoFit/>
+          </a:bodyPr>
+          <a:lstStyle/>
+          <a:p>
+            <a:pPr algn="l"/>
+            <a:r>
+              <a:rPr sz="2600" b="0" i="0">
+                <a:solidFill>
+                  <a:srgbClr val="1A1A1A"/>
+                </a:solidFill>
+                <a:latin typeface="Century Schoolbook"/>
+              </a:rPr>
+              <a:t>A pollen grain's mass is  </a:t>
+            </a:r>
+          </a:p>
+        </p:txBody>
+      </p:sp>
       <p:pic>
         <p:nvPicPr>
-          <p:cNvPr id="9" name="Picture 8" descr="eced8f496d86b94c.png"/>
+          <p:cNvPr id="10" name="Picture 9" descr="39778c7e43004813.png"/>
           <p:cNvPicPr>
             <a:picLocks noChangeAspect="1"/>
           </p:cNvPicPr>
@@ -6471,8 +6507,8 @@
         </p:blipFill>
         <p:spPr>
           <a:xfrm>
-            <a:off x="5750052" y="2194560"/>
-            <a:ext cx="661416" cy="426720"/>
+            <a:off x="7017512" y="2231136"/>
+            <a:ext cx="530352" cy="338328"/>
           </a:xfrm>
           <a:prstGeom prst="rect">
             <a:avLst/>
@@ -6481,7 +6517,171 @@
       </p:pic>
       <p:sp>
         <p:nvSpPr>
-          <p:cNvPr id="10" name="TextBox 9"/>
+          <p:cNvPr id="11" name="TextBox 10"/>
+          <p:cNvSpPr txBox="1"/>
+          <p:nvPr/>
+        </p:nvSpPr>
+        <p:spPr>
+          <a:xfrm>
+            <a:off x="7547864" y="2171700"/>
+            <a:ext cx="2270760" cy="457200"/>
+          </a:xfrm>
+          <a:prstGeom prst="rect">
+            <a:avLst/>
+          </a:prstGeom>
+          <a:noFill/>
+        </p:spPr>
+        <p:txBody>
+          <a:bodyPr wrap="none" lIns="45720" rIns="45720" tIns="18288" bIns="18288" anchor="ctr">
+            <a:spAutoFit/>
+          </a:bodyPr>
+          <a:lstStyle/>
+          <a:p>
+            <a:pPr algn="l"/>
+            <a:r>
+              <a:rPr sz="2600" b="0" i="0">
+                <a:solidFill>
+                  <a:srgbClr val="1A1A1A"/>
+                </a:solidFill>
+                <a:latin typeface="Century Schoolbook"/>
+              </a:rPr>
+              <a:t>  milligram.</a:t>
+            </a:r>
+          </a:p>
+        </p:txBody>
+      </p:sp>
+      <p:sp>
+        <p:nvSpPr>
+          <p:cNvPr id="12" name="TextBox 11"/>
+          <p:cNvSpPr txBox="1"/>
+          <p:nvPr/>
+        </p:nvSpPr>
+        <p:spPr>
+          <a:xfrm>
+            <a:off x="777240" y="2880360"/>
+            <a:ext cx="10607040" cy="465151"/>
+          </a:xfrm>
+          <a:prstGeom prst="rect">
+            <a:avLst/>
+          </a:prstGeom>
+          <a:noFill/>
+        </p:spPr>
+        <p:txBody>
+          <a:bodyPr wrap="square" lIns="45720" rIns="45720" tIns="18288" bIns="18288" anchor="t">
+            <a:spAutoFit/>
+          </a:bodyPr>
+          <a:lstStyle/>
+          <a:p>
+            <a:pPr algn="ctr"/>
+            <a:r>
+              <a:rPr sz="2600" b="0" i="0">
+                <a:solidFill>
+                  <a:srgbClr val="1A1A1A"/>
+                </a:solidFill>
+                <a:latin typeface="Century Schoolbook"/>
+              </a:rPr>
+              <a:t>Its width is 25 micrometers.</a:t>
+            </a:r>
+          </a:p>
+        </p:txBody>
+      </p:sp>
+      <p:sp>
+        <p:nvSpPr>
+          <p:cNvPr id="13" name="TextBox 12"/>
+          <p:cNvSpPr txBox="1"/>
+          <p:nvPr/>
+        </p:nvSpPr>
+        <p:spPr>
+          <a:xfrm>
+            <a:off x="3681983" y="3432379"/>
+            <a:ext cx="3987800" cy="457200"/>
+          </a:xfrm>
+          <a:prstGeom prst="rect">
+            <a:avLst/>
+          </a:prstGeom>
+          <a:noFill/>
+        </p:spPr>
+        <p:txBody>
+          <a:bodyPr wrap="none" lIns="45720" rIns="45720" tIns="18288" bIns="18288" anchor="ctr">
+            <a:spAutoFit/>
+          </a:bodyPr>
+          <a:lstStyle/>
+          <a:p>
+            <a:pPr algn="l"/>
+            <a:r>
+              <a:rPr sz="2600" b="0" i="0">
+                <a:solidFill>
+                  <a:srgbClr val="1A1A1A"/>
+                </a:solidFill>
+                <a:latin typeface="Century Schoolbook"/>
+              </a:rPr>
+              <a:t>What is the value of  </a:t>
+            </a:r>
+          </a:p>
+        </p:txBody>
+      </p:sp>
+      <p:pic>
+        <p:nvPicPr>
+          <p:cNvPr id="14" name="Picture 13" descr="39778c7e43004813.png"/>
+          <p:cNvPicPr>
+            <a:picLocks noChangeAspect="1"/>
+          </p:cNvPicPr>
+          <p:nvPr/>
+        </p:nvPicPr>
+        <p:blipFill>
+          <a:blip r:embed="rId2"/>
+          <a:stretch>
+            <a:fillRect/>
+          </a:stretch>
+        </p:blipFill>
+        <p:spPr>
+          <a:xfrm>
+            <a:off x="7532624" y="3491815"/>
+            <a:ext cx="530352" cy="338328"/>
+          </a:xfrm>
+          <a:prstGeom prst="rect">
+            <a:avLst/>
+          </a:prstGeom>
+        </p:spPr>
+      </p:pic>
+      <p:sp>
+        <p:nvSpPr>
+          <p:cNvPr id="15" name="TextBox 14"/>
+          <p:cNvSpPr txBox="1"/>
+          <p:nvPr/>
+        </p:nvSpPr>
+        <p:spPr>
+          <a:xfrm>
+            <a:off x="8062976" y="3432379"/>
+            <a:ext cx="553720" cy="457200"/>
+          </a:xfrm>
+          <a:prstGeom prst="rect">
+            <a:avLst/>
+          </a:prstGeom>
+          <a:noFill/>
+        </p:spPr>
+        <p:txBody>
+          <a:bodyPr wrap="none" lIns="45720" rIns="45720" tIns="18288" bIns="18288" anchor="ctr">
+            <a:spAutoFit/>
+          </a:bodyPr>
+          <a:lstStyle/>
+          <a:p>
+            <a:pPr algn="l"/>
+            <a:r>
+              <a:rPr sz="2600" b="0" i="0">
+                <a:solidFill>
+                  <a:srgbClr val="1A1A1A"/>
+                </a:solidFill>
+                <a:latin typeface="Century Schoolbook"/>
+              </a:rPr>
+              <a:t> ?</a:t>
+            </a:r>
+          </a:p>
+        </p:txBody>
+      </p:sp>
+      <p:sp>
+        <p:nvSpPr>
+          <p:cNvPr id="16" name="TextBox 15"/>
           <p:cNvSpPr txBox="1"/>
           <p:nvPr/>
         </p:nvSpPr>
@@ -6516,7 +6716,7 @@
       </p:sp>
       <p:sp>
         <p:nvSpPr>
-          <p:cNvPr id="11" name="TextBox 10"/>
+          <p:cNvPr id="17" name="TextBox 16"/>
           <p:cNvSpPr txBox="1"/>
           <p:nvPr/>
         </p:nvSpPr>
@@ -6812,9 +7012,44 @@
           </a:p>
         </p:txBody>
       </p:sp>
+      <p:sp>
+        <p:nvSpPr>
+          <p:cNvPr id="9" name="TextBox 8"/>
+          <p:cNvSpPr txBox="1"/>
+          <p:nvPr/>
+        </p:nvSpPr>
+        <p:spPr>
+          <a:xfrm>
+            <a:off x="2480056" y="2080260"/>
+            <a:ext cx="4674616" cy="457200"/>
+          </a:xfrm>
+          <a:prstGeom prst="rect">
+            <a:avLst/>
+          </a:prstGeom>
+          <a:noFill/>
+        </p:spPr>
+        <p:txBody>
+          <a:bodyPr wrap="none" lIns="45720" rIns="45720" tIns="18288" bIns="18288" anchor="ctr">
+            <a:spAutoFit/>
+          </a:bodyPr>
+          <a:lstStyle/>
+          <a:p>
+            <a:pPr algn="l"/>
+            <a:r>
+              <a:rPr sz="2600" b="0" i="0">
+                <a:solidFill>
+                  <a:srgbClr val="1A1A1A"/>
+                </a:solidFill>
+                <a:latin typeface="Century Schoolbook"/>
+              </a:rPr>
+              <a:t>A pollen grain's mass is  </a:t>
+            </a:r>
+          </a:p>
+        </p:txBody>
+      </p:sp>
       <p:pic>
         <p:nvPicPr>
-          <p:cNvPr id="9" name="Picture 8" descr="eced8f496d86b94c.png"/>
+          <p:cNvPr id="10" name="Picture 9" descr="39778c7e43004813.png"/>
           <p:cNvPicPr>
             <a:picLocks noChangeAspect="1"/>
           </p:cNvPicPr>
@@ -6828,8 +7063,8 @@
         </p:blipFill>
         <p:spPr>
           <a:xfrm>
-            <a:off x="5750052" y="2103120"/>
-            <a:ext cx="661416" cy="426720"/>
+            <a:off x="7017512" y="2139696"/>
+            <a:ext cx="530352" cy="338328"/>
           </a:xfrm>
           <a:prstGeom prst="rect">
             <a:avLst/>
@@ -6838,14 +7073,49 @@
       </p:pic>
       <p:sp>
         <p:nvSpPr>
-          <p:cNvPr id="10" name="TextBox 9"/>
-          <p:cNvSpPr txBox="1"/>
-          <p:nvPr/>
-        </p:nvSpPr>
-        <p:spPr>
-          <a:xfrm>
-            <a:off x="1828800" y="2804160"/>
-            <a:ext cx="8503920" cy="548640"/>
+          <p:cNvPr id="11" name="TextBox 10"/>
+          <p:cNvSpPr txBox="1"/>
+          <p:nvPr/>
+        </p:nvSpPr>
+        <p:spPr>
+          <a:xfrm>
+            <a:off x="7547864" y="2080260"/>
+            <a:ext cx="2270760" cy="457200"/>
+          </a:xfrm>
+          <a:prstGeom prst="rect">
+            <a:avLst/>
+          </a:prstGeom>
+          <a:noFill/>
+        </p:spPr>
+        <p:txBody>
+          <a:bodyPr wrap="none" lIns="45720" rIns="45720" tIns="18288" bIns="18288" anchor="ctr">
+            <a:spAutoFit/>
+          </a:bodyPr>
+          <a:lstStyle/>
+          <a:p>
+            <a:pPr algn="l"/>
+            <a:r>
+              <a:rPr sz="2600" b="0" i="0">
+                <a:solidFill>
+                  <a:srgbClr val="1A1A1A"/>
+                </a:solidFill>
+                <a:latin typeface="Century Schoolbook"/>
+              </a:rPr>
+              <a:t>  milligram.</a:t>
+            </a:r>
+          </a:p>
+        </p:txBody>
+      </p:sp>
+      <p:sp>
+        <p:nvSpPr>
+          <p:cNvPr id="12" name="TextBox 11"/>
+          <p:cNvSpPr txBox="1"/>
+          <p:nvPr/>
+        </p:nvSpPr>
+        <p:spPr>
+          <a:xfrm>
+            <a:off x="777240" y="2788920"/>
+            <a:ext cx="10607040" cy="465151"/>
           </a:xfrm>
           <a:prstGeom prst="rect">
             <a:avLst/>
@@ -6860,64 +7130,193 @@
           <a:p>
             <a:pPr algn="ctr"/>
             <a:r>
-              <a:rPr sz="2400" b="0" i="0">
-                <a:solidFill>
-                  <a:srgbClr val="6B6B6B"/>
-                </a:solidFill>
-                <a:latin typeface="Century Schoolbook"/>
-              </a:rPr>
-              <a:t>1 over 2</a:t>
-            </a:r>
-            <a:r>
-              <a:rPr sz="2400" b="0" i="0" baseline="30000">
-                <a:solidFill>
-                  <a:srgbClr val="6B6B6B"/>
-                </a:solidFill>
-                <a:latin typeface="Century Schoolbook"/>
-              </a:rPr>
-              <a:t>4</a:t>
-            </a:r>
-          </a:p>
-        </p:txBody>
-      </p:sp>
-      <p:sp>
-        <p:nvSpPr>
-          <p:cNvPr id="11" name="TextBox 10"/>
-          <p:cNvSpPr txBox="1"/>
-          <p:nvPr/>
-        </p:nvSpPr>
-        <p:spPr>
-          <a:xfrm>
-            <a:off x="4940808" y="4716780"/>
-            <a:ext cx="1920240" cy="548640"/>
-          </a:xfrm>
-          <a:prstGeom prst="rect">
-            <a:avLst/>
-          </a:prstGeom>
-          <a:noFill/>
-        </p:spPr>
-        <p:txBody>
-          <a:bodyPr wrap="square" lIns="45720" rIns="45720" tIns="18288" bIns="18288" anchor="ctr">
+              <a:rPr sz="2600" b="0" i="0">
+                <a:solidFill>
+                  <a:srgbClr val="1A1A1A"/>
+                </a:solidFill>
+                <a:latin typeface="Century Schoolbook"/>
+              </a:rPr>
+              <a:t>Its width is 25 micrometers.</a:t>
+            </a:r>
+          </a:p>
+        </p:txBody>
+      </p:sp>
+      <p:sp>
+        <p:nvSpPr>
+          <p:cNvPr id="13" name="TextBox 12"/>
+          <p:cNvSpPr txBox="1"/>
+          <p:nvPr/>
+        </p:nvSpPr>
+        <p:spPr>
+          <a:xfrm>
+            <a:off x="3681983" y="3340939"/>
+            <a:ext cx="3987800" cy="457200"/>
+          </a:xfrm>
+          <a:prstGeom prst="rect">
+            <a:avLst/>
+          </a:prstGeom>
+          <a:noFill/>
+        </p:spPr>
+        <p:txBody>
+          <a:bodyPr wrap="none" lIns="45720" rIns="45720" tIns="18288" bIns="18288" anchor="ctr">
             <a:spAutoFit/>
           </a:bodyPr>
           <a:lstStyle/>
           <a:p>
             <a:pPr algn="l"/>
             <a:r>
-              <a:rPr sz="3200" b="1" i="0">
-                <a:solidFill>
-                  <a:srgbClr val="9E1B32"/>
-                </a:solidFill>
-                <a:latin typeface="Century Schoolbook"/>
-              </a:rPr>
-              <a:t>Answer:</a:t>
+              <a:rPr sz="2600" b="0" i="0">
+                <a:solidFill>
+                  <a:srgbClr val="1A1A1A"/>
+                </a:solidFill>
+                <a:latin typeface="Century Schoolbook"/>
+              </a:rPr>
+              <a:t>What is the value of  </a:t>
             </a:r>
           </a:p>
         </p:txBody>
       </p:sp>
       <p:pic>
         <p:nvPicPr>
-          <p:cNvPr id="12" name="Picture 11" descr="01c405a7ecee3ac5.png"/>
+          <p:cNvPr id="14" name="Picture 13" descr="39778c7e43004813.png"/>
+          <p:cNvPicPr>
+            <a:picLocks noChangeAspect="1"/>
+          </p:cNvPicPr>
+          <p:nvPr/>
+        </p:nvPicPr>
+        <p:blipFill>
+          <a:blip r:embed="rId2"/>
+          <a:stretch>
+            <a:fillRect/>
+          </a:stretch>
+        </p:blipFill>
+        <p:spPr>
+          <a:xfrm>
+            <a:off x="7532624" y="3400375"/>
+            <a:ext cx="530352" cy="338328"/>
+          </a:xfrm>
+          <a:prstGeom prst="rect">
+            <a:avLst/>
+          </a:prstGeom>
+        </p:spPr>
+      </p:pic>
+      <p:sp>
+        <p:nvSpPr>
+          <p:cNvPr id="15" name="TextBox 14"/>
+          <p:cNvSpPr txBox="1"/>
+          <p:nvPr/>
+        </p:nvSpPr>
+        <p:spPr>
+          <a:xfrm>
+            <a:off x="8062976" y="3340939"/>
+            <a:ext cx="553720" cy="457200"/>
+          </a:xfrm>
+          <a:prstGeom prst="rect">
+            <a:avLst/>
+          </a:prstGeom>
+          <a:noFill/>
+        </p:spPr>
+        <p:txBody>
+          <a:bodyPr wrap="none" lIns="45720" rIns="45720" tIns="18288" bIns="18288" anchor="ctr">
+            <a:spAutoFit/>
+          </a:bodyPr>
+          <a:lstStyle/>
+          <a:p>
+            <a:pPr algn="l"/>
+            <a:r>
+              <a:rPr sz="2600" b="0" i="0">
+                <a:solidFill>
+                  <a:srgbClr val="1A1A1A"/>
+                </a:solidFill>
+                <a:latin typeface="Century Schoolbook"/>
+              </a:rPr>
+              <a:t> ?</a:t>
+            </a:r>
+          </a:p>
+        </p:txBody>
+      </p:sp>
+      <p:sp>
+        <p:nvSpPr>
+          <p:cNvPr id="16" name="TextBox 15"/>
+          <p:cNvSpPr txBox="1"/>
+          <p:nvPr/>
+        </p:nvSpPr>
+        <p:spPr>
+          <a:xfrm>
+            <a:off x="1828800" y="4095319"/>
+            <a:ext cx="8503920" cy="548640"/>
+          </a:xfrm>
+          <a:prstGeom prst="rect">
+            <a:avLst/>
+          </a:prstGeom>
+          <a:noFill/>
+        </p:spPr>
+        <p:txBody>
+          <a:bodyPr wrap="square" lIns="45720" rIns="45720" tIns="18288" bIns="18288" anchor="t">
+            <a:spAutoFit/>
+          </a:bodyPr>
+          <a:lstStyle/>
+          <a:p>
+            <a:pPr algn="ctr"/>
+            <a:r>
+              <a:rPr sz="2400" b="0" i="0">
+                <a:solidFill>
+                  <a:srgbClr val="6B6B6B"/>
+                </a:solidFill>
+                <a:latin typeface="Century Schoolbook"/>
+              </a:rPr>
+              <a:t>1 over 2</a:t>
+            </a:r>
+            <a:r>
+              <a:rPr sz="2400" b="0" i="0" baseline="30000">
+                <a:solidFill>
+                  <a:srgbClr val="6B6B6B"/>
+                </a:solidFill>
+                <a:latin typeface="Century Schoolbook"/>
+              </a:rPr>
+              <a:t>4</a:t>
+            </a:r>
+          </a:p>
+        </p:txBody>
+      </p:sp>
+      <p:sp>
+        <p:nvSpPr>
+          <p:cNvPr id="17" name="TextBox 16"/>
+          <p:cNvSpPr txBox="1"/>
+          <p:nvPr/>
+        </p:nvSpPr>
+        <p:spPr>
+          <a:xfrm>
+            <a:off x="4940808" y="4880179"/>
+            <a:ext cx="1920240" cy="548640"/>
+          </a:xfrm>
+          <a:prstGeom prst="rect">
+            <a:avLst/>
+          </a:prstGeom>
+          <a:noFill/>
+        </p:spPr>
+        <p:txBody>
+          <a:bodyPr wrap="square" lIns="45720" rIns="45720" tIns="18288" bIns="18288" anchor="ctr">
+            <a:spAutoFit/>
+          </a:bodyPr>
+          <a:lstStyle/>
+          <a:p>
+            <a:pPr algn="l"/>
+            <a:r>
+              <a:rPr sz="3200" b="1" i="0">
+                <a:solidFill>
+                  <a:srgbClr val="9E1B32"/>
+                </a:solidFill>
+                <a:latin typeface="Century Schoolbook"/>
+              </a:rPr>
+              <a:t>Answer:</a:t>
+            </a:r>
+          </a:p>
+        </p:txBody>
+      </p:sp>
+      <p:pic>
+        <p:nvPicPr>
+          <p:cNvPr id="18" name="Picture 17" descr="01c405a7ecee3ac5.png"/>
           <p:cNvPicPr>
             <a:picLocks noChangeAspect="1"/>
           </p:cNvPicPr>
@@ -6931,7 +7330,7 @@
         </p:blipFill>
         <p:spPr>
           <a:xfrm>
-            <a:off x="6861048" y="4663440"/>
+            <a:off x="6861048" y="4826839"/>
             <a:ext cx="359664" cy="655320"/>
           </a:xfrm>
           <a:prstGeom prst="rect">
@@ -14571,7 +14970,7 @@
                 </a:solidFill>
                 <a:latin typeface="Century Schoolbook"/>
               </a:rPr>
-              <a:t>IXL</a:t>
+              <a:t>Independent Set</a:t>
             </a:r>
           </a:p>
         </p:txBody>
@@ -14676,7 +15075,7 @@
                 </a:solidFill>
                 <a:latin typeface="Century Schoolbook"/>
               </a:rPr>
-              <a:t>Last five minutes.</a:t>
+              <a:t>Six questions. On your own, in silence.</a:t>
             </a:r>
           </a:p>
         </p:txBody>
@@ -14794,6 +15193,479 @@
         </p:nvSpPr>
         <p:spPr>
           <a:xfrm>
+            <a:off x="960120" y="2011680"/>
+            <a:ext cx="548640" cy="356616"/>
+          </a:xfrm>
+          <a:prstGeom prst="rect">
+            <a:avLst/>
+          </a:prstGeom>
+          <a:noFill/>
+        </p:spPr>
+        <p:txBody>
+          <a:bodyPr wrap="square" lIns="45720" rIns="45720" tIns="18288" bIns="18288" anchor="t">
+            <a:spAutoFit/>
+          </a:bodyPr>
+          <a:lstStyle/>
+          <a:p>
+            <a:pPr algn="l"/>
+            <a:r>
+              <a:rPr sz="2100" b="1" i="0">
+                <a:solidFill>
+                  <a:srgbClr val="0B5394"/>
+                </a:solidFill>
+                <a:latin typeface="Century Schoolbook"/>
+              </a:rPr>
+              <a:t>1.</a:t>
+            </a:r>
+          </a:p>
+        </p:txBody>
+      </p:sp>
+      <p:sp>
+        <p:nvSpPr>
+          <p:cNvPr id="10" name="TextBox 9"/>
+          <p:cNvSpPr txBox="1"/>
+          <p:nvPr/>
+        </p:nvSpPr>
+        <p:spPr>
+          <a:xfrm>
+            <a:off x="1554480" y="2011680"/>
+            <a:ext cx="9829800" cy="411480"/>
+          </a:xfrm>
+          <a:prstGeom prst="rect">
+            <a:avLst/>
+          </a:prstGeom>
+          <a:noFill/>
+        </p:spPr>
+        <p:txBody>
+          <a:bodyPr wrap="square" lIns="45720" rIns="45720" tIns="18288" bIns="18288" anchor="t">
+            <a:spAutoFit/>
+          </a:bodyPr>
+          <a:lstStyle/>
+          <a:p>
+            <a:pPr algn="l"/>
+            <a:r>
+              <a:rPr sz="2100" b="0" i="0">
+                <a:solidFill>
+                  <a:srgbClr val="1A1A1A"/>
+                </a:solidFill>
+                <a:latin typeface="Century Schoolbook"/>
+              </a:rPr>
+              <a:t>Six questions. Work down the page.</a:t>
+            </a:r>
+          </a:p>
+        </p:txBody>
+      </p:sp>
+      <p:sp>
+        <p:nvSpPr>
+          <p:cNvPr id="11" name="TextBox 10"/>
+          <p:cNvSpPr txBox="1"/>
+          <p:nvPr/>
+        </p:nvSpPr>
+        <p:spPr>
+          <a:xfrm>
+            <a:off x="960120" y="2551176"/>
+            <a:ext cx="548640" cy="356616"/>
+          </a:xfrm>
+          <a:prstGeom prst="rect">
+            <a:avLst/>
+          </a:prstGeom>
+          <a:noFill/>
+        </p:spPr>
+        <p:txBody>
+          <a:bodyPr wrap="square" lIns="45720" rIns="45720" tIns="18288" bIns="18288" anchor="t">
+            <a:spAutoFit/>
+          </a:bodyPr>
+          <a:lstStyle/>
+          <a:p>
+            <a:pPr algn="l"/>
+            <a:r>
+              <a:rPr sz="2100" b="1" i="0">
+                <a:solidFill>
+                  <a:srgbClr val="0B5394"/>
+                </a:solidFill>
+                <a:latin typeface="Century Schoolbook"/>
+              </a:rPr>
+              <a:t>2.</a:t>
+            </a:r>
+          </a:p>
+        </p:txBody>
+      </p:sp>
+      <p:sp>
+        <p:nvSpPr>
+          <p:cNvPr id="12" name="TextBox 11"/>
+          <p:cNvSpPr txBox="1"/>
+          <p:nvPr/>
+        </p:nvSpPr>
+        <p:spPr>
+          <a:xfrm>
+            <a:off x="1554480" y="2551176"/>
+            <a:ext cx="9829800" cy="411480"/>
+          </a:xfrm>
+          <a:prstGeom prst="rect">
+            <a:avLst/>
+          </a:prstGeom>
+          <a:noFill/>
+        </p:spPr>
+        <p:txBody>
+          <a:bodyPr wrap="square" lIns="45720" rIns="45720" tIns="18288" bIns="18288" anchor="t">
+            <a:spAutoFit/>
+          </a:bodyPr>
+          <a:lstStyle/>
+          <a:p>
+            <a:pPr algn="l"/>
+            <a:r>
+              <a:rPr sz="2100" b="0" i="0">
+                <a:solidFill>
+                  <a:srgbClr val="1A1A1A"/>
+                </a:solidFill>
+                <a:latin typeface="Century Schoolbook"/>
+              </a:rPr>
+              <a:t>Show the step that does the work, not just the answer.</a:t>
+            </a:r>
+          </a:p>
+        </p:txBody>
+      </p:sp>
+      <p:sp>
+        <p:nvSpPr>
+          <p:cNvPr id="13" name="TextBox 12"/>
+          <p:cNvSpPr txBox="1"/>
+          <p:nvPr/>
+        </p:nvSpPr>
+        <p:spPr>
+          <a:xfrm>
+            <a:off x="960120" y="3090672"/>
+            <a:ext cx="548640" cy="356616"/>
+          </a:xfrm>
+          <a:prstGeom prst="rect">
+            <a:avLst/>
+          </a:prstGeom>
+          <a:noFill/>
+        </p:spPr>
+        <p:txBody>
+          <a:bodyPr wrap="square" lIns="45720" rIns="45720" tIns="18288" bIns="18288" anchor="t">
+            <a:spAutoFit/>
+          </a:bodyPr>
+          <a:lstStyle/>
+          <a:p>
+            <a:pPr algn="l"/>
+            <a:r>
+              <a:rPr sz="2100" b="1" i="0">
+                <a:solidFill>
+                  <a:srgbClr val="0B5394"/>
+                </a:solidFill>
+                <a:latin typeface="Century Schoolbook"/>
+              </a:rPr>
+              <a:t>3.</a:t>
+            </a:r>
+          </a:p>
+        </p:txBody>
+      </p:sp>
+      <p:sp>
+        <p:nvSpPr>
+          <p:cNvPr id="14" name="TextBox 13"/>
+          <p:cNvSpPr txBox="1"/>
+          <p:nvPr/>
+        </p:nvSpPr>
+        <p:spPr>
+          <a:xfrm>
+            <a:off x="1554480" y="3090672"/>
+            <a:ext cx="9829800" cy="411480"/>
+          </a:xfrm>
+          <a:prstGeom prst="rect">
+            <a:avLst/>
+          </a:prstGeom>
+          <a:noFill/>
+        </p:spPr>
+        <p:txBody>
+          <a:bodyPr wrap="square" lIns="45720" rIns="45720" tIns="18288" bIns="18288" anchor="t">
+            <a:spAutoFit/>
+          </a:bodyPr>
+          <a:lstStyle/>
+          <a:p>
+            <a:pPr algn="l"/>
+            <a:r>
+              <a:rPr sz="2100" b="0" i="0">
+                <a:solidFill>
+                  <a:srgbClr val="1A1A1A"/>
+                </a:solidFill>
+                <a:latin typeface="Century Schoolbook"/>
+              </a:rPr>
+              <a:t>Silence until the six minutes are up.</a:t>
+            </a:r>
+          </a:p>
+        </p:txBody>
+      </p:sp>
+    </p:spTree>
+  </p:cSld>
+  <p:clrMapOvr>
+    <a:masterClrMapping/>
+  </p:clrMapOvr>
+</p:sld>
+</file>
+
+<file path=ppt/slides/slide34.xml><?xml version="1.0" encoding="utf-8"?>
+<p:sld xmlns:a="http://schemas.openxmlformats.org/drawingml/2006/main" xmlns:p="http://schemas.openxmlformats.org/presentationml/2006/main" xmlns:r="http://schemas.openxmlformats.org/officeDocument/2006/relationships">
+  <p:cSld>
+    <p:spTree>
+      <p:nvGrpSpPr>
+        <p:cNvPr id="1" name=""/>
+        <p:cNvGrpSpPr/>
+        <p:nvPr/>
+      </p:nvGrpSpPr>
+      <p:grpSpPr/>
+      <p:sp>
+        <p:nvSpPr>
+          <p:cNvPr id="2" name="TextBox 1"/>
+          <p:cNvSpPr txBox="1"/>
+          <p:nvPr/>
+        </p:nvSpPr>
+        <p:spPr>
+          <a:xfrm>
+            <a:off x="777240" y="365760"/>
+            <a:ext cx="10607040" cy="640080"/>
+          </a:xfrm>
+          <a:prstGeom prst="rect">
+            <a:avLst/>
+          </a:prstGeom>
+          <a:noFill/>
+        </p:spPr>
+        <p:txBody>
+          <a:bodyPr wrap="square" lIns="45720" rIns="45720" tIns="18288" bIns="18288" anchor="t">
+            <a:spAutoFit/>
+          </a:bodyPr>
+          <a:lstStyle/>
+          <a:p>
+            <a:pPr algn="l"/>
+            <a:r>
+              <a:rPr sz="3600" b="1" i="0">
+                <a:solidFill>
+                  <a:srgbClr val="1A1A1A"/>
+                </a:solidFill>
+                <a:latin typeface="Century Schoolbook"/>
+              </a:rPr>
+              <a:t>IXL</a:t>
+            </a:r>
+          </a:p>
+        </p:txBody>
+      </p:sp>
+      <p:cxnSp>
+        <p:nvCxnSpPr>
+          <p:cNvPr id="3" name="Connector 2"/>
+          <p:cNvCxnSpPr/>
+          <p:nvPr/>
+        </p:nvCxnSpPr>
+        <p:spPr>
+          <a:xfrm>
+            <a:off x="777240" y="1097280"/>
+            <a:ext cx="10607040" cy="0"/>
+          </a:xfrm>
+          <a:prstGeom prst="line">
+            <a:avLst/>
+          </a:prstGeom>
+          <a:ln w="19050">
+            <a:solidFill>
+              <a:srgbClr val="1A1A1A"/>
+            </a:solidFill>
+          </a:ln>
+        </p:spPr>
+        <p:style>
+          <a:lnRef idx="2">
+            <a:schemeClr val="accent1"/>
+          </a:lnRef>
+          <a:fillRef idx="0">
+            <a:schemeClr val="accent1"/>
+          </a:fillRef>
+          <a:effectRef idx="1">
+            <a:schemeClr val="accent1"/>
+          </a:effectRef>
+          <a:fontRef idx="minor">
+            <a:schemeClr val="tx1"/>
+          </a:fontRef>
+        </p:style>
+      </p:cxnSp>
+      <p:cxnSp>
+        <p:nvCxnSpPr>
+          <p:cNvPr id="4" name="Connector 3"/>
+          <p:cNvCxnSpPr/>
+          <p:nvPr/>
+        </p:nvCxnSpPr>
+        <p:spPr>
+          <a:xfrm>
+            <a:off x="777240" y="1179576"/>
+            <a:ext cx="10607040" cy="0"/>
+          </a:xfrm>
+          <a:prstGeom prst="line">
+            <a:avLst/>
+          </a:prstGeom>
+          <a:ln w="9525">
+            <a:solidFill>
+              <a:srgbClr val="1A1A1A"/>
+            </a:solidFill>
+          </a:ln>
+        </p:spPr>
+        <p:style>
+          <a:lnRef idx="2">
+            <a:schemeClr val="accent1"/>
+          </a:lnRef>
+          <a:fillRef idx="0">
+            <a:schemeClr val="accent1"/>
+          </a:fillRef>
+          <a:effectRef idx="1">
+            <a:schemeClr val="accent1"/>
+          </a:effectRef>
+          <a:fontRef idx="minor">
+            <a:schemeClr val="tx1"/>
+          </a:fontRef>
+        </p:style>
+      </p:cxnSp>
+      <p:sp>
+        <p:nvSpPr>
+          <p:cNvPr id="5" name="TextBox 4"/>
+          <p:cNvSpPr txBox="1"/>
+          <p:nvPr/>
+        </p:nvSpPr>
+        <p:spPr>
+          <a:xfrm>
+            <a:off x="777240" y="1261872"/>
+            <a:ext cx="10607040" cy="310896"/>
+          </a:xfrm>
+          <a:prstGeom prst="rect">
+            <a:avLst/>
+          </a:prstGeom>
+          <a:noFill/>
+        </p:spPr>
+        <p:txBody>
+          <a:bodyPr wrap="square" lIns="45720" rIns="45720" tIns="18288" bIns="18288" anchor="t">
+            <a:spAutoFit/>
+          </a:bodyPr>
+          <a:lstStyle/>
+          <a:p>
+            <a:pPr algn="l"/>
+            <a:r>
+              <a:rPr sz="1700" b="0" i="1">
+                <a:solidFill>
+                  <a:srgbClr val="6B6B6B"/>
+                </a:solidFill>
+                <a:latin typeface="Century Schoolbook"/>
+              </a:rPr>
+              <a:t>Last five minutes.</a:t>
+            </a:r>
+          </a:p>
+        </p:txBody>
+      </p:sp>
+      <p:cxnSp>
+        <p:nvCxnSpPr>
+          <p:cNvPr id="6" name="Connector 5"/>
+          <p:cNvCxnSpPr/>
+          <p:nvPr/>
+        </p:nvCxnSpPr>
+        <p:spPr>
+          <a:xfrm>
+            <a:off x="777240" y="6199632"/>
+            <a:ext cx="10607040" cy="0"/>
+          </a:xfrm>
+          <a:prstGeom prst="line">
+            <a:avLst/>
+          </a:prstGeom>
+          <a:ln w="9525">
+            <a:solidFill>
+              <a:srgbClr val="6B6B6B"/>
+            </a:solidFill>
+          </a:ln>
+        </p:spPr>
+        <p:style>
+          <a:lnRef idx="2">
+            <a:schemeClr val="accent1"/>
+          </a:lnRef>
+          <a:fillRef idx="0">
+            <a:schemeClr val="accent1"/>
+          </a:fillRef>
+          <a:effectRef idx="1">
+            <a:schemeClr val="accent1"/>
+          </a:effectRef>
+          <a:fontRef idx="minor">
+            <a:schemeClr val="tx1"/>
+          </a:fontRef>
+        </p:style>
+      </p:cxnSp>
+      <p:sp>
+        <p:nvSpPr>
+          <p:cNvPr id="7" name="TextBox 6"/>
+          <p:cNvSpPr txBox="1"/>
+          <p:nvPr/>
+        </p:nvSpPr>
+        <p:spPr>
+          <a:xfrm>
+            <a:off x="777240" y="6272784"/>
+            <a:ext cx="9692640" cy="274320"/>
+          </a:xfrm>
+          <a:prstGeom prst="rect">
+            <a:avLst/>
+          </a:prstGeom>
+          <a:noFill/>
+        </p:spPr>
+        <p:txBody>
+          <a:bodyPr wrap="square" lIns="45720" rIns="45720" tIns="18288" bIns="18288" anchor="t">
+            <a:spAutoFit/>
+          </a:bodyPr>
+          <a:lstStyle/>
+          <a:p>
+            <a:pPr algn="l"/>
+            <a:r>
+              <a:rPr sz="1100" b="0" i="1">
+                <a:solidFill>
+                  <a:srgbClr val="6B6B6B"/>
+                </a:solidFill>
+                <a:latin typeface="Century Schoolbook"/>
+              </a:rPr>
+              <a:t>Grade 7 Accelerated · Unit 3 · Lesson 4 — Negative Exponent Law</a:t>
+            </a:r>
+          </a:p>
+        </p:txBody>
+      </p:sp>
+      <p:sp>
+        <p:nvSpPr>
+          <p:cNvPr id="8" name="TextBox 7"/>
+          <p:cNvSpPr txBox="1"/>
+          <p:nvPr/>
+        </p:nvSpPr>
+        <p:spPr>
+          <a:xfrm>
+            <a:off x="10744200" y="6272784"/>
+            <a:ext cx="640080" cy="274320"/>
+          </a:xfrm>
+          <a:prstGeom prst="rect">
+            <a:avLst/>
+          </a:prstGeom>
+          <a:noFill/>
+        </p:spPr>
+        <p:txBody>
+          <a:bodyPr wrap="square" lIns="45720" rIns="45720" tIns="18288" bIns="18288" anchor="t">
+            <a:spAutoFit/>
+          </a:bodyPr>
+          <a:lstStyle/>
+          <a:p>
+            <a:pPr algn="r"/>
+            <a:r>
+              <a:rPr sz="1100" b="0" i="0">
+                <a:solidFill>
+                  <a:srgbClr val="6B6B6B"/>
+                </a:solidFill>
+                <a:latin typeface="Century Schoolbook"/>
+              </a:rPr>
+              <a:t>34</a:t>
+            </a:r>
+          </a:p>
+        </p:txBody>
+      </p:sp>
+      <p:sp>
+        <p:nvSpPr>
+          <p:cNvPr id="9" name="TextBox 8"/>
+          <p:cNvSpPr txBox="1"/>
+          <p:nvPr/>
+        </p:nvSpPr>
+        <p:spPr>
+          <a:xfrm>
             <a:off x="960120" y="1828800"/>
             <a:ext cx="548640" cy="356616"/>
           </a:xfrm>
@@ -14991,7 +15863,7 @@
                 </a:solidFill>
                 <a:latin typeface="Century Schoolbook"/>
               </a:rPr>
-              <a:t>Stop at a SmartScore of 67 on each skill. Whatever you do not finish is tonight's practice.</a:t>
+              <a:t>Every skill listed is required, to a SmartScore of 67. Due at the start of the next class.</a:t>
             </a:r>
           </a:p>
         </p:txBody>
@@ -15026,7 +15898,7 @@
                 </a:solidFill>
                 <a:latin typeface="Century Schoolbook"/>
               </a:rPr>
-              <a:t>Today's skills</a:t>
+              <a:t>Today's skills — all required</a:t>
             </a:r>
           </a:p>
         </p:txBody>

--- a/a7/build/out/u3/A7 3.04  Slides.pptx
+++ b/a7/build/out/u3/A7 3.04  Slides.pptx
@@ -6464,7 +6464,7 @@
         </p:nvSpPr>
         <p:spPr>
           <a:xfrm>
-            <a:off x="2480056" y="2171700"/>
+            <a:off x="2484628" y="2171700"/>
             <a:ext cx="4674616" cy="457200"/>
           </a:xfrm>
           <a:prstGeom prst="rect">
@@ -6493,7 +6493,7 @@
       </p:sp>
       <p:pic>
         <p:nvPicPr>
-          <p:cNvPr id="10" name="Picture 9" descr="39778c7e43004813.png"/>
+          <p:cNvPr id="10" name="Picture 9" descr="c9adefc290aa5b44.png"/>
           <p:cNvPicPr>
             <a:picLocks noChangeAspect="1"/>
           </p:cNvPicPr>
@@ -6507,8 +6507,8 @@
         </p:blipFill>
         <p:spPr>
           <a:xfrm>
-            <a:off x="7017512" y="2231136"/>
-            <a:ext cx="530352" cy="338328"/>
+            <a:off x="7022084" y="2234184"/>
+            <a:ext cx="521207" cy="332232"/>
           </a:xfrm>
           <a:prstGeom prst="rect">
             <a:avLst/>
@@ -6523,7 +6523,7 @@
         </p:nvSpPr>
         <p:spPr>
           <a:xfrm>
-            <a:off x="7547864" y="2171700"/>
+            <a:off x="7543292" y="2171700"/>
             <a:ext cx="2270760" cy="457200"/>
           </a:xfrm>
           <a:prstGeom prst="rect">
@@ -6545,7 +6545,7 @@
                 </a:solidFill>
                 <a:latin typeface="Century Schoolbook"/>
               </a:rPr>
-              <a:t>  milligram.</a:t>
+              <a:t>  microgram.</a:t>
             </a:r>
           </a:p>
         </p:txBody>
@@ -6593,7 +6593,7 @@
         </p:nvSpPr>
         <p:spPr>
           <a:xfrm>
-            <a:off x="3681983" y="3432379"/>
+            <a:off x="3686555" y="3432379"/>
             <a:ext cx="3987800" cy="457200"/>
           </a:xfrm>
           <a:prstGeom prst="rect">
@@ -6622,7 +6622,7 @@
       </p:sp>
       <p:pic>
         <p:nvPicPr>
-          <p:cNvPr id="14" name="Picture 13" descr="39778c7e43004813.png"/>
+          <p:cNvPr id="14" name="Picture 13" descr="c9adefc290aa5b44.png"/>
           <p:cNvPicPr>
             <a:picLocks noChangeAspect="1"/>
           </p:cNvPicPr>
@@ -6636,8 +6636,8 @@
         </p:blipFill>
         <p:spPr>
           <a:xfrm>
-            <a:off x="7532624" y="3491815"/>
-            <a:ext cx="530352" cy="338328"/>
+            <a:off x="7537196" y="3494863"/>
+            <a:ext cx="521207" cy="332232"/>
           </a:xfrm>
           <a:prstGeom prst="rect">
             <a:avLst/>
@@ -6652,7 +6652,7 @@
         </p:nvSpPr>
         <p:spPr>
           <a:xfrm>
-            <a:off x="8062976" y="3432379"/>
+            <a:off x="8058404" y="3432379"/>
             <a:ext cx="553720" cy="457200"/>
           </a:xfrm>
           <a:prstGeom prst="rect">
@@ -7020,7 +7020,7 @@
         </p:nvSpPr>
         <p:spPr>
           <a:xfrm>
-            <a:off x="2480056" y="2080260"/>
+            <a:off x="2484628" y="2080260"/>
             <a:ext cx="4674616" cy="457200"/>
           </a:xfrm>
           <a:prstGeom prst="rect">
@@ -7049,7 +7049,7 @@
       </p:sp>
       <p:pic>
         <p:nvPicPr>
-          <p:cNvPr id="10" name="Picture 9" descr="39778c7e43004813.png"/>
+          <p:cNvPr id="10" name="Picture 9" descr="c9adefc290aa5b44.png"/>
           <p:cNvPicPr>
             <a:picLocks noChangeAspect="1"/>
           </p:cNvPicPr>
@@ -7063,8 +7063,8 @@
         </p:blipFill>
         <p:spPr>
           <a:xfrm>
-            <a:off x="7017512" y="2139696"/>
-            <a:ext cx="530352" cy="338328"/>
+            <a:off x="7022084" y="2142744"/>
+            <a:ext cx="521207" cy="332232"/>
           </a:xfrm>
           <a:prstGeom prst="rect">
             <a:avLst/>
@@ -7079,7 +7079,7 @@
         </p:nvSpPr>
         <p:spPr>
           <a:xfrm>
-            <a:off x="7547864" y="2080260"/>
+            <a:off x="7543292" y="2080260"/>
             <a:ext cx="2270760" cy="457200"/>
           </a:xfrm>
           <a:prstGeom prst="rect">
@@ -7101,7 +7101,7 @@
                 </a:solidFill>
                 <a:latin typeface="Century Schoolbook"/>
               </a:rPr>
-              <a:t>  milligram.</a:t>
+              <a:t>  microgram.</a:t>
             </a:r>
           </a:p>
         </p:txBody>
@@ -7149,7 +7149,7 @@
         </p:nvSpPr>
         <p:spPr>
           <a:xfrm>
-            <a:off x="3681983" y="3340939"/>
+            <a:off x="3686555" y="3340939"/>
             <a:ext cx="3987800" cy="457200"/>
           </a:xfrm>
           <a:prstGeom prst="rect">
@@ -7178,7 +7178,7 @@
       </p:sp>
       <p:pic>
         <p:nvPicPr>
-          <p:cNvPr id="14" name="Picture 13" descr="39778c7e43004813.png"/>
+          <p:cNvPr id="14" name="Picture 13" descr="c9adefc290aa5b44.png"/>
           <p:cNvPicPr>
             <a:picLocks noChangeAspect="1"/>
           </p:cNvPicPr>
@@ -7192,8 +7192,8 @@
         </p:blipFill>
         <p:spPr>
           <a:xfrm>
-            <a:off x="7532624" y="3400375"/>
-            <a:ext cx="530352" cy="338328"/>
+            <a:off x="7537196" y="3403423"/>
+            <a:ext cx="521207" cy="332232"/>
           </a:xfrm>
           <a:prstGeom prst="rect">
             <a:avLst/>
@@ -7208,7 +7208,7 @@
         </p:nvSpPr>
         <p:spPr>
           <a:xfrm>
-            <a:off x="8062976" y="3340939"/>
+            <a:off x="8058404" y="3340939"/>
             <a:ext cx="553720" cy="457200"/>
           </a:xfrm>
           <a:prstGeom prst="rect">
@@ -7274,7 +7274,7 @@
                 </a:solidFill>
                 <a:latin typeface="Century Schoolbook"/>
               </a:rPr>
-              <a:t>4</a:t>
+              <a:t>7</a:t>
             </a:r>
           </a:p>
         </p:txBody>
@@ -7287,7 +7287,7 @@
         </p:nvSpPr>
         <p:spPr>
           <a:xfrm>
-            <a:off x="4940808" y="4880179"/>
+            <a:off x="4852416" y="4878655"/>
             <a:ext cx="1920240" cy="548640"/>
           </a:xfrm>
           <a:prstGeom prst="rect">
@@ -7316,7 +7316,7 @@
       </p:sp>
       <p:pic>
         <p:nvPicPr>
-          <p:cNvPr id="18" name="Picture 17" descr="01c405a7ecee3ac5.png"/>
+          <p:cNvPr id="18" name="Picture 17" descr="a33d1cde69a4331a.png"/>
           <p:cNvPicPr>
             <a:picLocks noChangeAspect="1"/>
           </p:cNvPicPr>
@@ -7330,8 +7330,8 @@
         </p:blipFill>
         <p:spPr>
           <a:xfrm>
-            <a:off x="6861048" y="4826839"/>
-            <a:ext cx="359664" cy="655320"/>
+            <a:off x="6772656" y="4826839"/>
+            <a:ext cx="536448" cy="652272"/>
           </a:xfrm>
           <a:prstGeom prst="rect">
             <a:avLst/>

--- a/a7/build/out/u3/A7 3.04  Slides.pptx
+++ b/a7/build/out/u3/A7 3.04  Slides.pptx
@@ -3835,7 +3835,7 @@
       </p:sp>
       <p:pic>
         <p:nvPicPr>
-          <p:cNvPr id="9" name="Picture 8" descr="5d1f1a56c863e514.png"/>
+          <p:cNvPr id="9" name="Picture 8" descr="04c00c9d3a9d2478.png"/>
           <p:cNvPicPr>
             <a:picLocks noChangeAspect="1"/>
           </p:cNvPicPr>
@@ -3849,8 +3849,8 @@
         </p:blipFill>
         <p:spPr>
           <a:xfrm>
-            <a:off x="5830823" y="2194560"/>
-            <a:ext cx="499871" cy="762000"/>
+            <a:off x="5725667" y="2194560"/>
+            <a:ext cx="710184" cy="1021080"/>
           </a:xfrm>
           <a:prstGeom prst="rect">
             <a:avLst/>
@@ -3865,7 +3865,7 @@
         </p:nvSpPr>
         <p:spPr>
           <a:xfrm>
-            <a:off x="777240" y="3276600"/>
+            <a:off x="777240" y="3535680"/>
             <a:ext cx="10607040" cy="429370"/>
           </a:xfrm>
           <a:prstGeom prst="rect">
@@ -3927,7 +3927,7 @@
         </p:nvSpPr>
         <p:spPr>
           <a:xfrm>
-            <a:off x="5029200" y="4535424"/>
+            <a:off x="4991100" y="4645152"/>
             <a:ext cx="1920240" cy="548640"/>
           </a:xfrm>
           <a:prstGeom prst="rect">
@@ -3956,7 +3956,7 @@
       </p:sp>
       <p:pic>
         <p:nvPicPr>
-          <p:cNvPr id="12" name="Picture 11" descr="cb159c0c0e4997c0.png"/>
+          <p:cNvPr id="12" name="Picture 11" descr="f8b652a33b6da231.png"/>
           <p:cNvPicPr>
             <a:picLocks noChangeAspect="1"/>
           </p:cNvPicPr>
@@ -3970,8 +3970,8 @@
         </p:blipFill>
         <p:spPr>
           <a:xfrm>
-            <a:off x="6949440" y="4480560"/>
-            <a:ext cx="182880" cy="658368"/>
+            <a:off x="6911340" y="4480560"/>
+            <a:ext cx="259080" cy="877824"/>
           </a:xfrm>
           <a:prstGeom prst="rect">
             <a:avLst/>
@@ -4243,7 +4243,7 @@
       </p:sp>
       <p:pic>
         <p:nvPicPr>
-          <p:cNvPr id="9" name="Picture 8" descr="2b7195ac5d381c35.png"/>
+          <p:cNvPr id="9" name="Picture 8" descr="4ffd0e25f89e0e87.png"/>
           <p:cNvPicPr>
             <a:picLocks noChangeAspect="1"/>
           </p:cNvPicPr>
@@ -4257,8 +4257,8 @@
         </p:blipFill>
         <p:spPr>
           <a:xfrm>
-            <a:off x="5881115" y="2103120"/>
-            <a:ext cx="399288" cy="603504"/>
+            <a:off x="5795772" y="2103120"/>
+            <a:ext cx="569976" cy="807720"/>
           </a:xfrm>
           <a:prstGeom prst="rect">
             <a:avLst/>
@@ -4273,7 +4273,7 @@
         </p:nvSpPr>
         <p:spPr>
           <a:xfrm>
-            <a:off x="777240" y="3209544"/>
+            <a:off x="777240" y="3413760"/>
             <a:ext cx="10607040" cy="429370"/>
           </a:xfrm>
           <a:prstGeom prst="rect">
@@ -4565,7 +4565,7 @@
       </p:sp>
       <p:pic>
         <p:nvPicPr>
-          <p:cNvPr id="9" name="Picture 8" descr="2a2089fe601026b0.png"/>
+          <p:cNvPr id="9" name="Picture 8" descr="cdf1ba36d2f10ae1.png"/>
           <p:cNvPicPr>
             <a:picLocks noChangeAspect="1"/>
           </p:cNvPicPr>
@@ -4580,7 +4580,7 @@
         <p:spPr>
           <a:xfrm>
             <a:off x="1828800" y="1920240"/>
-            <a:ext cx="2755392" cy="603504"/>
+            <a:ext cx="2926080" cy="807720"/>
           </a:xfrm>
           <a:prstGeom prst="rect">
             <a:avLst/>
@@ -4595,8 +4595,8 @@
         </p:nvSpPr>
         <p:spPr>
           <a:xfrm>
-            <a:off x="5041392" y="1993392"/>
-            <a:ext cx="6342887" cy="502920"/>
+            <a:off x="5212080" y="2095500"/>
+            <a:ext cx="6172199" cy="502920"/>
           </a:xfrm>
           <a:prstGeom prst="rect">
             <a:avLst/>
@@ -4624,7 +4624,7 @@
       </p:sp>
       <p:pic>
         <p:nvPicPr>
-          <p:cNvPr id="11" name="Picture 10" descr="13fd534ad27a854b.png"/>
+          <p:cNvPr id="11" name="Picture 10" descr="1a38ee3eb12962a5.png"/>
           <p:cNvPicPr>
             <a:picLocks noChangeAspect="1"/>
           </p:cNvPicPr>
@@ -4638,8 +4638,8 @@
         </p:blipFill>
         <p:spPr>
           <a:xfrm>
-            <a:off x="1828800" y="2798064"/>
-            <a:ext cx="2029968" cy="603504"/>
+            <a:off x="1828800" y="3002280"/>
+            <a:ext cx="2368296" cy="807720"/>
           </a:xfrm>
           <a:prstGeom prst="rect">
             <a:avLst/>
@@ -4654,7 +4654,7 @@
         </p:nvSpPr>
         <p:spPr>
           <a:xfrm>
-            <a:off x="4315968" y="2871216"/>
+            <a:off x="4654296" y="3177539"/>
             <a:ext cx="6400800" cy="502920"/>
           </a:xfrm>
           <a:prstGeom prst="rect">
@@ -4715,7 +4715,7 @@
         </p:blipFill>
         <p:spPr>
           <a:xfrm>
-            <a:off x="1828800" y="3675888"/>
+            <a:off x="1828800" y="4084319"/>
             <a:ext cx="1530096" cy="344424"/>
           </a:xfrm>
           <a:prstGeom prst="rect">
@@ -4731,7 +4731,7 @@
         </p:nvSpPr>
         <p:spPr>
           <a:xfrm>
-            <a:off x="3816096" y="3619500"/>
+            <a:off x="3816096" y="4027931"/>
             <a:ext cx="6400800" cy="502920"/>
           </a:xfrm>
           <a:prstGeom prst="rect">
@@ -4766,7 +4766,7 @@
         </p:nvSpPr>
         <p:spPr>
           <a:xfrm>
-            <a:off x="777240" y="4572000"/>
+            <a:off x="777240" y="4885944"/>
             <a:ext cx="10607040" cy="548640"/>
           </a:xfrm>
           <a:prstGeom prst="rect">
@@ -5058,7 +5058,7 @@
       </p:sp>
       <p:pic>
         <p:nvPicPr>
-          <p:cNvPr id="9" name="Picture 8" descr="af36c3e55cedc005.png"/>
+          <p:cNvPr id="9" name="Picture 8" descr="3d867da857833487.png"/>
           <p:cNvPicPr>
             <a:picLocks noChangeAspect="1"/>
           </p:cNvPicPr>
@@ -5072,8 +5072,8 @@
         </p:blipFill>
         <p:spPr>
           <a:xfrm>
-            <a:off x="5591555" y="2194560"/>
-            <a:ext cx="978408" cy="880872"/>
+            <a:off x="5382767" y="2194560"/>
+            <a:ext cx="1395984" cy="1188720"/>
           </a:xfrm>
           <a:prstGeom prst="rect">
             <a:avLst/>
@@ -5345,7 +5345,7 @@
       </p:sp>
       <p:pic>
         <p:nvPicPr>
-          <p:cNvPr id="9" name="Picture 8" descr="af36c3e55cedc005.png"/>
+          <p:cNvPr id="9" name="Picture 8" descr="3d867da857833487.png"/>
           <p:cNvPicPr>
             <a:picLocks noChangeAspect="1"/>
           </p:cNvPicPr>
@@ -5359,8 +5359,8 @@
         </p:blipFill>
         <p:spPr>
           <a:xfrm>
-            <a:off x="5591555" y="2194560"/>
-            <a:ext cx="978408" cy="880872"/>
+            <a:off x="5382767" y="2194560"/>
+            <a:ext cx="1395984" cy="1188720"/>
           </a:xfrm>
           <a:prstGeom prst="rect">
             <a:avLst/>
@@ -5375,7 +5375,7 @@
         </p:nvSpPr>
         <p:spPr>
           <a:xfrm>
-            <a:off x="777240" y="3395472"/>
+            <a:off x="777240" y="3703320"/>
             <a:ext cx="10607040" cy="429370"/>
           </a:xfrm>
           <a:prstGeom prst="rect">
@@ -6142,7 +6142,7 @@
         </p:nvSpPr>
         <p:spPr>
           <a:xfrm>
-            <a:off x="4956048" y="4741164"/>
+            <a:off x="4887468" y="4855464"/>
             <a:ext cx="1920240" cy="548640"/>
           </a:xfrm>
           <a:prstGeom prst="rect">
@@ -6171,7 +6171,7 @@
       </p:sp>
       <p:pic>
         <p:nvPicPr>
-          <p:cNvPr id="12" name="Picture 11" descr="df17a659aa305818.png"/>
+          <p:cNvPr id="12" name="Picture 11" descr="ae3379378f6437bc.png"/>
           <p:cNvPicPr>
             <a:picLocks noChangeAspect="1"/>
           </p:cNvPicPr>
@@ -6185,8 +6185,8 @@
         </p:blipFill>
         <p:spPr>
           <a:xfrm>
-            <a:off x="6876288" y="4663440"/>
-            <a:ext cx="329184" cy="704088"/>
+            <a:off x="6807708" y="4663440"/>
+            <a:ext cx="466344" cy="932688"/>
           </a:xfrm>
           <a:prstGeom prst="rect">
             <a:avLst/>
@@ -6464,8 +6464,8 @@
         </p:nvSpPr>
         <p:spPr>
           <a:xfrm>
-            <a:off x="2484628" y="2171700"/>
-            <a:ext cx="4674616" cy="457200"/>
+            <a:off x="2706116" y="2171700"/>
+            <a:ext cx="4236922" cy="457200"/>
           </a:xfrm>
           <a:prstGeom prst="rect">
             <a:avLst/>
@@ -6474,7 +6474,7 @@
         </p:spPr>
         <p:txBody>
           <a:bodyPr wrap="none" lIns="45720" rIns="45720" tIns="18288" bIns="18288" anchor="ctr">
-            <a:spAutoFit/>
+            <a:noAutofit/>
           </a:bodyPr>
           <a:lstStyle/>
           <a:p>
@@ -6507,7 +6507,7 @@
         </p:blipFill>
         <p:spPr>
           <a:xfrm>
-            <a:off x="7022084" y="2234184"/>
+            <a:off x="6805879" y="2234184"/>
             <a:ext cx="521207" cy="332232"/>
           </a:xfrm>
           <a:prstGeom prst="rect">
@@ -6523,8 +6523,8 @@
         </p:nvSpPr>
         <p:spPr>
           <a:xfrm>
-            <a:off x="7543292" y="2171700"/>
-            <a:ext cx="2270760" cy="457200"/>
+            <a:off x="7327087" y="2171700"/>
+            <a:ext cx="2265475" cy="457200"/>
           </a:xfrm>
           <a:prstGeom prst="rect">
             <a:avLst/>
@@ -6533,7 +6533,7 @@
         </p:spPr>
         <p:txBody>
           <a:bodyPr wrap="none" lIns="45720" rIns="45720" tIns="18288" bIns="18288" anchor="ctr">
-            <a:spAutoFit/>
+            <a:noAutofit/>
           </a:bodyPr>
           <a:lstStyle/>
           <a:p>
@@ -6593,8 +6593,8 @@
         </p:nvSpPr>
         <p:spPr>
           <a:xfrm>
-            <a:off x="3686555" y="3432379"/>
-            <a:ext cx="3987800" cy="457200"/>
+            <a:off x="3903866" y="3432379"/>
+            <a:ext cx="3643910" cy="457200"/>
           </a:xfrm>
           <a:prstGeom prst="rect">
             <a:avLst/>
@@ -6603,7 +6603,7 @@
         </p:spPr>
         <p:txBody>
           <a:bodyPr wrap="none" lIns="45720" rIns="45720" tIns="18288" bIns="18288" anchor="ctr">
-            <a:spAutoFit/>
+            <a:noAutofit/>
           </a:bodyPr>
           <a:lstStyle/>
           <a:p>
@@ -6636,7 +6636,7 @@
         </p:blipFill>
         <p:spPr>
           <a:xfrm>
-            <a:off x="7537196" y="3494863"/>
+            <a:off x="7410617" y="3494863"/>
             <a:ext cx="521207" cy="332232"/>
           </a:xfrm>
           <a:prstGeom prst="rect">
@@ -6652,8 +6652,8 @@
         </p:nvSpPr>
         <p:spPr>
           <a:xfrm>
-            <a:off x="8058404" y="3432379"/>
-            <a:ext cx="553720" cy="457200"/>
+            <a:off x="7931825" y="3432379"/>
+            <a:ext cx="462987" cy="457200"/>
           </a:xfrm>
           <a:prstGeom prst="rect">
             <a:avLst/>
@@ -6662,7 +6662,7 @@
         </p:spPr>
         <p:txBody>
           <a:bodyPr wrap="none" lIns="45720" rIns="45720" tIns="18288" bIns="18288" anchor="ctr">
-            <a:spAutoFit/>
+            <a:noAutofit/>
           </a:bodyPr>
           <a:lstStyle/>
           <a:p>
@@ -7020,8 +7020,8 @@
         </p:nvSpPr>
         <p:spPr>
           <a:xfrm>
-            <a:off x="2484628" y="2080260"/>
-            <a:ext cx="4674616" cy="457200"/>
+            <a:off x="2706116" y="2080260"/>
+            <a:ext cx="4236922" cy="457200"/>
           </a:xfrm>
           <a:prstGeom prst="rect">
             <a:avLst/>
@@ -7030,7 +7030,7 @@
         </p:spPr>
         <p:txBody>
           <a:bodyPr wrap="none" lIns="45720" rIns="45720" tIns="18288" bIns="18288" anchor="ctr">
-            <a:spAutoFit/>
+            <a:noAutofit/>
           </a:bodyPr>
           <a:lstStyle/>
           <a:p>
@@ -7063,7 +7063,7 @@
         </p:blipFill>
         <p:spPr>
           <a:xfrm>
-            <a:off x="7022084" y="2142744"/>
+            <a:off x="6805879" y="2142744"/>
             <a:ext cx="521207" cy="332232"/>
           </a:xfrm>
           <a:prstGeom prst="rect">
@@ -7079,8 +7079,8 @@
         </p:nvSpPr>
         <p:spPr>
           <a:xfrm>
-            <a:off x="7543292" y="2080260"/>
-            <a:ext cx="2270760" cy="457200"/>
+            <a:off x="7327087" y="2080260"/>
+            <a:ext cx="2265475" cy="457200"/>
           </a:xfrm>
           <a:prstGeom prst="rect">
             <a:avLst/>
@@ -7089,7 +7089,7 @@
         </p:spPr>
         <p:txBody>
           <a:bodyPr wrap="none" lIns="45720" rIns="45720" tIns="18288" bIns="18288" anchor="ctr">
-            <a:spAutoFit/>
+            <a:noAutofit/>
           </a:bodyPr>
           <a:lstStyle/>
           <a:p>
@@ -7149,8 +7149,8 @@
         </p:nvSpPr>
         <p:spPr>
           <a:xfrm>
-            <a:off x="3686555" y="3340939"/>
-            <a:ext cx="3987800" cy="457200"/>
+            <a:off x="3903866" y="3340939"/>
+            <a:ext cx="3643910" cy="457200"/>
           </a:xfrm>
           <a:prstGeom prst="rect">
             <a:avLst/>
@@ -7159,7 +7159,7 @@
         </p:spPr>
         <p:txBody>
           <a:bodyPr wrap="none" lIns="45720" rIns="45720" tIns="18288" bIns="18288" anchor="ctr">
-            <a:spAutoFit/>
+            <a:noAutofit/>
           </a:bodyPr>
           <a:lstStyle/>
           <a:p>
@@ -7192,7 +7192,7 @@
         </p:blipFill>
         <p:spPr>
           <a:xfrm>
-            <a:off x="7537196" y="3403423"/>
+            <a:off x="7410617" y="3403423"/>
             <a:ext cx="521207" cy="332232"/>
           </a:xfrm>
           <a:prstGeom prst="rect">
@@ -7208,8 +7208,8 @@
         </p:nvSpPr>
         <p:spPr>
           <a:xfrm>
-            <a:off x="8058404" y="3340939"/>
-            <a:ext cx="553720" cy="457200"/>
+            <a:off x="7931825" y="3340939"/>
+            <a:ext cx="462987" cy="457200"/>
           </a:xfrm>
           <a:prstGeom prst="rect">
             <a:avLst/>
@@ -7218,7 +7218,7 @@
         </p:spPr>
         <p:txBody>
           <a:bodyPr wrap="none" lIns="45720" rIns="45720" tIns="18288" bIns="18288" anchor="ctr">
-            <a:spAutoFit/>
+            <a:noAutofit/>
           </a:bodyPr>
           <a:lstStyle/>
           <a:p>
@@ -7287,7 +7287,7 @@
         </p:nvSpPr>
         <p:spPr>
           <a:xfrm>
-            <a:off x="4852416" y="4878655"/>
+            <a:off x="4738116" y="4982287"/>
             <a:ext cx="1920240" cy="548640"/>
           </a:xfrm>
           <a:prstGeom prst="rect">
@@ -7316,7 +7316,7 @@
       </p:sp>
       <p:pic>
         <p:nvPicPr>
-          <p:cNvPr id="18" name="Picture 17" descr="a33d1cde69a4331a.png"/>
+          <p:cNvPr id="18" name="Picture 17" descr="b025bbe2352d111b.png"/>
           <p:cNvPicPr>
             <a:picLocks noChangeAspect="1"/>
           </p:cNvPicPr>
@@ -7330,8 +7330,8 @@
         </p:blipFill>
         <p:spPr>
           <a:xfrm>
-            <a:off x="6772656" y="4826839"/>
-            <a:ext cx="536448" cy="652272"/>
+            <a:off x="6658356" y="4826839"/>
+            <a:ext cx="765048" cy="859536"/>
           </a:xfrm>
           <a:prstGeom prst="rect">
             <a:avLst/>
@@ -7603,7 +7603,7 @@
       </p:sp>
       <p:pic>
         <p:nvPicPr>
-          <p:cNvPr id="9" name="Picture 8" descr="36f2a054c76947e5.png"/>
+          <p:cNvPr id="9" name="Picture 8" descr="229e5926a19b9fe2.png"/>
           <p:cNvPicPr>
             <a:picLocks noChangeAspect="1"/>
           </p:cNvPicPr>
@@ -7617,8 +7617,8 @@
         </p:blipFill>
         <p:spPr>
           <a:xfrm>
-            <a:off x="5742431" y="2194560"/>
-            <a:ext cx="676656" cy="704088"/>
+            <a:off x="5599176" y="2194560"/>
+            <a:ext cx="963167" cy="932688"/>
           </a:xfrm>
           <a:prstGeom prst="rect">
             <a:avLst/>
@@ -7966,8 +7966,8 @@
         </p:nvSpPr>
         <p:spPr>
           <a:xfrm>
-            <a:off x="1874519" y="1801368"/>
-            <a:ext cx="3551936" cy="457200"/>
+            <a:off x="1874519" y="1886712"/>
+            <a:ext cx="3058734" cy="457200"/>
           </a:xfrm>
           <a:prstGeom prst="rect">
             <a:avLst/>
@@ -7976,7 +7976,7 @@
         </p:spPr>
         <p:txBody>
           <a:bodyPr wrap="none" lIns="45720" rIns="45720" tIns="18288" bIns="18288" anchor="ctr">
-            <a:spAutoFit/>
+            <a:noAutofit/>
           </a:bodyPr>
           <a:lstStyle/>
           <a:p>
@@ -7995,7 +7995,7 @@
       </p:sp>
       <p:pic>
         <p:nvPicPr>
-          <p:cNvPr id="10" name="Picture 9" descr="106233e172283d59.png"/>
+          <p:cNvPr id="10" name="Picture 9" descr="e6b67427858e96f9.png"/>
           <p:cNvPicPr>
             <a:picLocks noChangeAspect="1"/>
           </p:cNvPicPr>
@@ -8009,8 +8009,8 @@
         </p:blipFill>
         <p:spPr>
           <a:xfrm>
-            <a:off x="5289296" y="1783080"/>
-            <a:ext cx="557784" cy="493776"/>
+            <a:off x="4796094" y="1783080"/>
+            <a:ext cx="795528" cy="664464"/>
           </a:xfrm>
           <a:prstGeom prst="rect">
             <a:avLst/>
@@ -8025,8 +8025,8 @@
         </p:nvSpPr>
         <p:spPr>
           <a:xfrm>
-            <a:off x="1874519" y="2455164"/>
-            <a:ext cx="3703828" cy="457200"/>
+            <a:off x="1874519" y="2625852"/>
+            <a:ext cx="3255563" cy="457200"/>
           </a:xfrm>
           <a:prstGeom prst="rect">
             <a:avLst/>
@@ -8035,7 +8035,7 @@
         </p:spPr>
         <p:txBody>
           <a:bodyPr wrap="none" lIns="45720" rIns="45720" tIns="18288" bIns="18288" anchor="ctr">
-            <a:spAutoFit/>
+            <a:noAutofit/>
           </a:bodyPr>
           <a:lstStyle/>
           <a:p>
@@ -8068,7 +8068,7 @@
         </p:blipFill>
         <p:spPr>
           <a:xfrm>
-            <a:off x="5441188" y="2479548"/>
+            <a:off x="4992923" y="2650236"/>
             <a:ext cx="688848" cy="408432"/>
           </a:xfrm>
           <a:prstGeom prst="rect">
@@ -8084,8 +8084,8 @@
         </p:nvSpPr>
         <p:spPr>
           <a:xfrm>
-            <a:off x="6130036" y="2455164"/>
-            <a:ext cx="1425448" cy="457200"/>
+            <a:off x="5681771" y="2625852"/>
+            <a:ext cx="1242626" cy="457200"/>
           </a:xfrm>
           <a:prstGeom prst="rect">
             <a:avLst/>
@@ -8094,7 +8094,7 @@
         </p:spPr>
         <p:txBody>
           <a:bodyPr wrap="none" lIns="45720" rIns="45720" tIns="18288" bIns="18288" anchor="ctr">
-            <a:spAutoFit/>
+            <a:noAutofit/>
           </a:bodyPr>
           <a:lstStyle/>
           <a:p>
@@ -8119,8 +8119,8 @@
         </p:nvSpPr>
         <p:spPr>
           <a:xfrm>
-            <a:off x="1874519" y="3067812"/>
-            <a:ext cx="2033015" cy="457200"/>
+            <a:off x="1874519" y="3238500"/>
+            <a:ext cx="1652008" cy="457200"/>
           </a:xfrm>
           <a:prstGeom prst="rect">
             <a:avLst/>
@@ -8129,7 +8129,7 @@
         </p:spPr>
         <p:txBody>
           <a:bodyPr wrap="none" lIns="45720" rIns="45720" tIns="18288" bIns="18288" anchor="ctr">
-            <a:spAutoFit/>
+            <a:noAutofit/>
           </a:bodyPr>
           <a:lstStyle/>
           <a:p>
@@ -8162,7 +8162,7 @@
         </p:blipFill>
         <p:spPr>
           <a:xfrm>
-            <a:off x="3770375" y="3180588"/>
+            <a:off x="3389368" y="3351276"/>
             <a:ext cx="1136904" cy="231648"/>
           </a:xfrm>
           <a:prstGeom prst="rect">
@@ -8178,8 +8178,8 @@
         </p:nvSpPr>
         <p:spPr>
           <a:xfrm>
-            <a:off x="1874519" y="3686556"/>
-            <a:ext cx="4918964" cy="457200"/>
+            <a:off x="1874519" y="3922776"/>
+            <a:ext cx="4308965" cy="457200"/>
           </a:xfrm>
           <a:prstGeom prst="rect">
             <a:avLst/>
@@ -8188,7 +8188,7 @@
         </p:spPr>
         <p:txBody>
           <a:bodyPr wrap="none" lIns="45720" rIns="45720" tIns="18288" bIns="18288" anchor="ctr">
-            <a:spAutoFit/>
+            <a:noAutofit/>
           </a:bodyPr>
           <a:lstStyle/>
           <a:p>
@@ -8207,7 +8207,7 @@
       </p:sp>
       <p:pic>
         <p:nvPicPr>
-          <p:cNvPr id="17" name="Picture 16" descr="535b93a5addf171e.png"/>
+          <p:cNvPr id="17" name="Picture 16" descr="ef641fad4ba74c7d.png"/>
           <p:cNvPicPr>
             <a:picLocks noChangeAspect="1"/>
           </p:cNvPicPr>
@@ -8221,8 +8221,8 @@
         </p:blipFill>
         <p:spPr>
           <a:xfrm>
-            <a:off x="6656324" y="3703320"/>
-            <a:ext cx="118872" cy="423672"/>
+            <a:off x="6046325" y="3874008"/>
+            <a:ext cx="170688" cy="554736"/>
           </a:xfrm>
           <a:prstGeom prst="rect">
             <a:avLst/>
@@ -8237,8 +8237,8 @@
         </p:nvSpPr>
         <p:spPr>
           <a:xfrm>
-            <a:off x="6775196" y="3686556"/>
-            <a:ext cx="4311396" cy="457200"/>
+            <a:off x="6217013" y="3922776"/>
+            <a:ext cx="3880389" cy="457200"/>
           </a:xfrm>
           <a:prstGeom prst="rect">
             <a:avLst/>
@@ -8247,7 +8247,7 @@
         </p:spPr>
         <p:txBody>
           <a:bodyPr wrap="none" lIns="45720" rIns="45720" tIns="18288" bIns="18288" anchor="ctr">
-            <a:spAutoFit/>
+            <a:noAutofit/>
           </a:bodyPr>
           <a:lstStyle/>
           <a:p>
@@ -8266,7 +8266,7 @@
       </p:sp>
       <p:pic>
         <p:nvPicPr>
-          <p:cNvPr id="19" name="Picture 18" descr="535b93a5addf171e.png"/>
+          <p:cNvPr id="19" name="Picture 18" descr="ef641fad4ba74c7d.png"/>
           <p:cNvPicPr>
             <a:picLocks noChangeAspect="1"/>
           </p:cNvPicPr>
@@ -8280,8 +8280,8 @@
         </p:blipFill>
         <p:spPr>
           <a:xfrm>
-            <a:off x="10949432" y="3703320"/>
-            <a:ext cx="118872" cy="423672"/>
+            <a:off x="9960242" y="3874008"/>
+            <a:ext cx="170688" cy="554736"/>
           </a:xfrm>
           <a:prstGeom prst="rect">
             <a:avLst/>
@@ -8296,8 +8296,8 @@
         </p:nvSpPr>
         <p:spPr>
           <a:xfrm>
-            <a:off x="11068304" y="3686556"/>
-            <a:ext cx="362204" cy="457200"/>
+            <a:off x="10130930" y="3922776"/>
+            <a:ext cx="347771" cy="457200"/>
           </a:xfrm>
           <a:prstGeom prst="rect">
             <a:avLst/>
@@ -8306,7 +8306,7 @@
         </p:spPr>
         <p:txBody>
           <a:bodyPr wrap="none" lIns="45720" rIns="45720" tIns="18288" bIns="18288" anchor="ctr">
-            <a:spAutoFit/>
+            <a:noAutofit/>
           </a:bodyPr>
           <a:lstStyle/>
           <a:p>
@@ -8588,7 +8588,7 @@
       </p:sp>
       <p:pic>
         <p:nvPicPr>
-          <p:cNvPr id="9" name="Picture 8" descr="36f2a054c76947e5.png"/>
+          <p:cNvPr id="9" name="Picture 8" descr="229e5926a19b9fe2.png"/>
           <p:cNvPicPr>
             <a:picLocks noChangeAspect="1"/>
           </p:cNvPicPr>
@@ -8602,8 +8602,8 @@
         </p:blipFill>
         <p:spPr>
           <a:xfrm>
-            <a:off x="5742431" y="2103120"/>
-            <a:ext cx="676656" cy="704088"/>
+            <a:off x="5599176" y="2103120"/>
+            <a:ext cx="963167" cy="932688"/>
           </a:xfrm>
           <a:prstGeom prst="rect">
             <a:avLst/>
@@ -8618,7 +8618,7 @@
         </p:nvSpPr>
         <p:spPr>
           <a:xfrm>
-            <a:off x="1828800" y="3081527"/>
+            <a:off x="1828800" y="3310127"/>
             <a:ext cx="8503920" cy="548640"/>
           </a:xfrm>
           <a:prstGeom prst="rect">
@@ -9412,7 +9412,7 @@
         </p:nvSpPr>
         <p:spPr>
           <a:xfrm>
-            <a:off x="4870704" y="4715256"/>
+            <a:off x="4832603" y="4818888"/>
             <a:ext cx="1920240" cy="548640"/>
           </a:xfrm>
           <a:prstGeom prst="rect">
@@ -9441,7 +9441,7 @@
       </p:sp>
       <p:pic>
         <p:nvPicPr>
-          <p:cNvPr id="12" name="Picture 11" descr="16582afbfccd27f5.png"/>
+          <p:cNvPr id="12" name="Picture 11" descr="ec4ffcbfe2b2982d.png"/>
           <p:cNvPicPr>
             <a:picLocks noChangeAspect="1"/>
           </p:cNvPicPr>
@@ -9455,8 +9455,8 @@
         </p:blipFill>
         <p:spPr>
           <a:xfrm>
-            <a:off x="6790943" y="4663440"/>
-            <a:ext cx="499871" cy="652272"/>
+            <a:off x="6752844" y="4663440"/>
+            <a:ext cx="576072" cy="859536"/>
           </a:xfrm>
           <a:prstGeom prst="rect">
             <a:avLst/>
@@ -12664,7 +12664,7 @@
       </p:sp>
       <p:pic>
         <p:nvPicPr>
-          <p:cNvPr id="9" name="Picture 8" descr="6fd352ebb667250a.png"/>
+          <p:cNvPr id="9" name="Picture 8" descr="d5e2dc9bfa32dfce.png"/>
           <p:cNvPicPr>
             <a:picLocks noChangeAspect="1"/>
           </p:cNvPicPr>
@@ -12678,8 +12678,8 @@
         </p:blipFill>
         <p:spPr>
           <a:xfrm>
-            <a:off x="5830823" y="2194560"/>
-            <a:ext cx="499871" cy="774192"/>
+            <a:off x="5725667" y="2194560"/>
+            <a:ext cx="710184" cy="1027176"/>
           </a:xfrm>
           <a:prstGeom prst="rect">
             <a:avLst/>
@@ -13027,8 +13027,8 @@
         </p:nvSpPr>
         <p:spPr>
           <a:xfrm>
-            <a:off x="1874519" y="1801368"/>
-            <a:ext cx="3551936" cy="457200"/>
+            <a:off x="1874519" y="1886712"/>
+            <a:ext cx="3058734" cy="457200"/>
           </a:xfrm>
           <a:prstGeom prst="rect">
             <a:avLst/>
@@ -13037,7 +13037,7 @@
         </p:spPr>
         <p:txBody>
           <a:bodyPr wrap="none" lIns="45720" rIns="45720" tIns="18288" bIns="18288" anchor="ctr">
-            <a:spAutoFit/>
+            <a:noAutofit/>
           </a:bodyPr>
           <a:lstStyle/>
           <a:p>
@@ -13056,7 +13056,7 @@
       </p:sp>
       <p:pic>
         <p:nvPicPr>
-          <p:cNvPr id="10" name="Picture 9" descr="106233e172283d59.png"/>
+          <p:cNvPr id="10" name="Picture 9" descr="e6b67427858e96f9.png"/>
           <p:cNvPicPr>
             <a:picLocks noChangeAspect="1"/>
           </p:cNvPicPr>
@@ -13070,8 +13070,8 @@
         </p:blipFill>
         <p:spPr>
           <a:xfrm>
-            <a:off x="5289296" y="1783080"/>
-            <a:ext cx="557784" cy="493776"/>
+            <a:off x="4796094" y="1783080"/>
+            <a:ext cx="795528" cy="664464"/>
           </a:xfrm>
           <a:prstGeom prst="rect">
             <a:avLst/>
@@ -13086,8 +13086,8 @@
         </p:nvSpPr>
         <p:spPr>
           <a:xfrm>
-            <a:off x="6395720" y="1760220"/>
-            <a:ext cx="549148" cy="457200"/>
+            <a:off x="6140262" y="1760220"/>
+            <a:ext cx="565792" cy="457200"/>
           </a:xfrm>
           <a:prstGeom prst="rect">
             <a:avLst/>
@@ -13096,7 +13096,7 @@
         </p:spPr>
         <p:txBody>
           <a:bodyPr wrap="none" lIns="45720" rIns="45720" tIns="18288" bIns="18288" anchor="ctr">
-            <a:spAutoFit/>
+            <a:noAutofit/>
           </a:bodyPr>
           <a:lstStyle/>
           <a:p>
@@ -13121,8 +13121,8 @@
         </p:nvSpPr>
         <p:spPr>
           <a:xfrm>
-            <a:off x="1874519" y="2455164"/>
-            <a:ext cx="3703828" cy="457200"/>
+            <a:off x="1874519" y="2625852"/>
+            <a:ext cx="3255563" cy="457200"/>
           </a:xfrm>
           <a:prstGeom prst="rect">
             <a:avLst/>
@@ -13131,7 +13131,7 @@
         </p:spPr>
         <p:txBody>
           <a:bodyPr wrap="none" lIns="45720" rIns="45720" tIns="18288" bIns="18288" anchor="ctr">
-            <a:spAutoFit/>
+            <a:noAutofit/>
           </a:bodyPr>
           <a:lstStyle/>
           <a:p>
@@ -13164,7 +13164,7 @@
         </p:blipFill>
         <p:spPr>
           <a:xfrm>
-            <a:off x="5441188" y="2479548"/>
+            <a:off x="4992923" y="2650236"/>
             <a:ext cx="688848" cy="408432"/>
           </a:xfrm>
           <a:prstGeom prst="rect">
@@ -13180,8 +13180,8 @@
         </p:nvSpPr>
         <p:spPr>
           <a:xfrm>
-            <a:off x="6130036" y="2455164"/>
-            <a:ext cx="1425448" cy="457200"/>
+            <a:off x="5681771" y="2625852"/>
+            <a:ext cx="1242626" cy="457200"/>
           </a:xfrm>
           <a:prstGeom prst="rect">
             <a:avLst/>
@@ -13190,7 +13190,7 @@
         </p:spPr>
         <p:txBody>
           <a:bodyPr wrap="none" lIns="45720" rIns="45720" tIns="18288" bIns="18288" anchor="ctr">
-            <a:spAutoFit/>
+            <a:noAutofit/>
           </a:bodyPr>
           <a:lstStyle/>
           <a:p>
@@ -13215,8 +13215,8 @@
         </p:nvSpPr>
         <p:spPr>
           <a:xfrm>
-            <a:off x="7966964" y="2455164"/>
-            <a:ext cx="718566" cy="457200"/>
+            <a:off x="7335878" y="2625852"/>
+            <a:ext cx="651876" cy="457200"/>
           </a:xfrm>
           <a:prstGeom prst="rect">
             <a:avLst/>
@@ -13225,7 +13225,7 @@
         </p:spPr>
         <p:txBody>
           <a:bodyPr wrap="none" lIns="45720" rIns="45720" tIns="18288" bIns="18288" anchor="ctr">
-            <a:spAutoFit/>
+            <a:noAutofit/>
           </a:bodyPr>
           <a:lstStyle/>
           <a:p>
@@ -13250,8 +13250,8 @@
         </p:nvSpPr>
         <p:spPr>
           <a:xfrm>
-            <a:off x="1874519" y="3067812"/>
-            <a:ext cx="2033015" cy="457200"/>
+            <a:off x="1874519" y="3238500"/>
+            <a:ext cx="1652008" cy="457200"/>
           </a:xfrm>
           <a:prstGeom prst="rect">
             <a:avLst/>
@@ -13260,7 +13260,7 @@
         </p:spPr>
         <p:txBody>
           <a:bodyPr wrap="none" lIns="45720" rIns="45720" tIns="18288" bIns="18288" anchor="ctr">
-            <a:spAutoFit/>
+            <a:noAutofit/>
           </a:bodyPr>
           <a:lstStyle/>
           <a:p>
@@ -13293,7 +13293,7 @@
         </p:blipFill>
         <p:spPr>
           <a:xfrm>
-            <a:off x="3770375" y="3180588"/>
+            <a:off x="3389368" y="3351276"/>
             <a:ext cx="1136904" cy="231648"/>
           </a:xfrm>
           <a:prstGeom prst="rect">
@@ -13309,8 +13309,8 @@
         </p:nvSpPr>
         <p:spPr>
           <a:xfrm>
-            <a:off x="5455919" y="3067812"/>
-            <a:ext cx="1226820" cy="457200"/>
+            <a:off x="5074912" y="3238500"/>
+            <a:ext cx="1130250" cy="457200"/>
           </a:xfrm>
           <a:prstGeom prst="rect">
             <a:avLst/>
@@ -13319,7 +13319,7 @@
         </p:spPr>
         <p:txBody>
           <a:bodyPr wrap="none" lIns="45720" rIns="45720" tIns="18288" bIns="18288" anchor="ctr">
-            <a:spAutoFit/>
+            <a:noAutofit/>
           </a:bodyPr>
           <a:lstStyle/>
           <a:p>
@@ -13344,8 +13344,8 @@
         </p:nvSpPr>
         <p:spPr>
           <a:xfrm>
-            <a:off x="1874519" y="3686556"/>
-            <a:ext cx="4918964" cy="457200"/>
+            <a:off x="1874519" y="3922776"/>
+            <a:ext cx="4308965" cy="457200"/>
           </a:xfrm>
           <a:prstGeom prst="rect">
             <a:avLst/>
@@ -13354,7 +13354,7 @@
         </p:spPr>
         <p:txBody>
           <a:bodyPr wrap="none" lIns="45720" rIns="45720" tIns="18288" bIns="18288" anchor="ctr">
-            <a:spAutoFit/>
+            <a:noAutofit/>
           </a:bodyPr>
           <a:lstStyle/>
           <a:p>
@@ -13373,7 +13373,7 @@
       </p:sp>
       <p:pic>
         <p:nvPicPr>
-          <p:cNvPr id="20" name="Picture 19" descr="535b93a5addf171e.png"/>
+          <p:cNvPr id="20" name="Picture 19" descr="ef641fad4ba74c7d.png"/>
           <p:cNvPicPr>
             <a:picLocks noChangeAspect="1"/>
           </p:cNvPicPr>
@@ -13387,8 +13387,8 @@
         </p:blipFill>
         <p:spPr>
           <a:xfrm>
-            <a:off x="6656324" y="3703320"/>
-            <a:ext cx="118872" cy="423672"/>
+            <a:off x="6046325" y="3874008"/>
+            <a:ext cx="170688" cy="554736"/>
           </a:xfrm>
           <a:prstGeom prst="rect">
             <a:avLst/>
@@ -13403,8 +13403,8 @@
         </p:nvSpPr>
         <p:spPr>
           <a:xfrm>
-            <a:off x="6775196" y="3686556"/>
-            <a:ext cx="4311396" cy="457200"/>
+            <a:off x="6217013" y="3922776"/>
+            <a:ext cx="3880389" cy="457200"/>
           </a:xfrm>
           <a:prstGeom prst="rect">
             <a:avLst/>
@@ -13413,7 +13413,7 @@
         </p:spPr>
         <p:txBody>
           <a:bodyPr wrap="none" lIns="45720" rIns="45720" tIns="18288" bIns="18288" anchor="ctr">
-            <a:spAutoFit/>
+            <a:noAutofit/>
           </a:bodyPr>
           <a:lstStyle/>
           <a:p>
@@ -13432,7 +13432,7 @@
       </p:sp>
       <p:pic>
         <p:nvPicPr>
-          <p:cNvPr id="22" name="Picture 21" descr="535b93a5addf171e.png"/>
+          <p:cNvPr id="22" name="Picture 21" descr="ef641fad4ba74c7d.png"/>
           <p:cNvPicPr>
             <a:picLocks noChangeAspect="1"/>
           </p:cNvPicPr>
@@ -13446,8 +13446,8 @@
         </p:blipFill>
         <p:spPr>
           <a:xfrm>
-            <a:off x="10949432" y="3703320"/>
-            <a:ext cx="118872" cy="423672"/>
+            <a:off x="9960242" y="3874008"/>
+            <a:ext cx="170688" cy="554736"/>
           </a:xfrm>
           <a:prstGeom prst="rect">
             <a:avLst/>
@@ -13462,8 +13462,8 @@
         </p:nvSpPr>
         <p:spPr>
           <a:xfrm>
-            <a:off x="11068304" y="3686556"/>
-            <a:ext cx="362204" cy="457200"/>
+            <a:off x="10130930" y="3922776"/>
+            <a:ext cx="347771" cy="457200"/>
           </a:xfrm>
           <a:prstGeom prst="rect">
             <a:avLst/>
@@ -13472,7 +13472,7 @@
         </p:spPr>
         <p:txBody>
           <a:bodyPr wrap="none" lIns="45720" rIns="45720" tIns="18288" bIns="18288" anchor="ctr">
-            <a:spAutoFit/>
+            <a:noAutofit/>
           </a:bodyPr>
           <a:lstStyle/>
           <a:p>
@@ -13491,7 +13491,7 @@
       </p:sp>
       <p:pic>
         <p:nvPicPr>
-          <p:cNvPr id="24" name="Picture 23" descr="8d23dc14b63dd90c.png"/>
+          <p:cNvPr id="24" name="Picture 23" descr="c947c2e93b2d33a0.png"/>
           <p:cNvPicPr>
             <a:picLocks noChangeAspect="1"/>
           </p:cNvPicPr>
@@ -13505,8 +13505,8 @@
         </p:blipFill>
         <p:spPr>
           <a:xfrm>
-            <a:off x="2606040" y="4174236"/>
-            <a:ext cx="118872" cy="420624"/>
+            <a:off x="2606040" y="4474464"/>
+            <a:ext cx="170688" cy="554736"/>
           </a:xfrm>
           <a:prstGeom prst="rect">
             <a:avLst/>
@@ -13521,8 +13521,8 @@
         </p:nvSpPr>
         <p:spPr>
           <a:xfrm>
-            <a:off x="2724912" y="4155948"/>
-            <a:ext cx="1396238" cy="457200"/>
+            <a:off x="2776728" y="4523232"/>
+            <a:ext cx="1173581" cy="457200"/>
           </a:xfrm>
           <a:prstGeom prst="rect">
             <a:avLst/>
@@ -13531,7 +13531,7 @@
         </p:spPr>
         <p:txBody>
           <a:bodyPr wrap="none" lIns="45720" rIns="45720" tIns="18288" bIns="18288" anchor="ctr">
-            <a:spAutoFit/>
+            <a:noAutofit/>
           </a:bodyPr>
           <a:lstStyle/>
           <a:p>
@@ -13550,7 +13550,7 @@
       </p:sp>
       <p:pic>
         <p:nvPicPr>
-          <p:cNvPr id="26" name="Picture 25" descr="4b934b392ff32167.png"/>
+          <p:cNvPr id="26" name="Picture 25" descr="a339c6c78254d98a.png"/>
           <p:cNvPicPr>
             <a:picLocks noChangeAspect="1"/>
           </p:cNvPicPr>
@@ -13564,8 +13564,8 @@
         </p:blipFill>
         <p:spPr>
           <a:xfrm>
-            <a:off x="3983990" y="4172712"/>
-            <a:ext cx="329184" cy="423672"/>
+            <a:off x="3813149" y="4474464"/>
+            <a:ext cx="377952" cy="554736"/>
           </a:xfrm>
           <a:prstGeom prst="rect">
             <a:avLst/>
@@ -13837,7 +13837,7 @@
       </p:sp>
       <p:pic>
         <p:nvPicPr>
-          <p:cNvPr id="9" name="Picture 8" descr="6fd352ebb667250a.png"/>
+          <p:cNvPr id="9" name="Picture 8" descr="d5e2dc9bfa32dfce.png"/>
           <p:cNvPicPr>
             <a:picLocks noChangeAspect="1"/>
           </p:cNvPicPr>
@@ -13851,8 +13851,8 @@
         </p:blipFill>
         <p:spPr>
           <a:xfrm>
-            <a:off x="5830823" y="2103120"/>
-            <a:ext cx="499871" cy="774192"/>
+            <a:off x="5725667" y="2103120"/>
+            <a:ext cx="710184" cy="1027176"/>
           </a:xfrm>
           <a:prstGeom prst="rect">
             <a:avLst/>
@@ -13867,7 +13867,7 @@
         </p:nvSpPr>
         <p:spPr>
           <a:xfrm>
-            <a:off x="1828800" y="3151631"/>
+            <a:off x="1828800" y="3404615"/>
             <a:ext cx="8503920" cy="548640"/>
           </a:xfrm>
           <a:prstGeom prst="rect">
@@ -13911,7 +13911,7 @@
         </p:nvSpPr>
         <p:spPr>
           <a:xfrm>
-            <a:off x="4956048" y="4744211"/>
+            <a:off x="4887468" y="4860036"/>
             <a:ext cx="1920240" cy="548640"/>
           </a:xfrm>
           <a:prstGeom prst="rect">
@@ -13940,7 +13940,7 @@
       </p:sp>
       <p:pic>
         <p:nvPicPr>
-          <p:cNvPr id="12" name="Picture 11" descr="78fbe52152533a33.png"/>
+          <p:cNvPr id="12" name="Picture 11" descr="f17cb56101b51681.png"/>
           <p:cNvPicPr>
             <a:picLocks noChangeAspect="1"/>
           </p:cNvPicPr>
@@ -13954,8 +13954,8 @@
         </p:blipFill>
         <p:spPr>
           <a:xfrm>
-            <a:off x="6876288" y="4663440"/>
-            <a:ext cx="329184" cy="710184"/>
+            <a:off x="6807708" y="4663440"/>
+            <a:ext cx="466344" cy="941832"/>
           </a:xfrm>
           <a:prstGeom prst="rect">
             <a:avLst/>
@@ -14233,8 +14233,8 @@
         </p:nvSpPr>
         <p:spPr>
           <a:xfrm>
-            <a:off x="2739136" y="2171700"/>
-            <a:ext cx="4502912" cy="457200"/>
+            <a:off x="3151600" y="2171700"/>
+            <a:ext cx="4034887" cy="457200"/>
           </a:xfrm>
           <a:prstGeom prst="rect">
             <a:avLst/>
@@ -14243,7 +14243,7 @@
         </p:spPr>
         <p:txBody>
           <a:bodyPr wrap="none" lIns="45720" rIns="45720" tIns="18288" bIns="18288" anchor="ctr">
-            <a:spAutoFit/>
+            <a:noAutofit/>
           </a:bodyPr>
           <a:lstStyle/>
           <a:p>
@@ -14276,7 +14276,7 @@
         </p:blipFill>
         <p:spPr>
           <a:xfrm>
-            <a:off x="7104888" y="2229612"/>
+            <a:off x="7049327" y="2229612"/>
             <a:ext cx="527304" cy="341376"/>
           </a:xfrm>
           <a:prstGeom prst="rect">
@@ -14292,8 +14292,8 @@
         </p:nvSpPr>
         <p:spPr>
           <a:xfrm>
-            <a:off x="7632191" y="2171700"/>
-            <a:ext cx="1927352" cy="457200"/>
+            <a:off x="7576631" y="2171700"/>
+            <a:ext cx="1570447" cy="457200"/>
           </a:xfrm>
           <a:prstGeom prst="rect">
             <a:avLst/>
@@ -14302,7 +14302,7 @@
         </p:spPr>
         <p:txBody>
           <a:bodyPr wrap="none" lIns="45720" rIns="45720" tIns="18288" bIns="18288" anchor="ctr">
-            <a:spAutoFit/>
+            <a:noAutofit/>
           </a:bodyPr>
           <a:lstStyle/>
           <a:p>
@@ -14695,8 +14695,8 @@
         </p:nvSpPr>
         <p:spPr>
           <a:xfrm>
-            <a:off x="2739136" y="2080260"/>
-            <a:ext cx="4502912" cy="457200"/>
+            <a:off x="3151600" y="2080260"/>
+            <a:ext cx="4034887" cy="457200"/>
           </a:xfrm>
           <a:prstGeom prst="rect">
             <a:avLst/>
@@ -14705,7 +14705,7 @@
         </p:spPr>
         <p:txBody>
           <a:bodyPr wrap="none" lIns="45720" rIns="45720" tIns="18288" bIns="18288" anchor="ctr">
-            <a:spAutoFit/>
+            <a:noAutofit/>
           </a:bodyPr>
           <a:lstStyle/>
           <a:p>
@@ -14738,7 +14738,7 @@
         </p:blipFill>
         <p:spPr>
           <a:xfrm>
-            <a:off x="7104888" y="2138171"/>
+            <a:off x="7049327" y="2138171"/>
             <a:ext cx="527304" cy="341376"/>
           </a:xfrm>
           <a:prstGeom prst="rect">
@@ -14754,8 +14754,8 @@
         </p:nvSpPr>
         <p:spPr>
           <a:xfrm>
-            <a:off x="7632191" y="2080260"/>
-            <a:ext cx="1927352" cy="457200"/>
+            <a:off x="7576631" y="2080260"/>
+            <a:ext cx="1570447" cy="457200"/>
           </a:xfrm>
           <a:prstGeom prst="rect">
             <a:avLst/>
@@ -14764,7 +14764,7 @@
         </p:spPr>
         <p:txBody>
           <a:bodyPr wrap="none" lIns="45720" rIns="45720" tIns="18288" bIns="18288" anchor="ctr">
-            <a:spAutoFit/>
+            <a:noAutofit/>
           </a:bodyPr>
           <a:lstStyle/>
           <a:p>
@@ -17168,7 +17168,7 @@
       </p:graphicFrame>
       <p:pic>
         <p:nvPicPr>
-          <p:cNvPr id="12" name="Picture 11" descr="6cbce014b248a97e.png"/>
+          <p:cNvPr id="12" name="Picture 11" descr="ebe12bfa89ed6e98.png"/>
           <p:cNvPicPr>
             <a:picLocks noChangeAspect="1"/>
           </p:cNvPicPr>
@@ -17182,8 +17182,8 @@
         </p:blipFill>
         <p:spPr>
           <a:xfrm>
-            <a:off x="2221483" y="3337560"/>
-            <a:ext cx="1216152" cy="557784"/>
+            <a:off x="2591292" y="3337560"/>
+            <a:ext cx="1325880" cy="734568"/>
           </a:xfrm>
           <a:prstGeom prst="rect">
             <a:avLst/>
@@ -17198,8 +17198,8 @@
         </p:nvSpPr>
         <p:spPr>
           <a:xfrm>
-            <a:off x="3437635" y="3387852"/>
-            <a:ext cx="1583944" cy="457200"/>
+            <a:off x="3917172" y="3476244"/>
+            <a:ext cx="988583" cy="457200"/>
           </a:xfrm>
           <a:prstGeom prst="rect">
             <a:avLst/>
@@ -17208,7 +17208,7 @@
         </p:spPr>
         <p:txBody>
           <a:bodyPr wrap="none" lIns="45720" rIns="45720" tIns="18288" bIns="18288" anchor="ctr">
-            <a:spAutoFit/>
+            <a:noAutofit/>
           </a:bodyPr>
           <a:lstStyle/>
           <a:p>
@@ -17227,7 +17227,7 @@
       </p:sp>
       <p:pic>
         <p:nvPicPr>
-          <p:cNvPr id="14" name="Picture 13" descr="d209911ff9216357.png"/>
+          <p:cNvPr id="14" name="Picture 13" descr="493072ca0d3f98a4.png"/>
           <p:cNvPicPr>
             <a:picLocks noChangeAspect="1"/>
           </p:cNvPicPr>
@@ -17241,8 +17241,8 @@
         </p:blipFill>
         <p:spPr>
           <a:xfrm>
-            <a:off x="4884419" y="3337560"/>
-            <a:ext cx="1804416" cy="557784"/>
+            <a:off x="4768596" y="3337560"/>
+            <a:ext cx="1975104" cy="734568"/>
           </a:xfrm>
           <a:prstGeom prst="rect">
             <a:avLst/>
@@ -17257,8 +17257,8 @@
         </p:nvSpPr>
         <p:spPr>
           <a:xfrm>
-            <a:off x="6688836" y="3387852"/>
-            <a:ext cx="1583944" cy="457200"/>
+            <a:off x="6743700" y="3476244"/>
+            <a:ext cx="988583" cy="457200"/>
           </a:xfrm>
           <a:prstGeom prst="rect">
             <a:avLst/>
@@ -17267,7 +17267,7 @@
         </p:spPr>
         <p:txBody>
           <a:bodyPr wrap="none" lIns="45720" rIns="45720" tIns="18288" bIns="18288" anchor="ctr">
-            <a:spAutoFit/>
+            <a:noAutofit/>
           </a:bodyPr>
           <a:lstStyle/>
           <a:p>
@@ -17286,7 +17286,7 @@
       </p:sp>
       <p:pic>
         <p:nvPicPr>
-          <p:cNvPr id="16" name="Picture 15" descr="d6f1aa59b536704d.png"/>
+          <p:cNvPr id="16" name="Picture 15" descr="afb28c8af5b1a3a3.png"/>
           <p:cNvPicPr>
             <a:picLocks noChangeAspect="1"/>
           </p:cNvPicPr>
@@ -17300,8 +17300,8 @@
         </p:blipFill>
         <p:spPr>
           <a:xfrm>
-            <a:off x="8135620" y="3339083"/>
-            <a:ext cx="1804416" cy="554736"/>
+            <a:off x="7595123" y="3337560"/>
+            <a:ext cx="1975104" cy="734568"/>
           </a:xfrm>
           <a:prstGeom prst="rect">
             <a:avLst/>
@@ -17608,7 +17608,7 @@
       </p:cxnSp>
       <p:pic>
         <p:nvPicPr>
-          <p:cNvPr id="10" name="Picture 9" descr="55dd58ae1bd11961.png"/>
+          <p:cNvPr id="10" name="Picture 9" descr="e2ab36ea2231b313.png"/>
           <p:cNvPicPr>
             <a:picLocks noChangeAspect="1"/>
           </p:cNvPicPr>
@@ -17622,8 +17622,8 @@
         </p:blipFill>
         <p:spPr>
           <a:xfrm>
-            <a:off x="2451607" y="2340864"/>
-            <a:ext cx="1252728" cy="512064"/>
+            <a:off x="3106201" y="2340864"/>
+            <a:ext cx="1368552" cy="673608"/>
           </a:xfrm>
           <a:prstGeom prst="rect">
             <a:avLst/>
@@ -17638,8 +17638,8 @@
         </p:nvSpPr>
         <p:spPr>
           <a:xfrm>
-            <a:off x="3704335" y="2368296"/>
-            <a:ext cx="1927352" cy="457200"/>
+            <a:off x="4474753" y="2449068"/>
+            <a:ext cx="1183151" cy="457200"/>
           </a:xfrm>
           <a:prstGeom prst="rect">
             <a:avLst/>
@@ -17648,7 +17648,7 @@
         </p:spPr>
         <p:txBody>
           <a:bodyPr wrap="none" lIns="45720" rIns="45720" tIns="18288" bIns="18288" anchor="ctr">
-            <a:spAutoFit/>
+            <a:noAutofit/>
           </a:bodyPr>
           <a:lstStyle/>
           <a:p>
@@ -17667,7 +17667,7 @@
       </p:sp>
       <p:pic>
         <p:nvPicPr>
-          <p:cNvPr id="12" name="Picture 11" descr="a9ca8c41edb3ea2b.png"/>
+          <p:cNvPr id="12" name="Picture 11" descr="9e89c251bf9b33bb.png"/>
           <p:cNvPicPr>
             <a:picLocks noChangeAspect="1"/>
           </p:cNvPicPr>
@@ -17681,8 +17681,8 @@
         </p:blipFill>
         <p:spPr>
           <a:xfrm>
-            <a:off x="5494528" y="2340864"/>
-            <a:ext cx="1222248" cy="512064"/>
+            <a:off x="5520745" y="2340864"/>
+            <a:ext cx="1395984" cy="673608"/>
           </a:xfrm>
           <a:prstGeom prst="rect">
             <a:avLst/>
@@ -17697,8 +17697,8 @@
         </p:nvSpPr>
         <p:spPr>
           <a:xfrm>
-            <a:off x="6716776" y="2368296"/>
-            <a:ext cx="2099056" cy="457200"/>
+            <a:off x="6916729" y="2449068"/>
+            <a:ext cx="1299682" cy="457200"/>
           </a:xfrm>
           <a:prstGeom prst="rect">
             <a:avLst/>
@@ -17707,7 +17707,7 @@
         </p:spPr>
         <p:txBody>
           <a:bodyPr wrap="none" lIns="45720" rIns="45720" tIns="18288" bIns="18288" anchor="ctr">
-            <a:spAutoFit/>
+            <a:noAutofit/>
           </a:bodyPr>
           <a:lstStyle/>
           <a:p>
@@ -17740,7 +17740,7 @@
         </p:blipFill>
         <p:spPr>
           <a:xfrm>
-            <a:off x="8678672" y="2427732"/>
+            <a:off x="8079251" y="2508504"/>
             <a:ext cx="786384" cy="338328"/>
           </a:xfrm>
           <a:prstGeom prst="rect">
@@ -17756,8 +17756,8 @@
         </p:nvSpPr>
         <p:spPr>
           <a:xfrm>
-            <a:off x="9465056" y="2368296"/>
-            <a:ext cx="382016" cy="457200"/>
+            <a:off x="8865635" y="2449068"/>
+            <a:ext cx="326842" cy="457200"/>
           </a:xfrm>
           <a:prstGeom prst="rect">
             <a:avLst/>
@@ -17766,7 +17766,7 @@
         </p:spPr>
         <p:txBody>
           <a:bodyPr wrap="none" lIns="45720" rIns="45720" tIns="18288" bIns="18288" anchor="ctr">
-            <a:spAutoFit/>
+            <a:noAutofit/>
           </a:bodyPr>
           <a:lstStyle/>
           <a:p>
@@ -17785,7 +17785,7 @@
       </p:sp>
       <p:pic>
         <p:nvPicPr>
-          <p:cNvPr id="16" name="Picture 15" descr="b09711952520d9cc.png"/>
+          <p:cNvPr id="16" name="Picture 15" descr="fb699f75871fd57d.png"/>
           <p:cNvPicPr>
             <a:picLocks noChangeAspect="1"/>
           </p:cNvPicPr>
@@ -17799,8 +17799,8 @@
         </p:blipFill>
         <p:spPr>
           <a:xfrm>
-            <a:off x="780287" y="3127248"/>
-            <a:ext cx="1944623" cy="560832"/>
+            <a:off x="1495590" y="3288792"/>
+            <a:ext cx="2176272" cy="740664"/>
           </a:xfrm>
           <a:prstGeom prst="rect">
             <a:avLst/>
@@ -17815,8 +17815,8 @@
         </p:nvSpPr>
         <p:spPr>
           <a:xfrm>
-            <a:off x="2724911" y="3179064"/>
-            <a:ext cx="2785872" cy="457200"/>
+            <a:off x="3671862" y="3430524"/>
+            <a:ext cx="1922352" cy="457200"/>
           </a:xfrm>
           <a:prstGeom prst="rect">
             <a:avLst/>
@@ -17825,7 +17825,7 @@
         </p:spPr>
         <p:txBody>
           <a:bodyPr wrap="none" lIns="45720" rIns="45720" tIns="18288" bIns="18288" anchor="ctr">
-            <a:spAutoFit/>
+            <a:noAutofit/>
           </a:bodyPr>
           <a:lstStyle/>
           <a:p>
@@ -17858,7 +17858,7 @@
         </p:blipFill>
         <p:spPr>
           <a:xfrm>
-            <a:off x="5373624" y="3236976"/>
+            <a:off x="5457055" y="3488436"/>
             <a:ext cx="1679448" cy="341376"/>
           </a:xfrm>
           <a:prstGeom prst="rect">
@@ -17874,8 +17874,8 @@
         </p:nvSpPr>
         <p:spPr>
           <a:xfrm>
-            <a:off x="7053072" y="3179064"/>
-            <a:ext cx="2785872" cy="457200"/>
+            <a:off x="7136503" y="3430524"/>
+            <a:ext cx="1987138" cy="457200"/>
           </a:xfrm>
           <a:prstGeom prst="rect">
             <a:avLst/>
@@ -17884,7 +17884,7 @@
         </p:spPr>
         <p:txBody>
           <a:bodyPr wrap="none" lIns="45720" rIns="45720" tIns="18288" bIns="18288" anchor="ctr">
-            <a:spAutoFit/>
+            <a:noAutofit/>
           </a:bodyPr>
           <a:lstStyle/>
           <a:p>
@@ -17917,7 +17917,7 @@
         </p:blipFill>
         <p:spPr>
           <a:xfrm>
-            <a:off x="9701784" y="3203448"/>
+            <a:off x="8986481" y="3454908"/>
             <a:ext cx="1679448" cy="408432"/>
           </a:xfrm>
           <a:prstGeom prst="rect">
@@ -17933,7 +17933,7 @@
         </p:nvSpPr>
         <p:spPr>
           <a:xfrm>
-            <a:off x="987552" y="4026408"/>
+            <a:off x="987552" y="4367784"/>
             <a:ext cx="10131551" cy="475488"/>
           </a:xfrm>
           <a:prstGeom prst="rect">
@@ -17968,8 +17968,8 @@
         </p:nvSpPr>
         <p:spPr>
           <a:xfrm>
-            <a:off x="987552" y="4814316"/>
-            <a:ext cx="4767072" cy="457200"/>
+            <a:off x="987552" y="5256275"/>
+            <a:ext cx="4433488" cy="457200"/>
           </a:xfrm>
           <a:prstGeom prst="rect">
             <a:avLst/>
@@ -17978,7 +17978,7 @@
         </p:spPr>
         <p:txBody>
           <a:bodyPr wrap="none" lIns="45720" rIns="45720" tIns="18288" bIns="18288" anchor="ctr">
-            <a:spAutoFit/>
+            <a:noAutofit/>
           </a:bodyPr>
           <a:lstStyle/>
           <a:p>
@@ -17997,7 +17997,7 @@
       </p:sp>
       <p:pic>
         <p:nvPicPr>
-          <p:cNvPr id="23" name="Picture 22" descr="de35ec2a93f452e0.png"/>
+          <p:cNvPr id="23" name="Picture 22" descr="46b34ca9835aed66.png"/>
           <p:cNvPicPr>
             <a:picLocks noChangeAspect="1"/>
           </p:cNvPicPr>
@@ -18011,8 +18011,8 @@
         </p:blipFill>
         <p:spPr>
           <a:xfrm>
-            <a:off x="5617464" y="4739639"/>
-            <a:ext cx="3791712" cy="606552"/>
+            <a:off x="5283880" y="5081015"/>
+            <a:ext cx="4273296" cy="807720"/>
           </a:xfrm>
           <a:prstGeom prst="rect">
             <a:avLst/>
@@ -18319,7 +18319,7 @@
       </p:cxnSp>
       <p:pic>
         <p:nvPicPr>
-          <p:cNvPr id="10" name="Picture 9" descr="28da8c7406de9493.png"/>
+          <p:cNvPr id="10" name="Picture 9" descr="4f09efff4c80a14f.png"/>
           <p:cNvPicPr>
             <a:picLocks noChangeAspect="1"/>
           </p:cNvPicPr>
@@ -18333,8 +18333,8 @@
         </p:blipFill>
         <p:spPr>
           <a:xfrm>
-            <a:off x="3843528" y="2340864"/>
-            <a:ext cx="4474464" cy="566928"/>
+            <a:off x="3666744" y="2340864"/>
+            <a:ext cx="4828032" cy="752856"/>
           </a:xfrm>
           <a:prstGeom prst="rect">
             <a:avLst/>
@@ -18349,8 +18349,8 @@
         </p:nvSpPr>
         <p:spPr>
           <a:xfrm>
-            <a:off x="3210052" y="3159252"/>
-            <a:ext cx="1583944" cy="457200"/>
+            <a:off x="3439817" y="3345180"/>
+            <a:ext cx="1124413" cy="457200"/>
           </a:xfrm>
           <a:prstGeom prst="rect">
             <a:avLst/>
@@ -18359,7 +18359,7 @@
         </p:spPr>
         <p:txBody>
           <a:bodyPr wrap="none" lIns="45720" rIns="45720" tIns="18288" bIns="18288" anchor="ctr">
-            <a:spAutoFit/>
+            <a:noAutofit/>
           </a:bodyPr>
           <a:lstStyle/>
           <a:p>
@@ -18392,7 +18392,7 @@
         </p:blipFill>
         <p:spPr>
           <a:xfrm>
-            <a:off x="4656836" y="3214116"/>
+            <a:off x="4427070" y="3400044"/>
             <a:ext cx="4294632" cy="347472"/>
           </a:xfrm>
           <a:prstGeom prst="rect">
@@ -18402,7 +18402,7 @@
       </p:pic>
       <p:pic>
         <p:nvPicPr>
-          <p:cNvPr id="13" name="Picture 12" descr="422af91a2bdf784b.png"/>
+          <p:cNvPr id="13" name="Picture 12" descr="8268a601a870209c.png"/>
           <p:cNvPicPr>
             <a:picLocks noChangeAspect="1"/>
           </p:cNvPicPr>
@@ -18416,8 +18416,8 @@
         </p:blipFill>
         <p:spPr>
           <a:xfrm>
-            <a:off x="4357116" y="3867912"/>
-            <a:ext cx="3447288" cy="621792"/>
+            <a:off x="4216908" y="4053839"/>
+            <a:ext cx="3727704" cy="829056"/>
           </a:xfrm>
           <a:prstGeom prst="rect">
             <a:avLst/>
@@ -18432,7 +18432,7 @@
         </p:nvSpPr>
         <p:spPr>
           <a:xfrm>
-            <a:off x="987552" y="4828032"/>
+            <a:off x="987552" y="5221223"/>
             <a:ext cx="10131551" cy="950976"/>
           </a:xfrm>
           <a:prstGeom prst="rect">
@@ -18724,7 +18724,7 @@
       </p:sp>
       <p:pic>
         <p:nvPicPr>
-          <p:cNvPr id="9" name="Picture 8" descr="6881682f42a0c6a6.png"/>
+          <p:cNvPr id="9" name="Picture 8" descr="55e053ce9247b821.png"/>
           <p:cNvPicPr>
             <a:picLocks noChangeAspect="1"/>
           </p:cNvPicPr>
@@ -18738,8 +18738,8 @@
         </p:blipFill>
         <p:spPr>
           <a:xfrm>
-            <a:off x="5881115" y="2103120"/>
-            <a:ext cx="399288" cy="606552"/>
+            <a:off x="5795772" y="2103120"/>
+            <a:ext cx="569976" cy="816864"/>
           </a:xfrm>
           <a:prstGeom prst="rect">
             <a:avLst/>
@@ -18754,7 +18754,7 @@
         </p:nvSpPr>
         <p:spPr>
           <a:xfrm>
-            <a:off x="777240" y="3212592"/>
+            <a:off x="777240" y="3422904"/>
             <a:ext cx="10607040" cy="429370"/>
           </a:xfrm>
           <a:prstGeom prst="rect">
@@ -19046,7 +19046,7 @@
       </p:sp>
       <p:pic>
         <p:nvPicPr>
-          <p:cNvPr id="9" name="Picture 8" descr="8cdab3b408eff0cb.png"/>
+          <p:cNvPr id="9" name="Picture 8" descr="e0f8be0c80089b9a.png"/>
           <p:cNvPicPr>
             <a:picLocks noChangeAspect="1"/>
           </p:cNvPicPr>
@@ -19061,7 +19061,7 @@
         <p:spPr>
           <a:xfrm>
             <a:off x="1828800" y="1920240"/>
-            <a:ext cx="1106424" cy="615696"/>
+            <a:ext cx="1386840" cy="826008"/>
           </a:xfrm>
           <a:prstGeom prst="rect">
             <a:avLst/>
@@ -19076,7 +19076,7 @@
         </p:nvSpPr>
         <p:spPr>
           <a:xfrm>
-            <a:off x="3392424" y="1999487"/>
+            <a:off x="3672840" y="2104644"/>
             <a:ext cx="6400800" cy="502920"/>
           </a:xfrm>
           <a:prstGeom prst="rect">
@@ -19105,7 +19105,7 @@
       </p:sp>
       <p:pic>
         <p:nvPicPr>
-          <p:cNvPr id="11" name="Picture 10" descr="eaa3f2ff650e4031.png"/>
+          <p:cNvPr id="11" name="Picture 10" descr="0a8461b7034c502c.png"/>
           <p:cNvPicPr>
             <a:picLocks noChangeAspect="1"/>
           </p:cNvPicPr>
@@ -19119,8 +19119,8 @@
         </p:blipFill>
         <p:spPr>
           <a:xfrm>
-            <a:off x="1828800" y="2810256"/>
-            <a:ext cx="2529840" cy="606552"/>
+            <a:off x="1828800" y="3020568"/>
+            <a:ext cx="2761488" cy="810768"/>
           </a:xfrm>
           <a:prstGeom prst="rect">
             <a:avLst/>
@@ -19135,8 +19135,8 @@
         </p:nvSpPr>
         <p:spPr>
           <a:xfrm>
-            <a:off x="4815840" y="2884932"/>
-            <a:ext cx="6400800" cy="502920"/>
+            <a:off x="5047488" y="3197352"/>
+            <a:ext cx="6336792" cy="502920"/>
           </a:xfrm>
           <a:prstGeom prst="rect">
             <a:avLst/>
@@ -19462,7 +19462,7 @@
       </p:sp>
       <p:pic>
         <p:nvPicPr>
-          <p:cNvPr id="9" name="Picture 8" descr="5d1f1a56c863e514.png"/>
+          <p:cNvPr id="9" name="Picture 8" descr="04c00c9d3a9d2478.png"/>
           <p:cNvPicPr>
             <a:picLocks noChangeAspect="1"/>
           </p:cNvPicPr>
@@ -19476,8 +19476,8 @@
         </p:blipFill>
         <p:spPr>
           <a:xfrm>
-            <a:off x="5830823" y="2194560"/>
-            <a:ext cx="499871" cy="762000"/>
+            <a:off x="5725667" y="2194560"/>
+            <a:ext cx="710184" cy="1021080"/>
           </a:xfrm>
           <a:prstGeom prst="rect">
             <a:avLst/>

--- a/a7/build/out/u3/A7 3.04  Slides.pptx
+++ b/a7/build/out/u3/A7 3.04  Slides.pptx
@@ -3835,7 +3835,7 @@
       </p:sp>
       <p:pic>
         <p:nvPicPr>
-          <p:cNvPr id="9" name="Picture 8" descr="04c00c9d3a9d2478.png"/>
+          <p:cNvPr id="9" name="Picture 8" descr="62c59c684174d8ff.png"/>
           <p:cNvPicPr>
             <a:picLocks noChangeAspect="1"/>
           </p:cNvPicPr>
@@ -3849,8 +3849,8 @@
         </p:blipFill>
         <p:spPr>
           <a:xfrm>
-            <a:off x="5725667" y="2194560"/>
-            <a:ext cx="710184" cy="1021080"/>
+            <a:off x="5718048" y="2194560"/>
+            <a:ext cx="725424" cy="1014984"/>
           </a:xfrm>
           <a:prstGeom prst="rect">
             <a:avLst/>
@@ -3865,7 +3865,7 @@
         </p:nvSpPr>
         <p:spPr>
           <a:xfrm>
-            <a:off x="777240" y="3535680"/>
+            <a:off x="777240" y="3529584"/>
             <a:ext cx="10607040" cy="429370"/>
           </a:xfrm>
           <a:prstGeom prst="rect">
@@ -4565,7 +4565,7 @@
       </p:sp>
       <p:pic>
         <p:nvPicPr>
-          <p:cNvPr id="9" name="Picture 8" descr="cdf1ba36d2f10ae1.png"/>
+          <p:cNvPr id="9" name="Picture 8" descr="de363ea742e8facf.png"/>
           <p:cNvPicPr>
             <a:picLocks noChangeAspect="1"/>
           </p:cNvPicPr>
@@ -4580,7 +4580,7 @@
         <p:spPr>
           <a:xfrm>
             <a:off x="1828800" y="1920240"/>
-            <a:ext cx="2926080" cy="807720"/>
+            <a:ext cx="2938272" cy="804672"/>
           </a:xfrm>
           <a:prstGeom prst="rect">
             <a:avLst/>
@@ -4595,8 +4595,8 @@
         </p:nvSpPr>
         <p:spPr>
           <a:xfrm>
-            <a:off x="5212080" y="2095500"/>
-            <a:ext cx="6172199" cy="502920"/>
+            <a:off x="5224272" y="2093976"/>
+            <a:ext cx="6160008" cy="502920"/>
           </a:xfrm>
           <a:prstGeom prst="rect">
             <a:avLst/>
@@ -4624,7 +4624,7 @@
       </p:sp>
       <p:pic>
         <p:nvPicPr>
-          <p:cNvPr id="11" name="Picture 10" descr="1a38ee3eb12962a5.png"/>
+          <p:cNvPr id="11" name="Picture 10" descr="1ac09e500b958de7.png"/>
           <p:cNvPicPr>
             <a:picLocks noChangeAspect="1"/>
           </p:cNvPicPr>
@@ -4638,8 +4638,8 @@
         </p:blipFill>
         <p:spPr>
           <a:xfrm>
-            <a:off x="1828800" y="3002280"/>
-            <a:ext cx="2368296" cy="807720"/>
+            <a:off x="1828800" y="2999232"/>
+            <a:ext cx="2380488" cy="804672"/>
           </a:xfrm>
           <a:prstGeom prst="rect">
             <a:avLst/>
@@ -4654,7 +4654,7 @@
         </p:nvSpPr>
         <p:spPr>
           <a:xfrm>
-            <a:off x="4654296" y="3177539"/>
+            <a:off x="4666488" y="3172968"/>
             <a:ext cx="6400800" cy="502920"/>
           </a:xfrm>
           <a:prstGeom prst="rect">
@@ -4701,7 +4701,7 @@
       </p:sp>
       <p:pic>
         <p:nvPicPr>
-          <p:cNvPr id="13" name="Picture 12" descr="21e65f32b13ec600.png"/>
+          <p:cNvPr id="13" name="Picture 12" descr="c29b4c4413d87ca0.png"/>
           <p:cNvPicPr>
             <a:picLocks noChangeAspect="1"/>
           </p:cNvPicPr>
@@ -4715,8 +4715,8 @@
         </p:blipFill>
         <p:spPr>
           <a:xfrm>
-            <a:off x="1828800" y="4084319"/>
-            <a:ext cx="1530096" cy="344424"/>
+            <a:off x="1828800" y="4078224"/>
+            <a:ext cx="1530096" cy="347472"/>
           </a:xfrm>
           <a:prstGeom prst="rect">
             <a:avLst/>
@@ -4731,7 +4731,7 @@
         </p:nvSpPr>
         <p:spPr>
           <a:xfrm>
-            <a:off x="3816096" y="4027931"/>
+            <a:off x="3816096" y="4023360"/>
             <a:ext cx="6400800" cy="502920"/>
           </a:xfrm>
           <a:prstGeom prst="rect">
@@ -4766,7 +4766,7 @@
         </p:nvSpPr>
         <p:spPr>
           <a:xfrm>
-            <a:off x="777240" y="4885944"/>
+            <a:off x="777240" y="4882896"/>
             <a:ext cx="10607040" cy="548640"/>
           </a:xfrm>
           <a:prstGeom prst="rect">
@@ -5345,7 +5345,7 @@
       </p:sp>
       <p:pic>
         <p:nvPicPr>
-          <p:cNvPr id="9" name="Picture 8" descr="3d867da857833487.png"/>
+          <p:cNvPr id="9" name="Picture 8" descr="550df0579f9a7f26.png"/>
           <p:cNvPicPr>
             <a:picLocks noChangeAspect="1"/>
           </p:cNvPicPr>
@@ -5359,8 +5359,8 @@
         </p:blipFill>
         <p:spPr>
           <a:xfrm>
-            <a:off x="5382767" y="2194560"/>
-            <a:ext cx="1395984" cy="1188720"/>
+            <a:off x="5375148" y="2194560"/>
+            <a:ext cx="1411224" cy="1185672"/>
           </a:xfrm>
           <a:prstGeom prst="rect">
             <a:avLst/>
@@ -5375,7 +5375,7 @@
         </p:nvSpPr>
         <p:spPr>
           <a:xfrm>
-            <a:off x="777240" y="3703320"/>
+            <a:off x="777240" y="3700271"/>
             <a:ext cx="10607040" cy="429370"/>
           </a:xfrm>
           <a:prstGeom prst="rect">
@@ -6068,7 +6068,7 @@
       </p:sp>
       <p:pic>
         <p:nvPicPr>
-          <p:cNvPr id="9" name="Picture 8" descr="2d36713d8b05952d.png"/>
+          <p:cNvPr id="9" name="Picture 8" descr="b184a5178b874211.png"/>
           <p:cNvPicPr>
             <a:picLocks noChangeAspect="1"/>
           </p:cNvPicPr>
@@ -6082,8 +6082,8 @@
         </p:blipFill>
         <p:spPr>
           <a:xfrm>
-            <a:off x="5765292" y="2103120"/>
-            <a:ext cx="630936" cy="426720"/>
+            <a:off x="5763767" y="2103120"/>
+            <a:ext cx="633984" cy="426720"/>
           </a:xfrm>
           <a:prstGeom prst="rect">
             <a:avLst/>
@@ -7020,7 +7020,7 @@
         </p:nvSpPr>
         <p:spPr>
           <a:xfrm>
-            <a:off x="2706116" y="2080260"/>
+            <a:off x="2704592" y="2080260"/>
             <a:ext cx="4236922" cy="457200"/>
           </a:xfrm>
           <a:prstGeom prst="rect">
@@ -7049,7 +7049,7 @@
       </p:sp>
       <p:pic>
         <p:nvPicPr>
-          <p:cNvPr id="10" name="Picture 9" descr="c9adefc290aa5b44.png"/>
+          <p:cNvPr id="10" name="Picture 9" descr="8f4fc9fafaaefa38.png"/>
           <p:cNvPicPr>
             <a:picLocks noChangeAspect="1"/>
           </p:cNvPicPr>
@@ -7063,8 +7063,8 @@
         </p:blipFill>
         <p:spPr>
           <a:xfrm>
-            <a:off x="6805879" y="2142744"/>
-            <a:ext cx="521207" cy="332232"/>
+            <a:off x="6804355" y="2144268"/>
+            <a:ext cx="524256" cy="329184"/>
           </a:xfrm>
           <a:prstGeom prst="rect">
             <a:avLst/>
@@ -7079,7 +7079,7 @@
         </p:nvSpPr>
         <p:spPr>
           <a:xfrm>
-            <a:off x="7327087" y="2080260"/>
+            <a:off x="7328611" y="2080260"/>
             <a:ext cx="2265475" cy="457200"/>
           </a:xfrm>
           <a:prstGeom prst="rect">
@@ -7149,7 +7149,7 @@
         </p:nvSpPr>
         <p:spPr>
           <a:xfrm>
-            <a:off x="3903866" y="3340939"/>
+            <a:off x="3902342" y="3340939"/>
             <a:ext cx="3643910" cy="457200"/>
           </a:xfrm>
           <a:prstGeom prst="rect">
@@ -7178,7 +7178,7 @@
       </p:sp>
       <p:pic>
         <p:nvPicPr>
-          <p:cNvPr id="14" name="Picture 13" descr="c9adefc290aa5b44.png"/>
+          <p:cNvPr id="14" name="Picture 13" descr="8f4fc9fafaaefa38.png"/>
           <p:cNvPicPr>
             <a:picLocks noChangeAspect="1"/>
           </p:cNvPicPr>
@@ -7192,8 +7192,8 @@
         </p:blipFill>
         <p:spPr>
           <a:xfrm>
-            <a:off x="7410617" y="3403423"/>
-            <a:ext cx="521207" cy="332232"/>
+            <a:off x="7409093" y="3404947"/>
+            <a:ext cx="524256" cy="329184"/>
           </a:xfrm>
           <a:prstGeom prst="rect">
             <a:avLst/>
@@ -7208,7 +7208,7 @@
         </p:nvSpPr>
         <p:spPr>
           <a:xfrm>
-            <a:off x="7931825" y="3340939"/>
+            <a:off x="7933349" y="3340939"/>
             <a:ext cx="462987" cy="457200"/>
           </a:xfrm>
           <a:prstGeom prst="rect">
@@ -8588,7 +8588,7 @@
       </p:sp>
       <p:pic>
         <p:nvPicPr>
-          <p:cNvPr id="9" name="Picture 8" descr="229e5926a19b9fe2.png"/>
+          <p:cNvPr id="9" name="Picture 8" descr="99931859c151405d.png"/>
           <p:cNvPicPr>
             <a:picLocks noChangeAspect="1"/>
           </p:cNvPicPr>
@@ -8602,8 +8602,8 @@
         </p:blipFill>
         <p:spPr>
           <a:xfrm>
-            <a:off x="5599176" y="2103120"/>
-            <a:ext cx="963167" cy="932688"/>
+            <a:off x="5591555" y="2103120"/>
+            <a:ext cx="978408" cy="932688"/>
           </a:xfrm>
           <a:prstGeom prst="rect">
             <a:avLst/>
@@ -9329,7 +9329,7 @@
       </p:sp>
       <p:pic>
         <p:nvPicPr>
-          <p:cNvPr id="9" name="Picture 8" descr="c242b51e1e2a08aa.png"/>
+          <p:cNvPr id="9" name="Picture 8" descr="02fd06d9d06458dd.png"/>
           <p:cNvPicPr>
             <a:picLocks noChangeAspect="1"/>
           </p:cNvPicPr>
@@ -9343,8 +9343,8 @@
         </p:blipFill>
         <p:spPr>
           <a:xfrm>
-            <a:off x="5420867" y="2103120"/>
-            <a:ext cx="1319784" cy="512064"/>
+            <a:off x="5417820" y="2103120"/>
+            <a:ext cx="1325880" cy="512064"/>
           </a:xfrm>
           <a:prstGeom prst="rect">
             <a:avLst/>
@@ -10261,7 +10261,7 @@
       </p:sp>
       <p:pic>
         <p:nvPicPr>
-          <p:cNvPr id="9" name="Picture 8" descr="2f69500044ec6e87.png"/>
+          <p:cNvPr id="9" name="Picture 8" descr="51555c3ab4f8213b.png"/>
           <p:cNvPicPr>
             <a:picLocks noChangeAspect="1"/>
           </p:cNvPicPr>
@@ -10275,8 +10275,8 @@
         </p:blipFill>
         <p:spPr>
           <a:xfrm>
-            <a:off x="5751575" y="2103120"/>
-            <a:ext cx="658368" cy="432816"/>
+            <a:off x="5748528" y="2103120"/>
+            <a:ext cx="664464" cy="429768"/>
           </a:xfrm>
           <a:prstGeom prst="rect">
             <a:avLst/>
@@ -10291,7 +10291,7 @@
         </p:nvSpPr>
         <p:spPr>
           <a:xfrm>
-            <a:off x="777240" y="2764535"/>
+            <a:off x="777240" y="2761487"/>
             <a:ext cx="10607040" cy="465151"/>
           </a:xfrm>
           <a:prstGeom prst="rect">
@@ -10326,7 +10326,7 @@
         </p:nvSpPr>
         <p:spPr>
           <a:xfrm>
-            <a:off x="1874519" y="3430855"/>
+            <a:off x="1874519" y="3427807"/>
             <a:ext cx="4572000" cy="548640"/>
           </a:xfrm>
           <a:prstGeom prst="rect">
@@ -10370,7 +10370,7 @@
         </p:nvSpPr>
         <p:spPr>
           <a:xfrm>
-            <a:off x="6629400" y="3430855"/>
+            <a:off x="6629400" y="3427807"/>
             <a:ext cx="4572000" cy="548640"/>
           </a:xfrm>
           <a:prstGeom prst="rect">
@@ -10414,7 +10414,7 @@
         </p:nvSpPr>
         <p:spPr>
           <a:xfrm>
-            <a:off x="1874519" y="4116655"/>
+            <a:off x="1874519" y="4113607"/>
             <a:ext cx="4572000" cy="548640"/>
           </a:xfrm>
           <a:prstGeom prst="rect">
@@ -10458,7 +10458,7 @@
         </p:nvSpPr>
         <p:spPr>
           <a:xfrm>
-            <a:off x="6629400" y="4116655"/>
+            <a:off x="6629400" y="4113607"/>
             <a:ext cx="4572000" cy="548640"/>
           </a:xfrm>
           <a:prstGeom prst="rect">
@@ -10502,7 +10502,7 @@
         </p:nvSpPr>
         <p:spPr>
           <a:xfrm>
-            <a:off x="777240" y="5122495"/>
+            <a:off x="777240" y="5119447"/>
             <a:ext cx="10607040" cy="548640"/>
           </a:xfrm>
           <a:prstGeom prst="rect">
@@ -11363,7 +11363,7 @@
       </p:sp>
       <p:pic>
         <p:nvPicPr>
-          <p:cNvPr id="9" name="Picture 8" descr="9e50adf1c8369698.png"/>
+          <p:cNvPr id="9" name="Picture 8" descr="bc8fbfd36b278f0f.png"/>
           <p:cNvPicPr>
             <a:picLocks noChangeAspect="1"/>
           </p:cNvPicPr>
@@ -12298,7 +12298,7 @@
       </p:sp>
       <p:pic>
         <p:nvPicPr>
-          <p:cNvPr id="9" name="Picture 8" descr="e37e6585587b7338.png"/>
+          <p:cNvPr id="9" name="Picture 8" descr="df6239309438ca6d.png"/>
           <p:cNvPicPr>
             <a:picLocks noChangeAspect="1"/>
           </p:cNvPicPr>
@@ -12313,7 +12313,7 @@
         <p:spPr>
           <a:xfrm>
             <a:off x="5375148" y="2103120"/>
-            <a:ext cx="1411224" cy="432816"/>
+            <a:ext cx="1411224" cy="426720"/>
           </a:xfrm>
           <a:prstGeom prst="rect">
             <a:avLst/>
@@ -12328,7 +12328,7 @@
         </p:nvSpPr>
         <p:spPr>
           <a:xfrm>
-            <a:off x="1828800" y="2810255"/>
+            <a:off x="1828800" y="2804160"/>
             <a:ext cx="8503920" cy="548640"/>
           </a:xfrm>
           <a:prstGeom prst="rect">
@@ -13837,7 +13837,7 @@
       </p:sp>
       <p:pic>
         <p:nvPicPr>
-          <p:cNvPr id="9" name="Picture 8" descr="d5e2dc9bfa32dfce.png"/>
+          <p:cNvPr id="9" name="Picture 8" descr="b67ccf22692bcffd.png"/>
           <p:cNvPicPr>
             <a:picLocks noChangeAspect="1"/>
           </p:cNvPicPr>
@@ -13851,8 +13851,8 @@
         </p:blipFill>
         <p:spPr>
           <a:xfrm>
-            <a:off x="5725667" y="2103120"/>
-            <a:ext cx="710184" cy="1027176"/>
+            <a:off x="5718048" y="2103120"/>
+            <a:ext cx="725424" cy="1024128"/>
           </a:xfrm>
           <a:prstGeom prst="rect">
             <a:avLst/>
@@ -13867,7 +13867,7 @@
         </p:nvSpPr>
         <p:spPr>
           <a:xfrm>
-            <a:off x="1828800" y="3404615"/>
+            <a:off x="1828800" y="3401568"/>
             <a:ext cx="8503920" cy="548640"/>
           </a:xfrm>
           <a:prstGeom prst="rect">
@@ -14695,7 +14695,7 @@
         </p:nvSpPr>
         <p:spPr>
           <a:xfrm>
-            <a:off x="3151600" y="2080260"/>
+            <a:off x="3148552" y="2080260"/>
             <a:ext cx="4034887" cy="457200"/>
           </a:xfrm>
           <a:prstGeom prst="rect">
@@ -14724,7 +14724,7 @@
       </p:sp>
       <p:pic>
         <p:nvPicPr>
-          <p:cNvPr id="10" name="Picture 9" descr="b9af177cb680bce6.png"/>
+          <p:cNvPr id="10" name="Picture 9" descr="418bbff52ec96985.png"/>
           <p:cNvPicPr>
             <a:picLocks noChangeAspect="1"/>
           </p:cNvPicPr>
@@ -14738,8 +14738,8 @@
         </p:blipFill>
         <p:spPr>
           <a:xfrm>
-            <a:off x="7049327" y="2138171"/>
-            <a:ext cx="527304" cy="341376"/>
+            <a:off x="7046279" y="2138171"/>
+            <a:ext cx="533400" cy="341376"/>
           </a:xfrm>
           <a:prstGeom prst="rect">
             <a:avLst/>
@@ -14754,7 +14754,7 @@
         </p:nvSpPr>
         <p:spPr>
           <a:xfrm>
-            <a:off x="7576631" y="2080260"/>
+            <a:off x="7579679" y="2080260"/>
             <a:ext cx="1570447" cy="457200"/>
           </a:xfrm>
           <a:prstGeom prst="rect">
@@ -17168,7 +17168,7 @@
       </p:graphicFrame>
       <p:pic>
         <p:nvPicPr>
-          <p:cNvPr id="12" name="Picture 11" descr="ebe12bfa89ed6e98.png"/>
+          <p:cNvPr id="12" name="Picture 11" descr="76752f6b90e3aec4.png"/>
           <p:cNvPicPr>
             <a:picLocks noChangeAspect="1"/>
           </p:cNvPicPr>
@@ -17182,8 +17182,8 @@
         </p:blipFill>
         <p:spPr>
           <a:xfrm>
-            <a:off x="2591292" y="3337560"/>
-            <a:ext cx="1325880" cy="734568"/>
+            <a:off x="2586720" y="3337560"/>
+            <a:ext cx="1328928" cy="734568"/>
           </a:xfrm>
           <a:prstGeom prst="rect">
             <a:avLst/>
@@ -17198,7 +17198,7 @@
         </p:nvSpPr>
         <p:spPr>
           <a:xfrm>
-            <a:off x="3917172" y="3476244"/>
+            <a:off x="3915648" y="3476244"/>
             <a:ext cx="988583" cy="457200"/>
           </a:xfrm>
           <a:prstGeom prst="rect">
@@ -17227,7 +17227,7 @@
       </p:sp>
       <p:pic>
         <p:nvPicPr>
-          <p:cNvPr id="14" name="Picture 13" descr="493072ca0d3f98a4.png"/>
+          <p:cNvPr id="14" name="Picture 13" descr="f4a0184cab2e1fb6.png"/>
           <p:cNvPicPr>
             <a:picLocks noChangeAspect="1"/>
           </p:cNvPicPr>
@@ -17241,8 +17241,8 @@
         </p:blipFill>
         <p:spPr>
           <a:xfrm>
-            <a:off x="4768596" y="3337560"/>
-            <a:ext cx="1975104" cy="734568"/>
+            <a:off x="4767072" y="3337560"/>
+            <a:ext cx="1978152" cy="734568"/>
           </a:xfrm>
           <a:prstGeom prst="rect">
             <a:avLst/>
@@ -17257,7 +17257,7 @@
         </p:nvSpPr>
         <p:spPr>
           <a:xfrm>
-            <a:off x="6743700" y="3476244"/>
+            <a:off x="6745224" y="3476244"/>
             <a:ext cx="988583" cy="457200"/>
           </a:xfrm>
           <a:prstGeom prst="rect">
@@ -17286,7 +17286,7 @@
       </p:sp>
       <p:pic>
         <p:nvPicPr>
-          <p:cNvPr id="16" name="Picture 15" descr="afb28c8af5b1a3a3.png"/>
+          <p:cNvPr id="16" name="Picture 15" descr="0d236d65c9794bea.png"/>
           <p:cNvPicPr>
             <a:picLocks noChangeAspect="1"/>
           </p:cNvPicPr>
@@ -17300,8 +17300,8 @@
         </p:blipFill>
         <p:spPr>
           <a:xfrm>
-            <a:off x="7595123" y="3337560"/>
-            <a:ext cx="1975104" cy="734568"/>
+            <a:off x="7596647" y="3337560"/>
+            <a:ext cx="1978152" cy="734568"/>
           </a:xfrm>
           <a:prstGeom prst="rect">
             <a:avLst/>
@@ -17608,7 +17608,7 @@
       </p:cxnSp>
       <p:pic>
         <p:nvPicPr>
-          <p:cNvPr id="10" name="Picture 9" descr="e2ab36ea2231b313.png"/>
+          <p:cNvPr id="10" name="Picture 9" descr="21929059091f4e5d.png"/>
           <p:cNvPicPr>
             <a:picLocks noChangeAspect="1"/>
           </p:cNvPicPr>
@@ -17622,7 +17622,7 @@
         </p:blipFill>
         <p:spPr>
           <a:xfrm>
-            <a:off x="3106201" y="2340864"/>
+            <a:off x="3100105" y="2340864"/>
             <a:ext cx="1368552" cy="673608"/>
           </a:xfrm>
           <a:prstGeom prst="rect">
@@ -17638,7 +17638,7 @@
         </p:nvSpPr>
         <p:spPr>
           <a:xfrm>
-            <a:off x="4474753" y="2449068"/>
+            <a:off x="4468657" y="2449068"/>
             <a:ext cx="1183151" cy="457200"/>
           </a:xfrm>
           <a:prstGeom prst="rect">
@@ -17667,7 +17667,7 @@
       </p:sp>
       <p:pic>
         <p:nvPicPr>
-          <p:cNvPr id="12" name="Picture 11" descr="9e89c251bf9b33bb.png"/>
+          <p:cNvPr id="12" name="Picture 11" descr="8af686798a26cf5e.png"/>
           <p:cNvPicPr>
             <a:picLocks noChangeAspect="1"/>
           </p:cNvPicPr>
@@ -17681,8 +17681,8 @@
         </p:blipFill>
         <p:spPr>
           <a:xfrm>
-            <a:off x="5520745" y="2340864"/>
-            <a:ext cx="1395984" cy="673608"/>
+            <a:off x="5514649" y="2340864"/>
+            <a:ext cx="1408176" cy="673608"/>
           </a:xfrm>
           <a:prstGeom prst="rect">
             <a:avLst/>
@@ -17697,7 +17697,7 @@
         </p:nvSpPr>
         <p:spPr>
           <a:xfrm>
-            <a:off x="6916729" y="2449068"/>
+            <a:off x="6922825" y="2449068"/>
             <a:ext cx="1299682" cy="457200"/>
           </a:xfrm>
           <a:prstGeom prst="rect">
@@ -17726,7 +17726,7 @@
       </p:sp>
       <p:pic>
         <p:nvPicPr>
-          <p:cNvPr id="14" name="Picture 13" descr="1556166feb118f41.png"/>
+          <p:cNvPr id="14" name="Picture 13" descr="e9238f2ad6182a0d.png"/>
           <p:cNvPicPr>
             <a:picLocks noChangeAspect="1"/>
           </p:cNvPicPr>
@@ -17740,7 +17740,7 @@
         </p:blipFill>
         <p:spPr>
           <a:xfrm>
-            <a:off x="8079251" y="2508504"/>
+            <a:off x="8085347" y="2508504"/>
             <a:ext cx="786384" cy="338328"/>
           </a:xfrm>
           <a:prstGeom prst="rect">
@@ -17756,7 +17756,7 @@
         </p:nvSpPr>
         <p:spPr>
           <a:xfrm>
-            <a:off x="8865635" y="2449068"/>
+            <a:off x="8871731" y="2449068"/>
             <a:ext cx="326842" cy="457200"/>
           </a:xfrm>
           <a:prstGeom prst="rect">
@@ -17785,7 +17785,7 @@
       </p:sp>
       <p:pic>
         <p:nvPicPr>
-          <p:cNvPr id="16" name="Picture 15" descr="fb699f75871fd57d.png"/>
+          <p:cNvPr id="16" name="Picture 15" descr="0076c46e61cf33dd.png"/>
           <p:cNvPicPr>
             <a:picLocks noChangeAspect="1"/>
           </p:cNvPicPr>
@@ -17800,7 +17800,7 @@
         <p:spPr>
           <a:xfrm>
             <a:off x="1495590" y="3288792"/>
-            <a:ext cx="2176272" cy="740664"/>
+            <a:ext cx="2179320" cy="740664"/>
           </a:xfrm>
           <a:prstGeom prst="rect">
             <a:avLst/>
@@ -17815,7 +17815,7 @@
         </p:nvSpPr>
         <p:spPr>
           <a:xfrm>
-            <a:off x="3671862" y="3430524"/>
+            <a:off x="3674910" y="3430524"/>
             <a:ext cx="1922352" cy="457200"/>
           </a:xfrm>
           <a:prstGeom prst="rect">
@@ -17844,7 +17844,7 @@
       </p:sp>
       <p:pic>
         <p:nvPicPr>
-          <p:cNvPr id="18" name="Picture 17" descr="69eb437d43f9044a.png"/>
+          <p:cNvPr id="18" name="Picture 17" descr="2402c94260d4dcde.png"/>
           <p:cNvPicPr>
             <a:picLocks noChangeAspect="1"/>
           </p:cNvPicPr>
@@ -17858,7 +17858,7 @@
         </p:blipFill>
         <p:spPr>
           <a:xfrm>
-            <a:off x="5457055" y="3488436"/>
+            <a:off x="5460103" y="3488436"/>
             <a:ext cx="1679448" cy="341376"/>
           </a:xfrm>
           <a:prstGeom prst="rect">
@@ -17874,7 +17874,7 @@
         </p:nvSpPr>
         <p:spPr>
           <a:xfrm>
-            <a:off x="7136503" y="3430524"/>
+            <a:off x="7139551" y="3430524"/>
             <a:ext cx="1987138" cy="457200"/>
           </a:xfrm>
           <a:prstGeom prst="rect">
@@ -17903,7 +17903,7 @@
       </p:sp>
       <p:pic>
         <p:nvPicPr>
-          <p:cNvPr id="20" name="Picture 19" descr="a57d7c8c14814cc4.png"/>
+          <p:cNvPr id="20" name="Picture 19" descr="99e40f005d3ae585.png"/>
           <p:cNvPicPr>
             <a:picLocks noChangeAspect="1"/>
           </p:cNvPicPr>
@@ -17917,8 +17917,8 @@
         </p:blipFill>
         <p:spPr>
           <a:xfrm>
-            <a:off x="8986481" y="3454908"/>
-            <a:ext cx="1679448" cy="408432"/>
+            <a:off x="8989529" y="3454908"/>
+            <a:ext cx="1676400" cy="408432"/>
           </a:xfrm>
           <a:prstGeom prst="rect">
             <a:avLst/>
@@ -17968,7 +17968,7 @@
         </p:nvSpPr>
         <p:spPr>
           <a:xfrm>
-            <a:off x="987552" y="5256275"/>
+            <a:off x="987552" y="5257799"/>
             <a:ext cx="4433488" cy="457200"/>
           </a:xfrm>
           <a:prstGeom prst="rect">
@@ -17997,7 +17997,7 @@
       </p:sp>
       <p:pic>
         <p:nvPicPr>
-          <p:cNvPr id="23" name="Picture 22" descr="46b34ca9835aed66.png"/>
+          <p:cNvPr id="23" name="Picture 22" descr="09c601891c6fc45f.png"/>
           <p:cNvPicPr>
             <a:picLocks noChangeAspect="1"/>
           </p:cNvPicPr>
@@ -18012,7 +18012,7 @@
         <p:spPr>
           <a:xfrm>
             <a:off x="5283880" y="5081015"/>
-            <a:ext cx="4273296" cy="807720"/>
+            <a:ext cx="4273296" cy="810768"/>
           </a:xfrm>
           <a:prstGeom prst="rect">
             <a:avLst/>
@@ -18319,7 +18319,7 @@
       </p:cxnSp>
       <p:pic>
         <p:nvPicPr>
-          <p:cNvPr id="10" name="Picture 9" descr="4f09efff4c80a14f.png"/>
+          <p:cNvPr id="10" name="Picture 9" descr="089c2c846a3e035b.png"/>
           <p:cNvPicPr>
             <a:picLocks noChangeAspect="1"/>
           </p:cNvPicPr>
@@ -18378,7 +18378,7 @@
       </p:sp>
       <p:pic>
         <p:nvPicPr>
-          <p:cNvPr id="12" name="Picture 11" descr="d704a80cfc434ebe.png"/>
+          <p:cNvPr id="12" name="Picture 11" descr="6542358f7cf09559.png"/>
           <p:cNvPicPr>
             <a:picLocks noChangeAspect="1"/>
           </p:cNvPicPr>
@@ -18402,7 +18402,7 @@
       </p:pic>
       <p:pic>
         <p:nvPicPr>
-          <p:cNvPr id="13" name="Picture 12" descr="8268a601a870209c.png"/>
+          <p:cNvPr id="13" name="Picture 12" descr="937601ac64579bf6.png"/>
           <p:cNvPicPr>
             <a:picLocks noChangeAspect="1"/>
           </p:cNvPicPr>
@@ -18416,8 +18416,8 @@
         </p:blipFill>
         <p:spPr>
           <a:xfrm>
-            <a:off x="4216908" y="4053839"/>
-            <a:ext cx="3727704" cy="829056"/>
+            <a:off x="4210812" y="4053839"/>
+            <a:ext cx="3739896" cy="826008"/>
           </a:xfrm>
           <a:prstGeom prst="rect">
             <a:avLst/>
@@ -18432,7 +18432,7 @@
         </p:nvSpPr>
         <p:spPr>
           <a:xfrm>
-            <a:off x="987552" y="5221223"/>
+            <a:off x="987552" y="5218175"/>
             <a:ext cx="10131551" cy="950976"/>
           </a:xfrm>
           <a:prstGeom prst="rect">
@@ -19046,7 +19046,7 @@
       </p:sp>
       <p:pic>
         <p:nvPicPr>
-          <p:cNvPr id="9" name="Picture 8" descr="e0f8be0c80089b9a.png"/>
+          <p:cNvPr id="9" name="Picture 8" descr="88c8ff7225ddeea7.png"/>
           <p:cNvPicPr>
             <a:picLocks noChangeAspect="1"/>
           </p:cNvPicPr>
@@ -19061,7 +19061,7 @@
         <p:spPr>
           <a:xfrm>
             <a:off x="1828800" y="1920240"/>
-            <a:ext cx="1386840" cy="826008"/>
+            <a:ext cx="1399032" cy="819912"/>
           </a:xfrm>
           <a:prstGeom prst="rect">
             <a:avLst/>
@@ -19076,7 +19076,7 @@
         </p:nvSpPr>
         <p:spPr>
           <a:xfrm>
-            <a:off x="3672840" y="2104644"/>
+            <a:off x="3685032" y="2101596"/>
             <a:ext cx="6400800" cy="502920"/>
           </a:xfrm>
           <a:prstGeom prst="rect">
@@ -19105,7 +19105,7 @@
       </p:sp>
       <p:pic>
         <p:nvPicPr>
-          <p:cNvPr id="11" name="Picture 10" descr="0a8461b7034c502c.png"/>
+          <p:cNvPr id="11" name="Picture 10" descr="0ebc6add04d32a86.png"/>
           <p:cNvPicPr>
             <a:picLocks noChangeAspect="1"/>
           </p:cNvPicPr>
@@ -19119,8 +19119,8 @@
         </p:blipFill>
         <p:spPr>
           <a:xfrm>
-            <a:off x="1828800" y="3020568"/>
-            <a:ext cx="2761488" cy="810768"/>
+            <a:off x="1828800" y="3014472"/>
+            <a:ext cx="2773680" cy="804672"/>
           </a:xfrm>
           <a:prstGeom prst="rect">
             <a:avLst/>
@@ -19135,8 +19135,8 @@
         </p:nvSpPr>
         <p:spPr>
           <a:xfrm>
-            <a:off x="5047488" y="3197352"/>
-            <a:ext cx="6336792" cy="502920"/>
+            <a:off x="5059680" y="3188207"/>
+            <a:ext cx="6324599" cy="502920"/>
           </a:xfrm>
           <a:prstGeom prst="rect">
             <a:avLst/>

--- a/a7/build/out/u3/A7 3.04  Slides.pptx
+++ b/a7/build/out/u3/A7 3.04  Slides.pptx
@@ -3835,7 +3835,7 @@
       </p:sp>
       <p:pic>
         <p:nvPicPr>
-          <p:cNvPr id="9" name="Picture 8" descr="62c59c684174d8ff.png"/>
+          <p:cNvPr id="9" name="Picture 8" descr="395fcf61f0d867ea.png"/>
           <p:cNvPicPr>
             <a:picLocks noChangeAspect="1"/>
           </p:cNvPicPr>
@@ -3849,8 +3849,8 @@
         </p:blipFill>
         <p:spPr>
           <a:xfrm>
-            <a:off x="5718048" y="2194560"/>
-            <a:ext cx="725424" cy="1014984"/>
+            <a:off x="5728716" y="2194560"/>
+            <a:ext cx="704088" cy="1014984"/>
           </a:xfrm>
           <a:prstGeom prst="rect">
             <a:avLst/>
@@ -4565,7 +4565,7 @@
       </p:sp>
       <p:pic>
         <p:nvPicPr>
-          <p:cNvPr id="9" name="Picture 8" descr="de363ea742e8facf.png"/>
+          <p:cNvPr id="9" name="Picture 8" descr="8b0ea9280595c69a.png"/>
           <p:cNvPicPr>
             <a:picLocks noChangeAspect="1"/>
           </p:cNvPicPr>
@@ -4580,7 +4580,7 @@
         <p:spPr>
           <a:xfrm>
             <a:off x="1828800" y="1920240"/>
-            <a:ext cx="2938272" cy="804672"/>
+            <a:ext cx="2929128" cy="804672"/>
           </a:xfrm>
           <a:prstGeom prst="rect">
             <a:avLst/>
@@ -4595,8 +4595,8 @@
         </p:nvSpPr>
         <p:spPr>
           <a:xfrm>
-            <a:off x="5224272" y="2093976"/>
-            <a:ext cx="6160008" cy="502920"/>
+            <a:off x="5215128" y="2093976"/>
+            <a:ext cx="6169151" cy="502920"/>
           </a:xfrm>
           <a:prstGeom prst="rect">
             <a:avLst/>
@@ -4624,7 +4624,7 @@
       </p:sp>
       <p:pic>
         <p:nvPicPr>
-          <p:cNvPr id="11" name="Picture 10" descr="1ac09e500b958de7.png"/>
+          <p:cNvPr id="11" name="Picture 10" descr="a0522eb547e4bac4.png"/>
           <p:cNvPicPr>
             <a:picLocks noChangeAspect="1"/>
           </p:cNvPicPr>
@@ -4639,7 +4639,7 @@
         <p:spPr>
           <a:xfrm>
             <a:off x="1828800" y="2999232"/>
-            <a:ext cx="2380488" cy="804672"/>
+            <a:ext cx="2368296" cy="804672"/>
           </a:xfrm>
           <a:prstGeom prst="rect">
             <a:avLst/>
@@ -4654,7 +4654,7 @@
         </p:nvSpPr>
         <p:spPr>
           <a:xfrm>
-            <a:off x="4666488" y="3172968"/>
+            <a:off x="4654296" y="3172968"/>
             <a:ext cx="6400800" cy="502920"/>
           </a:xfrm>
           <a:prstGeom prst="rect">
@@ -4701,7 +4701,7 @@
       </p:sp>
       <p:pic>
         <p:nvPicPr>
-          <p:cNvPr id="13" name="Picture 12" descr="c29b4c4413d87ca0.png"/>
+          <p:cNvPr id="13" name="Picture 12" descr="f5e46e308b616f81.png"/>
           <p:cNvPicPr>
             <a:picLocks noChangeAspect="1"/>
           </p:cNvPicPr>
@@ -5345,7 +5345,7 @@
       </p:sp>
       <p:pic>
         <p:nvPicPr>
-          <p:cNvPr id="9" name="Picture 8" descr="550df0579f9a7f26.png"/>
+          <p:cNvPr id="9" name="Picture 8" descr="bd647a6f29dfd2ac.png"/>
           <p:cNvPicPr>
             <a:picLocks noChangeAspect="1"/>
           </p:cNvPicPr>
@@ -5359,8 +5359,8 @@
         </p:blipFill>
         <p:spPr>
           <a:xfrm>
-            <a:off x="5375148" y="2194560"/>
-            <a:ext cx="1411224" cy="1185672"/>
+            <a:off x="5384291" y="2194560"/>
+            <a:ext cx="1392936" cy="1185672"/>
           </a:xfrm>
           <a:prstGeom prst="rect">
             <a:avLst/>
@@ -6068,7 +6068,7 @@
       </p:sp>
       <p:pic>
         <p:nvPicPr>
-          <p:cNvPr id="9" name="Picture 8" descr="b184a5178b874211.png"/>
+          <p:cNvPr id="9" name="Picture 8" descr="745cde1f9722bfe0.png"/>
           <p:cNvPicPr>
             <a:picLocks noChangeAspect="1"/>
           </p:cNvPicPr>
@@ -6082,8 +6082,8 @@
         </p:blipFill>
         <p:spPr>
           <a:xfrm>
-            <a:off x="5763767" y="2103120"/>
-            <a:ext cx="633984" cy="426720"/>
+            <a:off x="5762243" y="2103120"/>
+            <a:ext cx="637032" cy="426720"/>
           </a:xfrm>
           <a:prstGeom prst="rect">
             <a:avLst/>
@@ -7049,7 +7049,7 @@
       </p:sp>
       <p:pic>
         <p:nvPicPr>
-          <p:cNvPr id="10" name="Picture 9" descr="8f4fc9fafaaefa38.png"/>
+          <p:cNvPr id="10" name="Picture 9" descr="afdbc5b48ef250ed.png"/>
           <p:cNvPicPr>
             <a:picLocks noChangeAspect="1"/>
           </p:cNvPicPr>
@@ -7063,8 +7063,8 @@
         </p:blipFill>
         <p:spPr>
           <a:xfrm>
-            <a:off x="6804355" y="2144268"/>
-            <a:ext cx="524256" cy="329184"/>
+            <a:off x="6804355" y="2142744"/>
+            <a:ext cx="524256" cy="332232"/>
           </a:xfrm>
           <a:prstGeom prst="rect">
             <a:avLst/>
@@ -7178,7 +7178,7 @@
       </p:sp>
       <p:pic>
         <p:nvPicPr>
-          <p:cNvPr id="14" name="Picture 13" descr="8f4fc9fafaaefa38.png"/>
+          <p:cNvPr id="14" name="Picture 13" descr="afdbc5b48ef250ed.png"/>
           <p:cNvPicPr>
             <a:picLocks noChangeAspect="1"/>
           </p:cNvPicPr>
@@ -7192,8 +7192,8 @@
         </p:blipFill>
         <p:spPr>
           <a:xfrm>
-            <a:off x="7409093" y="3404947"/>
-            <a:ext cx="524256" cy="329184"/>
+            <a:off x="7409093" y="3403423"/>
+            <a:ext cx="524256" cy="332232"/>
           </a:xfrm>
           <a:prstGeom prst="rect">
             <a:avLst/>
@@ -8588,7 +8588,7 @@
       </p:sp>
       <p:pic>
         <p:nvPicPr>
-          <p:cNvPr id="9" name="Picture 8" descr="99931859c151405d.png"/>
+          <p:cNvPr id="9" name="Picture 8" descr="8f039f3016127628.png"/>
           <p:cNvPicPr>
             <a:picLocks noChangeAspect="1"/>
           </p:cNvPicPr>
@@ -8602,8 +8602,8 @@
         </p:blipFill>
         <p:spPr>
           <a:xfrm>
-            <a:off x="5591555" y="2103120"/>
-            <a:ext cx="978408" cy="932688"/>
+            <a:off x="5600699" y="2103120"/>
+            <a:ext cx="960120" cy="932688"/>
           </a:xfrm>
           <a:prstGeom prst="rect">
             <a:avLst/>
@@ -9329,7 +9329,7 @@
       </p:sp>
       <p:pic>
         <p:nvPicPr>
-          <p:cNvPr id="9" name="Picture 8" descr="02fd06d9d06458dd.png"/>
+          <p:cNvPr id="9" name="Picture 8" descr="79a5e9e14577308b.png"/>
           <p:cNvPicPr>
             <a:picLocks noChangeAspect="1"/>
           </p:cNvPicPr>
@@ -9344,7 +9344,7 @@
         <p:spPr>
           <a:xfrm>
             <a:off x="5417820" y="2103120"/>
-            <a:ext cx="1325880" cy="512064"/>
+            <a:ext cx="1325880" cy="515112"/>
           </a:xfrm>
           <a:prstGeom prst="rect">
             <a:avLst/>
@@ -9359,7 +9359,7 @@
         </p:nvSpPr>
         <p:spPr>
           <a:xfrm>
-            <a:off x="1828800" y="2889503"/>
+            <a:off x="1828800" y="2892552"/>
             <a:ext cx="8503920" cy="548640"/>
           </a:xfrm>
           <a:prstGeom prst="rect">
@@ -10261,7 +10261,7 @@
       </p:sp>
       <p:pic>
         <p:nvPicPr>
-          <p:cNvPr id="9" name="Picture 8" descr="51555c3ab4f8213b.png"/>
+          <p:cNvPr id="9" name="Picture 8" descr="0b09890174e136ec.png"/>
           <p:cNvPicPr>
             <a:picLocks noChangeAspect="1"/>
           </p:cNvPicPr>
@@ -10275,8 +10275,8 @@
         </p:blipFill>
         <p:spPr>
           <a:xfrm>
-            <a:off x="5748528" y="2103120"/>
-            <a:ext cx="664464" cy="429768"/>
+            <a:off x="5750052" y="2103120"/>
+            <a:ext cx="661416" cy="429768"/>
           </a:xfrm>
           <a:prstGeom prst="rect">
             <a:avLst/>
@@ -11363,7 +11363,7 @@
       </p:sp>
       <p:pic>
         <p:nvPicPr>
-          <p:cNvPr id="9" name="Picture 8" descr="bc8fbfd36b278f0f.png"/>
+          <p:cNvPr id="9" name="Picture 8" descr="c950f888df2a107a.png"/>
           <p:cNvPicPr>
             <a:picLocks noChangeAspect="1"/>
           </p:cNvPicPr>
@@ -12298,7 +12298,7 @@
       </p:sp>
       <p:pic>
         <p:nvPicPr>
-          <p:cNvPr id="9" name="Picture 8" descr="df6239309438ca6d.png"/>
+          <p:cNvPr id="9" name="Picture 8" descr="3a37a698b11c2b61.png"/>
           <p:cNvPicPr>
             <a:picLocks noChangeAspect="1"/>
           </p:cNvPicPr>
@@ -13837,7 +13837,7 @@
       </p:sp>
       <p:pic>
         <p:nvPicPr>
-          <p:cNvPr id="9" name="Picture 8" descr="b67ccf22692bcffd.png"/>
+          <p:cNvPr id="9" name="Picture 8" descr="4d44fa8d60938d74.png"/>
           <p:cNvPicPr>
             <a:picLocks noChangeAspect="1"/>
           </p:cNvPicPr>
@@ -13851,8 +13851,8 @@
         </p:blipFill>
         <p:spPr>
           <a:xfrm>
-            <a:off x="5718048" y="2103120"/>
-            <a:ext cx="725424" cy="1024128"/>
+            <a:off x="5728716" y="2103120"/>
+            <a:ext cx="704088" cy="1027176"/>
           </a:xfrm>
           <a:prstGeom prst="rect">
             <a:avLst/>
@@ -13867,7 +13867,7 @@
         </p:nvSpPr>
         <p:spPr>
           <a:xfrm>
-            <a:off x="1828800" y="3401568"/>
+            <a:off x="1828800" y="3404615"/>
             <a:ext cx="8503920" cy="548640"/>
           </a:xfrm>
           <a:prstGeom prst="rect">
@@ -14695,7 +14695,7 @@
         </p:nvSpPr>
         <p:spPr>
           <a:xfrm>
-            <a:off x="3148552" y="2080260"/>
+            <a:off x="3150076" y="2080260"/>
             <a:ext cx="4034887" cy="457200"/>
           </a:xfrm>
           <a:prstGeom prst="rect">
@@ -14724,7 +14724,7 @@
       </p:sp>
       <p:pic>
         <p:nvPicPr>
-          <p:cNvPr id="10" name="Picture 9" descr="418bbff52ec96985.png"/>
+          <p:cNvPr id="10" name="Picture 9" descr="04a54a40cd0eb4b5.png"/>
           <p:cNvPicPr>
             <a:picLocks noChangeAspect="1"/>
           </p:cNvPicPr>
@@ -14738,8 +14738,8 @@
         </p:blipFill>
         <p:spPr>
           <a:xfrm>
-            <a:off x="7046279" y="2138171"/>
-            <a:ext cx="533400" cy="341376"/>
+            <a:off x="7047803" y="2138171"/>
+            <a:ext cx="530352" cy="341376"/>
           </a:xfrm>
           <a:prstGeom prst="rect">
             <a:avLst/>
@@ -14754,7 +14754,7 @@
         </p:nvSpPr>
         <p:spPr>
           <a:xfrm>
-            <a:off x="7579679" y="2080260"/>
+            <a:off x="7578155" y="2080260"/>
             <a:ext cx="1570447" cy="457200"/>
           </a:xfrm>
           <a:prstGeom prst="rect">
@@ -17168,7 +17168,7 @@
       </p:graphicFrame>
       <p:pic>
         <p:nvPicPr>
-          <p:cNvPr id="12" name="Picture 11" descr="76752f6b90e3aec4.png"/>
+          <p:cNvPr id="12" name="Picture 11" descr="81375e471a1972b2.png"/>
           <p:cNvPicPr>
             <a:picLocks noChangeAspect="1"/>
           </p:cNvPicPr>
@@ -17182,8 +17182,8 @@
         </p:blipFill>
         <p:spPr>
           <a:xfrm>
-            <a:off x="2586720" y="3337560"/>
-            <a:ext cx="1328928" cy="734568"/>
+            <a:off x="2601960" y="3337560"/>
+            <a:ext cx="1316736" cy="734568"/>
           </a:xfrm>
           <a:prstGeom prst="rect">
             <a:avLst/>
@@ -17198,7 +17198,7 @@
         </p:nvSpPr>
         <p:spPr>
           <a:xfrm>
-            <a:off x="3915648" y="3476244"/>
+            <a:off x="3918696" y="3476244"/>
             <a:ext cx="988583" cy="457200"/>
           </a:xfrm>
           <a:prstGeom prst="rect">
@@ -17227,7 +17227,7 @@
       </p:sp>
       <p:pic>
         <p:nvPicPr>
-          <p:cNvPr id="14" name="Picture 13" descr="f4a0184cab2e1fb6.png"/>
+          <p:cNvPr id="14" name="Picture 13" descr="e662eafaba09aa9a.png"/>
           <p:cNvPicPr>
             <a:picLocks noChangeAspect="1"/>
           </p:cNvPicPr>
@@ -17241,8 +17241,8 @@
         </p:blipFill>
         <p:spPr>
           <a:xfrm>
-            <a:off x="4767072" y="3337560"/>
-            <a:ext cx="1978152" cy="734568"/>
+            <a:off x="4770120" y="3337560"/>
+            <a:ext cx="1969008" cy="734568"/>
           </a:xfrm>
           <a:prstGeom prst="rect">
             <a:avLst/>
@@ -17257,7 +17257,7 @@
         </p:nvSpPr>
         <p:spPr>
           <a:xfrm>
-            <a:off x="6745224" y="3476244"/>
+            <a:off x="6739128" y="3476244"/>
             <a:ext cx="988583" cy="457200"/>
           </a:xfrm>
           <a:prstGeom prst="rect">
@@ -17286,7 +17286,7 @@
       </p:sp>
       <p:pic>
         <p:nvPicPr>
-          <p:cNvPr id="16" name="Picture 15" descr="0d236d65c9794bea.png"/>
+          <p:cNvPr id="16" name="Picture 15" descr="97a68c5b0d6f071a.png"/>
           <p:cNvPicPr>
             <a:picLocks noChangeAspect="1"/>
           </p:cNvPicPr>
@@ -17300,8 +17300,8 @@
         </p:blipFill>
         <p:spPr>
           <a:xfrm>
-            <a:off x="7596647" y="3337560"/>
-            <a:ext cx="1978152" cy="734568"/>
+            <a:off x="7590551" y="3337560"/>
+            <a:ext cx="1969008" cy="734568"/>
           </a:xfrm>
           <a:prstGeom prst="rect">
             <a:avLst/>
@@ -17608,7 +17608,7 @@
       </p:cxnSp>
       <p:pic>
         <p:nvPicPr>
-          <p:cNvPr id="10" name="Picture 9" descr="21929059091f4e5d.png"/>
+          <p:cNvPr id="10" name="Picture 9" descr="db26dd1c4f061617.png"/>
           <p:cNvPicPr>
             <a:picLocks noChangeAspect="1"/>
           </p:cNvPicPr>
@@ -17622,8 +17622,8 @@
         </p:blipFill>
         <p:spPr>
           <a:xfrm>
-            <a:off x="3100105" y="2340864"/>
-            <a:ext cx="1368552" cy="673608"/>
+            <a:off x="3107725" y="2340864"/>
+            <a:ext cx="1362456" cy="673608"/>
           </a:xfrm>
           <a:prstGeom prst="rect">
             <a:avLst/>
@@ -17638,7 +17638,7 @@
         </p:nvSpPr>
         <p:spPr>
           <a:xfrm>
-            <a:off x="4468657" y="2449068"/>
+            <a:off x="4470181" y="2449068"/>
             <a:ext cx="1183151" cy="457200"/>
           </a:xfrm>
           <a:prstGeom prst="rect">
@@ -17667,7 +17667,7 @@
       </p:sp>
       <p:pic>
         <p:nvPicPr>
-          <p:cNvPr id="12" name="Picture 11" descr="8af686798a26cf5e.png"/>
+          <p:cNvPr id="12" name="Picture 11" descr="d3322f317e3cdae4.png"/>
           <p:cNvPicPr>
             <a:picLocks noChangeAspect="1"/>
           </p:cNvPicPr>
@@ -17681,8 +17681,8 @@
         </p:blipFill>
         <p:spPr>
           <a:xfrm>
-            <a:off x="5514649" y="2340864"/>
-            <a:ext cx="1408176" cy="673608"/>
+            <a:off x="5516173" y="2340864"/>
+            <a:ext cx="1395984" cy="673608"/>
           </a:xfrm>
           <a:prstGeom prst="rect">
             <a:avLst/>
@@ -17697,7 +17697,7 @@
         </p:nvSpPr>
         <p:spPr>
           <a:xfrm>
-            <a:off x="6922825" y="2449068"/>
+            <a:off x="6912157" y="2449068"/>
             <a:ext cx="1299682" cy="457200"/>
           </a:xfrm>
           <a:prstGeom prst="rect">
@@ -17726,7 +17726,7 @@
       </p:sp>
       <p:pic>
         <p:nvPicPr>
-          <p:cNvPr id="14" name="Picture 13" descr="e9238f2ad6182a0d.png"/>
+          <p:cNvPr id="14" name="Picture 13" descr="6a9975e145b437dd.png"/>
           <p:cNvPicPr>
             <a:picLocks noChangeAspect="1"/>
           </p:cNvPicPr>
@@ -17740,8 +17740,8 @@
         </p:blipFill>
         <p:spPr>
           <a:xfrm>
-            <a:off x="8085347" y="2508504"/>
-            <a:ext cx="786384" cy="338328"/>
+            <a:off x="8074679" y="2508504"/>
+            <a:ext cx="789432" cy="338328"/>
           </a:xfrm>
           <a:prstGeom prst="rect">
             <a:avLst/>
@@ -17756,7 +17756,7 @@
         </p:nvSpPr>
         <p:spPr>
           <a:xfrm>
-            <a:off x="8871731" y="2449068"/>
+            <a:off x="8864111" y="2449068"/>
             <a:ext cx="326842" cy="457200"/>
           </a:xfrm>
           <a:prstGeom prst="rect">
@@ -17785,7 +17785,7 @@
       </p:sp>
       <p:pic>
         <p:nvPicPr>
-          <p:cNvPr id="16" name="Picture 15" descr="0076c46e61cf33dd.png"/>
+          <p:cNvPr id="16" name="Picture 15" descr="01a1e8399ce2f91b.png"/>
           <p:cNvPicPr>
             <a:picLocks noChangeAspect="1"/>
           </p:cNvPicPr>
@@ -17799,8 +17799,8 @@
         </p:blipFill>
         <p:spPr>
           <a:xfrm>
-            <a:off x="1495590" y="3288792"/>
-            <a:ext cx="2179320" cy="740664"/>
+            <a:off x="1497114" y="3288792"/>
+            <a:ext cx="2170176" cy="740664"/>
           </a:xfrm>
           <a:prstGeom prst="rect">
             <a:avLst/>
@@ -17815,7 +17815,7 @@
         </p:nvSpPr>
         <p:spPr>
           <a:xfrm>
-            <a:off x="3674910" y="3430524"/>
+            <a:off x="3667290" y="3430524"/>
             <a:ext cx="1922352" cy="457200"/>
           </a:xfrm>
           <a:prstGeom prst="rect">
@@ -17844,7 +17844,7 @@
       </p:sp>
       <p:pic>
         <p:nvPicPr>
-          <p:cNvPr id="18" name="Picture 17" descr="2402c94260d4dcde.png"/>
+          <p:cNvPr id="18" name="Picture 17" descr="4d0780cba10826c2.png"/>
           <p:cNvPicPr>
             <a:picLocks noChangeAspect="1"/>
           </p:cNvPicPr>
@@ -17858,8 +17858,8 @@
         </p:blipFill>
         <p:spPr>
           <a:xfrm>
-            <a:off x="5460103" y="3488436"/>
-            <a:ext cx="1679448" cy="341376"/>
+            <a:off x="5452483" y="3488436"/>
+            <a:ext cx="1682496" cy="341376"/>
           </a:xfrm>
           <a:prstGeom prst="rect">
             <a:avLst/>
@@ -17874,7 +17874,7 @@
         </p:nvSpPr>
         <p:spPr>
           <a:xfrm>
-            <a:off x="7139551" y="3430524"/>
+            <a:off x="7134979" y="3430524"/>
             <a:ext cx="1987138" cy="457200"/>
           </a:xfrm>
           <a:prstGeom prst="rect">
@@ -17903,7 +17903,7 @@
       </p:sp>
       <p:pic>
         <p:nvPicPr>
-          <p:cNvPr id="20" name="Picture 19" descr="99e40f005d3ae585.png"/>
+          <p:cNvPr id="20" name="Picture 19" descr="06d6b57bc03862b5.png"/>
           <p:cNvPicPr>
             <a:picLocks noChangeAspect="1"/>
           </p:cNvPicPr>
@@ -17917,8 +17917,8 @@
         </p:blipFill>
         <p:spPr>
           <a:xfrm>
-            <a:off x="8989529" y="3454908"/>
-            <a:ext cx="1676400" cy="408432"/>
+            <a:off x="8984957" y="3456432"/>
+            <a:ext cx="1679448" cy="405384"/>
           </a:xfrm>
           <a:prstGeom prst="rect">
             <a:avLst/>
@@ -17968,7 +17968,7 @@
         </p:nvSpPr>
         <p:spPr>
           <a:xfrm>
-            <a:off x="987552" y="5257799"/>
+            <a:off x="987552" y="5256275"/>
             <a:ext cx="4433488" cy="457200"/>
           </a:xfrm>
           <a:prstGeom prst="rect">
@@ -17997,7 +17997,7 @@
       </p:sp>
       <p:pic>
         <p:nvPicPr>
-          <p:cNvPr id="23" name="Picture 22" descr="09c601891c6fc45f.png"/>
+          <p:cNvPr id="23" name="Picture 22" descr="6487353c74996e1d.png"/>
           <p:cNvPicPr>
             <a:picLocks noChangeAspect="1"/>
           </p:cNvPicPr>
@@ -18012,7 +18012,7 @@
         <p:spPr>
           <a:xfrm>
             <a:off x="5283880" y="5081015"/>
-            <a:ext cx="4273296" cy="810768"/>
+            <a:ext cx="4267200" cy="807720"/>
           </a:xfrm>
           <a:prstGeom prst="rect">
             <a:avLst/>
@@ -18319,7 +18319,7 @@
       </p:cxnSp>
       <p:pic>
         <p:nvPicPr>
-          <p:cNvPr id="10" name="Picture 9" descr="089c2c846a3e035b.png"/>
+          <p:cNvPr id="10" name="Picture 9" descr="5f5217f7eb4021f2.png"/>
           <p:cNvPicPr>
             <a:picLocks noChangeAspect="1"/>
           </p:cNvPicPr>
@@ -18333,8 +18333,8 @@
         </p:blipFill>
         <p:spPr>
           <a:xfrm>
-            <a:off x="3666744" y="2340864"/>
-            <a:ext cx="4828032" cy="752856"/>
+            <a:off x="3665219" y="2340864"/>
+            <a:ext cx="4831080" cy="752856"/>
           </a:xfrm>
           <a:prstGeom prst="rect">
             <a:avLst/>
@@ -18349,7 +18349,7 @@
         </p:nvSpPr>
         <p:spPr>
           <a:xfrm>
-            <a:off x="3439817" y="3345180"/>
+            <a:off x="3438293" y="3345180"/>
             <a:ext cx="1124413" cy="457200"/>
           </a:xfrm>
           <a:prstGeom prst="rect">
@@ -18378,7 +18378,7 @@
       </p:sp>
       <p:pic>
         <p:nvPicPr>
-          <p:cNvPr id="12" name="Picture 11" descr="6542358f7cf09559.png"/>
+          <p:cNvPr id="12" name="Picture 11" descr="9ad19008f4436ada.png"/>
           <p:cNvPicPr>
             <a:picLocks noChangeAspect="1"/>
           </p:cNvPicPr>
@@ -18392,8 +18392,8 @@
         </p:blipFill>
         <p:spPr>
           <a:xfrm>
-            <a:off x="4427070" y="3400044"/>
-            <a:ext cx="4294632" cy="347472"/>
+            <a:off x="4425546" y="3400044"/>
+            <a:ext cx="4297680" cy="347472"/>
           </a:xfrm>
           <a:prstGeom prst="rect">
             <a:avLst/>
@@ -18402,7 +18402,7 @@
       </p:pic>
       <p:pic>
         <p:nvPicPr>
-          <p:cNvPr id="13" name="Picture 12" descr="937601ac64579bf6.png"/>
+          <p:cNvPr id="13" name="Picture 12" descr="986b589c42d28562.png"/>
           <p:cNvPicPr>
             <a:picLocks noChangeAspect="1"/>
           </p:cNvPicPr>
@@ -18416,8 +18416,8 @@
         </p:blipFill>
         <p:spPr>
           <a:xfrm>
-            <a:off x="4210812" y="4053839"/>
-            <a:ext cx="3739896" cy="826008"/>
+            <a:off x="4219955" y="4053839"/>
+            <a:ext cx="3721608" cy="822960"/>
           </a:xfrm>
           <a:prstGeom prst="rect">
             <a:avLst/>
@@ -18432,7 +18432,7 @@
         </p:nvSpPr>
         <p:spPr>
           <a:xfrm>
-            <a:off x="987552" y="5218175"/>
+            <a:off x="987552" y="5215128"/>
             <a:ext cx="10131551" cy="950976"/>
           </a:xfrm>
           <a:prstGeom prst="rect">
@@ -19046,7 +19046,7 @@
       </p:sp>
       <p:pic>
         <p:nvPicPr>
-          <p:cNvPr id="9" name="Picture 8" descr="88c8ff7225ddeea7.png"/>
+          <p:cNvPr id="9" name="Picture 8" descr="86e883f301281d71.png"/>
           <p:cNvPicPr>
             <a:picLocks noChangeAspect="1"/>
           </p:cNvPicPr>
@@ -19061,7 +19061,7 @@
         <p:spPr>
           <a:xfrm>
             <a:off x="1828800" y="1920240"/>
-            <a:ext cx="1399032" cy="819912"/>
+            <a:ext cx="1380744" cy="816864"/>
           </a:xfrm>
           <a:prstGeom prst="rect">
             <a:avLst/>
@@ -19076,7 +19076,7 @@
         </p:nvSpPr>
         <p:spPr>
           <a:xfrm>
-            <a:off x="3685032" y="2101596"/>
+            <a:off x="3666744" y="2100072"/>
             <a:ext cx="6400800" cy="502920"/>
           </a:xfrm>
           <a:prstGeom prst="rect">
@@ -19105,7 +19105,7 @@
       </p:sp>
       <p:pic>
         <p:nvPicPr>
-          <p:cNvPr id="11" name="Picture 10" descr="0ebc6add04d32a86.png"/>
+          <p:cNvPr id="11" name="Picture 10" descr="bdb5dbd5190fc4b9.png"/>
           <p:cNvPicPr>
             <a:picLocks noChangeAspect="1"/>
           </p:cNvPicPr>
@@ -19119,8 +19119,8 @@
         </p:blipFill>
         <p:spPr>
           <a:xfrm>
-            <a:off x="1828800" y="3014472"/>
-            <a:ext cx="2773680" cy="804672"/>
+            <a:off x="1828800" y="3011423"/>
+            <a:ext cx="2764536" cy="804672"/>
           </a:xfrm>
           <a:prstGeom prst="rect">
             <a:avLst/>
@@ -19135,8 +19135,8 @@
         </p:nvSpPr>
         <p:spPr>
           <a:xfrm>
-            <a:off x="5059680" y="3188207"/>
-            <a:ext cx="6324599" cy="502920"/>
+            <a:off x="5050536" y="3185159"/>
+            <a:ext cx="6333743" cy="502920"/>
           </a:xfrm>
           <a:prstGeom prst="rect">
             <a:avLst/>

--- a/a7/build/out/u3/A7 3.04  Slides.pptx
+++ b/a7/build/out/u3/A7 3.04  Slides.pptx
@@ -9824,7 +9824,7 @@
                 </a:solidFill>
                 <a:latin typeface="Century Schoolbook"/>
               </a:rPr>
-              <a:t>1/25</a:t>
+              <a:t>1/10</a:t>
             </a:r>
           </a:p>
         </p:txBody>
@@ -9868,7 +9868,7 @@
                 </a:solidFill>
                 <a:latin typeface="Century Schoolbook"/>
               </a:rPr>
-              <a:t>−25</a:t>
+              <a:t>1/25</a:t>
             </a:r>
           </a:p>
         </p:txBody>
@@ -9912,7 +9912,7 @@
                 </a:solidFill>
                 <a:latin typeface="Century Schoolbook"/>
               </a:rPr>
-              <a:t>−10</a:t>
+              <a:t>−25</a:t>
             </a:r>
           </a:p>
         </p:txBody>
@@ -9956,7 +9956,7 @@
                 </a:solidFill>
                 <a:latin typeface="Century Schoolbook"/>
               </a:rPr>
-              <a:t>1/10</a:t>
+              <a:t>−10</a:t>
             </a:r>
           </a:p>
         </p:txBody>
@@ -10344,20 +10344,20 @@
             <a:r>
               <a:rPr sz="2400" b="1" i="0">
                 <a:solidFill>
-                  <a:srgbClr val="9E1B32"/>
+                  <a:srgbClr val="1A1A1A"/>
                 </a:solidFill>
                 <a:latin typeface="Century Schoolbook"/>
               </a:rPr>
               <a:t>A.   </a:t>
             </a:r>
             <a:r>
-              <a:rPr sz="2400" b="1" i="0">
-                <a:solidFill>
-                  <a:srgbClr val="9E1B32"/>
-                </a:solidFill>
-                <a:latin typeface="Century Schoolbook"/>
-              </a:rPr>
-              <a:t>1/25</a:t>
+              <a:rPr sz="2400" b="0" i="0">
+                <a:solidFill>
+                  <a:srgbClr val="1A1A1A"/>
+                </a:solidFill>
+                <a:latin typeface="Century Schoolbook"/>
+              </a:rPr>
+              <a:t>1/10</a:t>
             </a:r>
           </a:p>
         </p:txBody>
@@ -10388,20 +10388,20 @@
             <a:r>
               <a:rPr sz="2400" b="1" i="0">
                 <a:solidFill>
-                  <a:srgbClr val="1A1A1A"/>
+                  <a:srgbClr val="9E1B32"/>
                 </a:solidFill>
                 <a:latin typeface="Century Schoolbook"/>
               </a:rPr>
               <a:t>B.   </a:t>
             </a:r>
             <a:r>
-              <a:rPr sz="2400" b="0" i="0">
-                <a:solidFill>
-                  <a:srgbClr val="1A1A1A"/>
-                </a:solidFill>
-                <a:latin typeface="Century Schoolbook"/>
-              </a:rPr>
-              <a:t>−25</a:t>
+              <a:rPr sz="2400" b="1" i="0">
+                <a:solidFill>
+                  <a:srgbClr val="9E1B32"/>
+                </a:solidFill>
+                <a:latin typeface="Century Schoolbook"/>
+              </a:rPr>
+              <a:t>1/25</a:t>
             </a:r>
           </a:p>
         </p:txBody>
@@ -10445,7 +10445,7 @@
                 </a:solidFill>
                 <a:latin typeface="Century Schoolbook"/>
               </a:rPr>
-              <a:t>−10</a:t>
+              <a:t>−25</a:t>
             </a:r>
           </a:p>
         </p:txBody>
@@ -10489,7 +10489,7 @@
                 </a:solidFill>
                 <a:latin typeface="Century Schoolbook"/>
               </a:rPr>
-              <a:t>1/10</a:t>
+              <a:t>−10</a:t>
             </a:r>
           </a:p>
         </p:txBody>
@@ -10524,7 +10524,7 @@
                 </a:solidFill>
                 <a:latin typeface="Century Schoolbook"/>
               </a:rPr>
-              <a:t>Answer:   A — 1/25</a:t>
+              <a:t>Answer:   B — 1/25</a:t>
             </a:r>
           </a:p>
         </p:txBody>
@@ -10899,7 +10899,7 @@
                 </a:solidFill>
                 <a:latin typeface="Century Schoolbook"/>
               </a:rPr>
-              <a:t>3</a:t>
+              <a:t>-10</a:t>
             </a:r>
           </a:p>
         </p:txBody>
@@ -10943,7 +10943,7 @@
                 </a:solidFill>
                 <a:latin typeface="Century Schoolbook"/>
               </a:rPr>
-              <a:t>6</a:t>
+              <a:t>36</a:t>
             </a:r>
             <a:r>
               <a:rPr sz="2400" b="0" i="0" baseline="30000">
@@ -10952,7 +10952,7 @@
                 </a:solidFill>
                 <a:latin typeface="Century Schoolbook"/>
               </a:rPr>
-              <a:t>-7</a:t>
+              <a:t>3</a:t>
             </a:r>
           </a:p>
         </p:txBody>
@@ -11005,7 +11005,7 @@
                 </a:solidFill>
                 <a:latin typeface="Century Schoolbook"/>
               </a:rPr>
-              <a:t>-10</a:t>
+              <a:t>-7</a:t>
             </a:r>
           </a:p>
         </p:txBody>
@@ -11049,7 +11049,7 @@
                 </a:solidFill>
                 <a:latin typeface="Century Schoolbook"/>
               </a:rPr>
-              <a:t>36</a:t>
+              <a:t>6</a:t>
             </a:r>
             <a:r>
               <a:rPr sz="2400" b="0" i="0" baseline="30000">
@@ -11446,29 +11446,29 @@
             <a:r>
               <a:rPr sz="2400" b="1" i="0">
                 <a:solidFill>
-                  <a:srgbClr val="9E1B32"/>
+                  <a:srgbClr val="1A1A1A"/>
                 </a:solidFill>
                 <a:latin typeface="Century Schoolbook"/>
               </a:rPr>
               <a:t>A.   </a:t>
             </a:r>
             <a:r>
-              <a:rPr sz="2400" b="1" i="0">
-                <a:solidFill>
-                  <a:srgbClr val="9E1B32"/>
+              <a:rPr sz="2400" b="0" i="0">
+                <a:solidFill>
+                  <a:srgbClr val="1A1A1A"/>
                 </a:solidFill>
                 <a:latin typeface="Century Schoolbook"/>
               </a:rPr>
               <a:t>6</a:t>
             </a:r>
             <a:r>
-              <a:rPr sz="2400" b="1" i="0" baseline="30000">
-                <a:solidFill>
-                  <a:srgbClr val="9E1B32"/>
-                </a:solidFill>
-                <a:latin typeface="Century Schoolbook"/>
-              </a:rPr>
-              <a:t>3</a:t>
+              <a:rPr sz="2400" b="0" i="0" baseline="30000">
+                <a:solidFill>
+                  <a:srgbClr val="1A1A1A"/>
+                </a:solidFill>
+                <a:latin typeface="Century Schoolbook"/>
+              </a:rPr>
+              <a:t>-10</a:t>
             </a:r>
           </a:p>
         </p:txBody>
@@ -11512,7 +11512,7 @@
                 </a:solidFill>
                 <a:latin typeface="Century Schoolbook"/>
               </a:rPr>
-              <a:t>6</a:t>
+              <a:t>36</a:t>
             </a:r>
             <a:r>
               <a:rPr sz="2400" b="0" i="0" baseline="30000">
@@ -11521,7 +11521,7 @@
                 </a:solidFill>
                 <a:latin typeface="Century Schoolbook"/>
               </a:rPr>
-              <a:t>-7</a:t>
+              <a:t>3</a:t>
             </a:r>
           </a:p>
         </p:txBody>
@@ -11574,7 +11574,7 @@
                 </a:solidFill>
                 <a:latin typeface="Century Schoolbook"/>
               </a:rPr>
-              <a:t>-10</a:t>
+              <a:t>-7</a:t>
             </a:r>
           </a:p>
         </p:txBody>
@@ -11605,25 +11605,25 @@
             <a:r>
               <a:rPr sz="2400" b="1" i="0">
                 <a:solidFill>
-                  <a:srgbClr val="1A1A1A"/>
+                  <a:srgbClr val="9E1B32"/>
                 </a:solidFill>
                 <a:latin typeface="Century Schoolbook"/>
               </a:rPr>
               <a:t>D.   </a:t>
             </a:r>
             <a:r>
-              <a:rPr sz="2400" b="0" i="0">
-                <a:solidFill>
-                  <a:srgbClr val="1A1A1A"/>
-                </a:solidFill>
-                <a:latin typeface="Century Schoolbook"/>
-              </a:rPr>
-              <a:t>36</a:t>
-            </a:r>
-            <a:r>
-              <a:rPr sz="2400" b="0" i="0" baseline="30000">
-                <a:solidFill>
-                  <a:srgbClr val="1A1A1A"/>
+              <a:rPr sz="2400" b="1" i="0">
+                <a:solidFill>
+                  <a:srgbClr val="9E1B32"/>
+                </a:solidFill>
+                <a:latin typeface="Century Schoolbook"/>
+              </a:rPr>
+              <a:t>6</a:t>
+            </a:r>
+            <a:r>
+              <a:rPr sz="2400" b="1" i="0" baseline="30000">
+                <a:solidFill>
+                  <a:srgbClr val="9E1B32"/>
                 </a:solidFill>
                 <a:latin typeface="Century Schoolbook"/>
               </a:rPr>
@@ -11662,7 +11662,7 @@
                 </a:solidFill>
                 <a:latin typeface="Century Schoolbook"/>
               </a:rPr>
-              <a:t>Answer:   A — 6</a:t>
+              <a:t>Answer:   D — 6</a:t>
             </a:r>
             <a:r>
               <a:rPr sz="3200" b="1" i="0" baseline="30000">

--- a/a7/build/out/u3/A7 3.04  Slides.pptx
+++ b/a7/build/out/u3/A7 3.04  Slides.pptx
@@ -6464,8 +6464,8 @@
         </p:nvSpPr>
         <p:spPr>
           <a:xfrm>
-            <a:off x="2706116" y="2171700"/>
-            <a:ext cx="4236922" cy="457200"/>
+            <a:off x="1234440" y="1851660"/>
+            <a:ext cx="7634815" cy="457200"/>
           </a:xfrm>
           <a:prstGeom prst="rect">
             <a:avLst/>
@@ -6480,20 +6480,20 @@
           <a:p>
             <a:pPr algn="l"/>
             <a:r>
-              <a:rPr sz="2600" b="0" i="0">
+              <a:rPr sz="2400" b="0" i="0">
                 <a:solidFill>
                   <a:srgbClr val="1A1A1A"/>
                 </a:solidFill>
                 <a:latin typeface="Century Schoolbook"/>
               </a:rPr>
-              <a:t>A pollen grain's mass is  </a:t>
+              <a:t>A paper is folded in half 7 times. The top layer is  </a:t>
             </a:r>
           </a:p>
         </p:txBody>
       </p:sp>
       <p:pic>
         <p:nvPicPr>
-          <p:cNvPr id="10" name="Picture 9" descr="c9adefc290aa5b44.png"/>
+          <p:cNvPr id="10" name="Picture 9" descr="5558d1eb2409627b.png"/>
           <p:cNvPicPr>
             <a:picLocks noChangeAspect="1"/>
           </p:cNvPicPr>
@@ -6507,8 +6507,8 @@
         </p:blipFill>
         <p:spPr>
           <a:xfrm>
-            <a:off x="6805879" y="2234184"/>
-            <a:ext cx="521207" cy="332232"/>
+            <a:off x="8732095" y="1944623"/>
+            <a:ext cx="420624" cy="271272"/>
           </a:xfrm>
           <a:prstGeom prst="rect">
             <a:avLst/>
@@ -6523,8 +6523,8 @@
         </p:nvSpPr>
         <p:spPr>
           <a:xfrm>
-            <a:off x="7327087" y="2171700"/>
-            <a:ext cx="2265475" cy="457200"/>
+            <a:off x="9152719" y="1851660"/>
+            <a:ext cx="2242863" cy="457200"/>
           </a:xfrm>
           <a:prstGeom prst="rect">
             <a:avLst/>
@@ -6539,13 +6539,13 @@
           <a:p>
             <a:pPr algn="l"/>
             <a:r>
-              <a:rPr sz="2600" b="0" i="0">
+              <a:rPr sz="2400" b="0" i="0">
                 <a:solidFill>
                   <a:srgbClr val="1A1A1A"/>
                 </a:solidFill>
                 <a:latin typeface="Century Schoolbook"/>
               </a:rPr>
-              <a:t>  microgram.</a:t>
+              <a:t>  of the paper.</a:t>
             </a:r>
           </a:p>
         </p:txBody>
@@ -6558,29 +6558,29 @@
         </p:nvSpPr>
         <p:spPr>
           <a:xfrm>
-            <a:off x="777240" y="2880360"/>
-            <a:ext cx="10607040" cy="465151"/>
-          </a:xfrm>
-          <a:prstGeom prst="rect">
-            <a:avLst/>
-          </a:prstGeom>
-          <a:noFill/>
-        </p:spPr>
-        <p:txBody>
-          <a:bodyPr wrap="square" lIns="45720" rIns="45720" tIns="18288" bIns="18288" anchor="t">
-            <a:spAutoFit/>
-          </a:bodyPr>
-          <a:lstStyle/>
-          <a:p>
-            <a:pPr algn="ctr"/>
-            <a:r>
-              <a:rPr sz="2600" b="0" i="0">
+            <a:off x="1234440" y="2487168"/>
+            <a:ext cx="10058400" cy="429370"/>
+          </a:xfrm>
+          <a:prstGeom prst="rect">
+            <a:avLst/>
+          </a:prstGeom>
+          <a:noFill/>
+        </p:spPr>
+        <p:txBody>
+          <a:bodyPr wrap="square" lIns="45720" rIns="45720" tIns="18288" bIns="18288" anchor="t">
+            <a:spAutoFit/>
+          </a:bodyPr>
+          <a:lstStyle/>
+          <a:p>
+            <a:pPr algn="l"/>
+            <a:r>
+              <a:rPr sz="2400" b="0" i="0">
                 <a:solidFill>
                   <a:srgbClr val="1A1A1A"/>
                 </a:solidFill>
                 <a:latin typeface="Century Schoolbook"/>
               </a:rPr>
-              <a:t>Its width is 25 micrometers.</a:t>
+              <a:t>The paper is 30 centimeters long.</a:t>
             </a:r>
           </a:p>
         </p:txBody>
@@ -6593,8 +6593,8 @@
         </p:nvSpPr>
         <p:spPr>
           <a:xfrm>
-            <a:off x="3903866" y="3432379"/>
-            <a:ext cx="3643910" cy="457200"/>
+            <a:off x="1234440" y="3003406"/>
+            <a:ext cx="3698968" cy="457200"/>
           </a:xfrm>
           <a:prstGeom prst="rect">
             <a:avLst/>
@@ -6609,7 +6609,7 @@
           <a:p>
             <a:pPr algn="l"/>
             <a:r>
-              <a:rPr sz="2600" b="0" i="0">
+              <a:rPr sz="2400" b="1" i="0">
                 <a:solidFill>
                   <a:srgbClr val="1A1A1A"/>
                 </a:solidFill>
@@ -6622,7 +6622,7 @@
       </p:sp>
       <p:pic>
         <p:nvPicPr>
-          <p:cNvPr id="14" name="Picture 13" descr="c9adefc290aa5b44.png"/>
+          <p:cNvPr id="14" name="Picture 13" descr="5558d1eb2409627b.png"/>
           <p:cNvPicPr>
             <a:picLocks noChangeAspect="1"/>
           </p:cNvPicPr>
@@ -6636,8 +6636,8 @@
         </p:blipFill>
         <p:spPr>
           <a:xfrm>
-            <a:off x="7410617" y="3494863"/>
-            <a:ext cx="521207" cy="332232"/>
+            <a:off x="4796248" y="3096370"/>
+            <a:ext cx="420624" cy="271272"/>
           </a:xfrm>
           <a:prstGeom prst="rect">
             <a:avLst/>
@@ -6652,8 +6652,8 @@
         </p:nvSpPr>
         <p:spPr>
           <a:xfrm>
-            <a:off x="7931825" y="3432379"/>
-            <a:ext cx="462987" cy="457200"/>
+            <a:off x="5216872" y="3003406"/>
+            <a:ext cx="4191225" cy="457200"/>
           </a:xfrm>
           <a:prstGeom prst="rect">
             <a:avLst/>
@@ -6668,13 +6668,13 @@
           <a:p>
             <a:pPr algn="l"/>
             <a:r>
-              <a:rPr sz="2600" b="0" i="0">
+              <a:rPr sz="2400" b="1" i="0">
                 <a:solidFill>
                   <a:srgbClr val="1A1A1A"/>
                 </a:solidFill>
                 <a:latin typeface="Century Schoolbook"/>
               </a:rPr>
-              <a:t> ?</a:t>
+              <a:t> ?  Write it as a fraction.</a:t>
             </a:r>
           </a:p>
         </p:txBody>
@@ -6710,41 +6710,6 @@
                 <a:latin typeface="Century Schoolbook"/>
               </a:rPr>
               <a:t>Answer it.</a:t>
-            </a:r>
-          </a:p>
-        </p:txBody>
-      </p:sp>
-      <p:sp>
-        <p:nvSpPr>
-          <p:cNvPr id="17" name="TextBox 16"/>
-          <p:cNvSpPr txBox="1"/>
-          <p:nvPr/>
-        </p:nvSpPr>
-        <p:spPr>
-          <a:xfrm>
-            <a:off x="777240" y="4828032"/>
-            <a:ext cx="10607040" cy="365760"/>
-          </a:xfrm>
-          <a:prstGeom prst="rect">
-            <a:avLst/>
-          </a:prstGeom>
-          <a:noFill/>
-        </p:spPr>
-        <p:txBody>
-          <a:bodyPr wrap="square" lIns="45720" rIns="45720" tIns="18288" bIns="18288" anchor="t">
-            <a:spAutoFit/>
-          </a:bodyPr>
-          <a:lstStyle/>
-          <a:p>
-            <a:pPr algn="ctr"/>
-            <a:r>
-              <a:rPr sz="1900" b="0" i="1">
-                <a:solidFill>
-                  <a:srgbClr val="6B6B6B"/>
-                </a:solidFill>
-                <a:latin typeface="Century Schoolbook"/>
-              </a:rPr>
-              <a:t>Find the value.</a:t>
             </a:r>
           </a:p>
         </p:txBody>
@@ -7020,8 +6985,8 @@
         </p:nvSpPr>
         <p:spPr>
           <a:xfrm>
-            <a:off x="2704592" y="2080260"/>
-            <a:ext cx="4236922" cy="457200"/>
+            <a:off x="1234440" y="1851660"/>
+            <a:ext cx="7634815" cy="457200"/>
           </a:xfrm>
           <a:prstGeom prst="rect">
             <a:avLst/>
@@ -7036,20 +7001,20 @@
           <a:p>
             <a:pPr algn="l"/>
             <a:r>
-              <a:rPr sz="2600" b="0" i="0">
+              <a:rPr sz="2400" b="0" i="0">
                 <a:solidFill>
                   <a:srgbClr val="1A1A1A"/>
                 </a:solidFill>
                 <a:latin typeface="Century Schoolbook"/>
               </a:rPr>
-              <a:t>A pollen grain's mass is  </a:t>
+              <a:t>A paper is folded in half 7 times. The top layer is  </a:t>
             </a:r>
           </a:p>
         </p:txBody>
       </p:sp>
       <p:pic>
         <p:nvPicPr>
-          <p:cNvPr id="10" name="Picture 9" descr="afdbc5b48ef250ed.png"/>
+          <p:cNvPr id="10" name="Picture 9" descr="9c05828c17955af2.png"/>
           <p:cNvPicPr>
             <a:picLocks noChangeAspect="1"/>
           </p:cNvPicPr>
@@ -7063,8 +7028,8 @@
         </p:blipFill>
         <p:spPr>
           <a:xfrm>
-            <a:off x="6804355" y="2142744"/>
-            <a:ext cx="524256" cy="332232"/>
+            <a:off x="8732095" y="1946147"/>
+            <a:ext cx="423672" cy="268224"/>
           </a:xfrm>
           <a:prstGeom prst="rect">
             <a:avLst/>
@@ -7079,8 +7044,8 @@
         </p:nvSpPr>
         <p:spPr>
           <a:xfrm>
-            <a:off x="7328611" y="2080260"/>
-            <a:ext cx="2265475" cy="457200"/>
+            <a:off x="9155767" y="1851660"/>
+            <a:ext cx="2242863" cy="457200"/>
           </a:xfrm>
           <a:prstGeom prst="rect">
             <a:avLst/>
@@ -7095,13 +7060,13 @@
           <a:p>
             <a:pPr algn="l"/>
             <a:r>
-              <a:rPr sz="2600" b="0" i="0">
+              <a:rPr sz="2400" b="0" i="0">
                 <a:solidFill>
                   <a:srgbClr val="1A1A1A"/>
                 </a:solidFill>
                 <a:latin typeface="Century Schoolbook"/>
               </a:rPr>
-              <a:t>  microgram.</a:t>
+              <a:t>  of the paper.</a:t>
             </a:r>
           </a:p>
         </p:txBody>
@@ -7114,29 +7079,29 @@
         </p:nvSpPr>
         <p:spPr>
           <a:xfrm>
-            <a:off x="777240" y="2788920"/>
-            <a:ext cx="10607040" cy="465151"/>
-          </a:xfrm>
-          <a:prstGeom prst="rect">
-            <a:avLst/>
-          </a:prstGeom>
-          <a:noFill/>
-        </p:spPr>
-        <p:txBody>
-          <a:bodyPr wrap="square" lIns="45720" rIns="45720" tIns="18288" bIns="18288" anchor="t">
-            <a:spAutoFit/>
-          </a:bodyPr>
-          <a:lstStyle/>
-          <a:p>
-            <a:pPr algn="ctr"/>
-            <a:r>
-              <a:rPr sz="2600" b="0" i="0">
+            <a:off x="1234440" y="2487168"/>
+            <a:ext cx="10058400" cy="429370"/>
+          </a:xfrm>
+          <a:prstGeom prst="rect">
+            <a:avLst/>
+          </a:prstGeom>
+          <a:noFill/>
+        </p:spPr>
+        <p:txBody>
+          <a:bodyPr wrap="square" lIns="45720" rIns="45720" tIns="18288" bIns="18288" anchor="t">
+            <a:spAutoFit/>
+          </a:bodyPr>
+          <a:lstStyle/>
+          <a:p>
+            <a:pPr algn="l"/>
+            <a:r>
+              <a:rPr sz="2400" b="0" i="0">
                 <a:solidFill>
                   <a:srgbClr val="1A1A1A"/>
                 </a:solidFill>
                 <a:latin typeface="Century Schoolbook"/>
               </a:rPr>
-              <a:t>Its width is 25 micrometers.</a:t>
+              <a:t>The paper is 30 centimeters long.</a:t>
             </a:r>
           </a:p>
         </p:txBody>
@@ -7149,8 +7114,8 @@
         </p:nvSpPr>
         <p:spPr>
           <a:xfrm>
-            <a:off x="3902342" y="3340939"/>
-            <a:ext cx="3643910" cy="457200"/>
+            <a:off x="1234440" y="3003406"/>
+            <a:ext cx="3698968" cy="457200"/>
           </a:xfrm>
           <a:prstGeom prst="rect">
             <a:avLst/>
@@ -7165,7 +7130,7 @@
           <a:p>
             <a:pPr algn="l"/>
             <a:r>
-              <a:rPr sz="2600" b="0" i="0">
+              <a:rPr sz="2400" b="1" i="0">
                 <a:solidFill>
                   <a:srgbClr val="1A1A1A"/>
                 </a:solidFill>
@@ -7178,7 +7143,7 @@
       </p:sp>
       <p:pic>
         <p:nvPicPr>
-          <p:cNvPr id="14" name="Picture 13" descr="afdbc5b48ef250ed.png"/>
+          <p:cNvPr id="14" name="Picture 13" descr="9c05828c17955af2.png"/>
           <p:cNvPicPr>
             <a:picLocks noChangeAspect="1"/>
           </p:cNvPicPr>
@@ -7192,8 +7157,8 @@
         </p:blipFill>
         <p:spPr>
           <a:xfrm>
-            <a:off x="7409093" y="3403423"/>
-            <a:ext cx="524256" cy="332232"/>
+            <a:off x="4796248" y="3097894"/>
+            <a:ext cx="423672" cy="268224"/>
           </a:xfrm>
           <a:prstGeom prst="rect">
             <a:avLst/>
@@ -7208,8 +7173,8 @@
         </p:nvSpPr>
         <p:spPr>
           <a:xfrm>
-            <a:off x="7933349" y="3340939"/>
-            <a:ext cx="462987" cy="457200"/>
+            <a:off x="5219920" y="3003406"/>
+            <a:ext cx="4191225" cy="457200"/>
           </a:xfrm>
           <a:prstGeom prst="rect">
             <a:avLst/>
@@ -7224,13 +7189,13 @@
           <a:p>
             <a:pPr algn="l"/>
             <a:r>
-              <a:rPr sz="2600" b="0" i="0">
+              <a:rPr sz="2400" b="1" i="0">
                 <a:solidFill>
                   <a:srgbClr val="1A1A1A"/>
                 </a:solidFill>
                 <a:latin typeface="Century Schoolbook"/>
               </a:rPr>
-              <a:t> ?</a:t>
+              <a:t> ?  Write it as a fraction.</a:t>
             </a:r>
           </a:p>
         </p:txBody>
@@ -7243,7 +7208,7 @@
         </p:nvSpPr>
         <p:spPr>
           <a:xfrm>
-            <a:off x="1828800" y="4095319"/>
+            <a:off x="1828800" y="3730354"/>
             <a:ext cx="8503920" cy="548640"/>
           </a:xfrm>
           <a:prstGeom prst="rect">
@@ -7287,7 +7252,7 @@
         </p:nvSpPr>
         <p:spPr>
           <a:xfrm>
-            <a:off x="4738116" y="4982287"/>
+            <a:off x="4738116" y="4818888"/>
             <a:ext cx="1920240" cy="548640"/>
           </a:xfrm>
           <a:prstGeom prst="rect">
@@ -7330,7 +7295,7 @@
         </p:blipFill>
         <p:spPr>
           <a:xfrm>
-            <a:off x="6658356" y="4826839"/>
+            <a:off x="6658356" y="4663440"/>
             <a:ext cx="765048" cy="859536"/>
           </a:xfrm>
           <a:prstGeom prst="rect">

--- a/a7/build/out/u3/A7 3.04  Slides.pptx
+++ b/a7/build/out/u3/A7 3.04  Slides.pptx
@@ -6464,17 +6464,17 @@
         </p:nvSpPr>
         <p:spPr>
           <a:xfrm>
-            <a:off x="1234440" y="1851660"/>
-            <a:ext cx="7634815" cy="457200"/>
-          </a:xfrm>
-          <a:prstGeom prst="rect">
-            <a:avLst/>
-          </a:prstGeom>
-          <a:noFill/>
-        </p:spPr>
-        <p:txBody>
-          <a:bodyPr wrap="none" lIns="45720" rIns="45720" tIns="18288" bIns="18288" anchor="ctr">
-            <a:noAutofit/>
+            <a:off x="1234440" y="1874519"/>
+            <a:ext cx="10058400" cy="429370"/>
+          </a:xfrm>
+          <a:prstGeom prst="rect">
+            <a:avLst/>
+          </a:prstGeom>
+          <a:noFill/>
+        </p:spPr>
+        <p:txBody>
+          <a:bodyPr wrap="square" lIns="45720" rIns="45720" tIns="18288" bIns="18288" anchor="t">
+            <a:spAutoFit/>
           </a:bodyPr>
           <a:lstStyle/>
           <a:p>
@@ -6486,35 +6486,46 @@
                 </a:solidFill>
                 <a:latin typeface="Century Schoolbook"/>
               </a:rPr>
-              <a:t>A paper is folded in half 7 times. The top layer is  </a:t>
-            </a:r>
-          </a:p>
-        </p:txBody>
-      </p:sp>
-      <p:pic>
-        <p:nvPicPr>
-          <p:cNvPr id="10" name="Picture 9" descr="5558d1eb2409627b.png"/>
-          <p:cNvPicPr>
-            <a:picLocks noChangeAspect="1"/>
-          </p:cNvPicPr>
-          <p:nvPr/>
-        </p:nvPicPr>
-        <p:blipFill>
-          <a:blip r:embed="rId2"/>
-          <a:stretch>
-            <a:fillRect/>
-          </a:stretch>
-        </p:blipFill>
-        <p:spPr>
-          <a:xfrm>
-            <a:off x="8732095" y="1944623"/>
-            <a:ext cx="420624" cy="271272"/>
-          </a:xfrm>
-          <a:prstGeom prst="rect">
-            <a:avLst/>
-          </a:prstGeom>
-        </p:spPr>
-      </p:pic>
+              <a:t>A sheet of paper 30 centimeters long is folded in half 7 times.</a:t>
+            </a:r>
+          </a:p>
+        </p:txBody>
+      </p:sp>
+      <p:sp>
+        <p:nvSpPr>
+          <p:cNvPr id="10" name="TextBox 9"/>
+          <p:cNvSpPr txBox="1"/>
+          <p:nvPr/>
+        </p:nvSpPr>
+        <p:spPr>
+          <a:xfrm>
+            <a:off x="1234440" y="2413618"/>
+            <a:ext cx="10058400" cy="429370"/>
+          </a:xfrm>
+          <a:prstGeom prst="rect">
+            <a:avLst/>
+          </a:prstGeom>
+          <a:noFill/>
+        </p:spPr>
+        <p:txBody>
+          <a:bodyPr wrap="square" lIns="45720" rIns="45720" tIns="18288" bIns="18288" anchor="t">
+            <a:spAutoFit/>
+          </a:bodyPr>
+          <a:lstStyle/>
+          <a:p>
+            <a:pPr algn="l"/>
+            <a:r>
+              <a:rPr sz="2400" b="0" i="0">
+                <a:solidFill>
+                  <a:srgbClr val="1A1A1A"/>
+                </a:solidFill>
+                <a:latin typeface="Century Schoolbook"/>
+              </a:rPr>
+              <a:t>Each fold makes the top layer half as big.</a:t>
+            </a:r>
+          </a:p>
+        </p:txBody>
+      </p:sp>
       <p:sp>
         <p:nvSpPr>
           <p:cNvPr id="11" name="TextBox 10"/>
@@ -6523,29 +6534,29 @@
         </p:nvSpPr>
         <p:spPr>
           <a:xfrm>
-            <a:off x="9152719" y="1851660"/>
-            <a:ext cx="2242863" cy="457200"/>
-          </a:xfrm>
-          <a:prstGeom prst="rect">
-            <a:avLst/>
-          </a:prstGeom>
-          <a:noFill/>
-        </p:spPr>
-        <p:txBody>
-          <a:bodyPr wrap="none" lIns="45720" rIns="45720" tIns="18288" bIns="18288" anchor="ctr">
-            <a:noAutofit/>
+            <a:off x="1234440" y="2952716"/>
+            <a:ext cx="10058400" cy="858740"/>
+          </a:xfrm>
+          <a:prstGeom prst="rect">
+            <a:avLst/>
+          </a:prstGeom>
+          <a:noFill/>
+        </p:spPr>
+        <p:txBody>
+          <a:bodyPr wrap="square" lIns="45720" rIns="45720" tIns="18288" bIns="18288" anchor="t">
+            <a:spAutoFit/>
           </a:bodyPr>
           <a:lstStyle/>
           <a:p>
             <a:pPr algn="l"/>
             <a:r>
-              <a:rPr sz="2400" b="0" i="0">
+              <a:rPr sz="2400" b="1" i="0">
                 <a:solidFill>
                   <a:srgbClr val="1A1A1A"/>
                 </a:solidFill>
                 <a:latin typeface="Century Schoolbook"/>
               </a:rPr>
-              <a:t>  of the paper.</a:t>
+              <a:t>What fraction of the whole sheet is the top layer after 7 folds?</a:t>
             </a:r>
           </a:p>
         </p:txBody>
@@ -6553,135 +6564,6 @@
       <p:sp>
         <p:nvSpPr>
           <p:cNvPr id="12" name="TextBox 11"/>
-          <p:cNvSpPr txBox="1"/>
-          <p:nvPr/>
-        </p:nvSpPr>
-        <p:spPr>
-          <a:xfrm>
-            <a:off x="1234440" y="2487168"/>
-            <a:ext cx="10058400" cy="429370"/>
-          </a:xfrm>
-          <a:prstGeom prst="rect">
-            <a:avLst/>
-          </a:prstGeom>
-          <a:noFill/>
-        </p:spPr>
-        <p:txBody>
-          <a:bodyPr wrap="square" lIns="45720" rIns="45720" tIns="18288" bIns="18288" anchor="t">
-            <a:spAutoFit/>
-          </a:bodyPr>
-          <a:lstStyle/>
-          <a:p>
-            <a:pPr algn="l"/>
-            <a:r>
-              <a:rPr sz="2400" b="0" i="0">
-                <a:solidFill>
-                  <a:srgbClr val="1A1A1A"/>
-                </a:solidFill>
-                <a:latin typeface="Century Schoolbook"/>
-              </a:rPr>
-              <a:t>The paper is 30 centimeters long.</a:t>
-            </a:r>
-          </a:p>
-        </p:txBody>
-      </p:sp>
-      <p:sp>
-        <p:nvSpPr>
-          <p:cNvPr id="13" name="TextBox 12"/>
-          <p:cNvSpPr txBox="1"/>
-          <p:nvPr/>
-        </p:nvSpPr>
-        <p:spPr>
-          <a:xfrm>
-            <a:off x="1234440" y="3003406"/>
-            <a:ext cx="3698968" cy="457200"/>
-          </a:xfrm>
-          <a:prstGeom prst="rect">
-            <a:avLst/>
-          </a:prstGeom>
-          <a:noFill/>
-        </p:spPr>
-        <p:txBody>
-          <a:bodyPr wrap="none" lIns="45720" rIns="45720" tIns="18288" bIns="18288" anchor="ctr">
-            <a:noAutofit/>
-          </a:bodyPr>
-          <a:lstStyle/>
-          <a:p>
-            <a:pPr algn="l"/>
-            <a:r>
-              <a:rPr sz="2400" b="1" i="0">
-                <a:solidFill>
-                  <a:srgbClr val="1A1A1A"/>
-                </a:solidFill>
-                <a:latin typeface="Century Schoolbook"/>
-              </a:rPr>
-              <a:t>What is the value of  </a:t>
-            </a:r>
-          </a:p>
-        </p:txBody>
-      </p:sp>
-      <p:pic>
-        <p:nvPicPr>
-          <p:cNvPr id="14" name="Picture 13" descr="5558d1eb2409627b.png"/>
-          <p:cNvPicPr>
-            <a:picLocks noChangeAspect="1"/>
-          </p:cNvPicPr>
-          <p:nvPr/>
-        </p:nvPicPr>
-        <p:blipFill>
-          <a:blip r:embed="rId2"/>
-          <a:stretch>
-            <a:fillRect/>
-          </a:stretch>
-        </p:blipFill>
-        <p:spPr>
-          <a:xfrm>
-            <a:off x="4796248" y="3096370"/>
-            <a:ext cx="420624" cy="271272"/>
-          </a:xfrm>
-          <a:prstGeom prst="rect">
-            <a:avLst/>
-          </a:prstGeom>
-        </p:spPr>
-      </p:pic>
-      <p:sp>
-        <p:nvSpPr>
-          <p:cNvPr id="15" name="TextBox 14"/>
-          <p:cNvSpPr txBox="1"/>
-          <p:nvPr/>
-        </p:nvSpPr>
-        <p:spPr>
-          <a:xfrm>
-            <a:off x="5216872" y="3003406"/>
-            <a:ext cx="4191225" cy="457200"/>
-          </a:xfrm>
-          <a:prstGeom prst="rect">
-            <a:avLst/>
-          </a:prstGeom>
-          <a:noFill/>
-        </p:spPr>
-        <p:txBody>
-          <a:bodyPr wrap="none" lIns="45720" rIns="45720" tIns="18288" bIns="18288" anchor="ctr">
-            <a:noAutofit/>
-          </a:bodyPr>
-          <a:lstStyle/>
-          <a:p>
-            <a:pPr algn="l"/>
-            <a:r>
-              <a:rPr sz="2400" b="1" i="0">
-                <a:solidFill>
-                  <a:srgbClr val="1A1A1A"/>
-                </a:solidFill>
-                <a:latin typeface="Century Schoolbook"/>
-              </a:rPr>
-              <a:t> ?  Write it as a fraction.</a:t>
-            </a:r>
-          </a:p>
-        </p:txBody>
-      </p:sp>
-      <p:sp>
-        <p:nvSpPr>
-          <p:cNvPr id="16" name="TextBox 15"/>
           <p:cNvSpPr txBox="1"/>
           <p:nvPr/>
         </p:nvSpPr>
@@ -6985,17 +6867,17 @@
         </p:nvSpPr>
         <p:spPr>
           <a:xfrm>
-            <a:off x="1234440" y="1851660"/>
-            <a:ext cx="7634815" cy="457200"/>
-          </a:xfrm>
-          <a:prstGeom prst="rect">
-            <a:avLst/>
-          </a:prstGeom>
-          <a:noFill/>
-        </p:spPr>
-        <p:txBody>
-          <a:bodyPr wrap="none" lIns="45720" rIns="45720" tIns="18288" bIns="18288" anchor="ctr">
-            <a:noAutofit/>
+            <a:off x="1234440" y="1874519"/>
+            <a:ext cx="10058400" cy="429370"/>
+          </a:xfrm>
+          <a:prstGeom prst="rect">
+            <a:avLst/>
+          </a:prstGeom>
+          <a:noFill/>
+        </p:spPr>
+        <p:txBody>
+          <a:bodyPr wrap="square" lIns="45720" rIns="45720" tIns="18288" bIns="18288" anchor="t">
+            <a:spAutoFit/>
           </a:bodyPr>
           <a:lstStyle/>
           <a:p>
@@ -7007,14 +6889,181 @@
                 </a:solidFill>
                 <a:latin typeface="Century Schoolbook"/>
               </a:rPr>
-              <a:t>A paper is folded in half 7 times. The top layer is  </a:t>
+              <a:t>A sheet of paper 30 centimeters long is folded in half 7 times.</a:t>
+            </a:r>
+          </a:p>
+        </p:txBody>
+      </p:sp>
+      <p:sp>
+        <p:nvSpPr>
+          <p:cNvPr id="10" name="TextBox 9"/>
+          <p:cNvSpPr txBox="1"/>
+          <p:nvPr/>
+        </p:nvSpPr>
+        <p:spPr>
+          <a:xfrm>
+            <a:off x="1234440" y="2413618"/>
+            <a:ext cx="10058400" cy="429370"/>
+          </a:xfrm>
+          <a:prstGeom prst="rect">
+            <a:avLst/>
+          </a:prstGeom>
+          <a:noFill/>
+        </p:spPr>
+        <p:txBody>
+          <a:bodyPr wrap="square" lIns="45720" rIns="45720" tIns="18288" bIns="18288" anchor="t">
+            <a:spAutoFit/>
+          </a:bodyPr>
+          <a:lstStyle/>
+          <a:p>
+            <a:pPr algn="l"/>
+            <a:r>
+              <a:rPr sz="2400" b="0" i="0">
+                <a:solidFill>
+                  <a:srgbClr val="1A1A1A"/>
+                </a:solidFill>
+                <a:latin typeface="Century Schoolbook"/>
+              </a:rPr>
+              <a:t>Each fold makes the top layer half as big.</a:t>
+            </a:r>
+          </a:p>
+        </p:txBody>
+      </p:sp>
+      <p:sp>
+        <p:nvSpPr>
+          <p:cNvPr id="11" name="TextBox 10"/>
+          <p:cNvSpPr txBox="1"/>
+          <p:nvPr/>
+        </p:nvSpPr>
+        <p:spPr>
+          <a:xfrm>
+            <a:off x="1234440" y="2952716"/>
+            <a:ext cx="10058400" cy="858740"/>
+          </a:xfrm>
+          <a:prstGeom prst="rect">
+            <a:avLst/>
+          </a:prstGeom>
+          <a:noFill/>
+        </p:spPr>
+        <p:txBody>
+          <a:bodyPr wrap="square" lIns="45720" rIns="45720" tIns="18288" bIns="18288" anchor="t">
+            <a:spAutoFit/>
+          </a:bodyPr>
+          <a:lstStyle/>
+          <a:p>
+            <a:pPr algn="l"/>
+            <a:r>
+              <a:rPr sz="2400" b="1" i="0">
+                <a:solidFill>
+                  <a:srgbClr val="1A1A1A"/>
+                </a:solidFill>
+                <a:latin typeface="Century Schoolbook"/>
+              </a:rPr>
+              <a:t>What fraction of the whole sheet is the top layer after 7 folds?</a:t>
+            </a:r>
+          </a:p>
+        </p:txBody>
+      </p:sp>
+      <p:sp>
+        <p:nvSpPr>
+          <p:cNvPr id="12" name="TextBox 11"/>
+          <p:cNvSpPr txBox="1"/>
+          <p:nvPr/>
+        </p:nvSpPr>
+        <p:spPr>
+          <a:xfrm>
+            <a:off x="1828800" y="4012625"/>
+            <a:ext cx="8503920" cy="548640"/>
+          </a:xfrm>
+          <a:prstGeom prst="rect">
+            <a:avLst/>
+          </a:prstGeom>
+          <a:noFill/>
+        </p:spPr>
+        <p:txBody>
+          <a:bodyPr wrap="square" lIns="45720" rIns="45720" tIns="18288" bIns="18288" anchor="t">
+            <a:spAutoFit/>
+          </a:bodyPr>
+          <a:lstStyle/>
+          <a:p>
+            <a:pPr algn="ctr"/>
+            <a:r>
+              <a:rPr sz="2400" b="0" i="0">
+                <a:solidFill>
+                  <a:srgbClr val="6B6B6B"/>
+                </a:solidFill>
+                <a:latin typeface="Century Schoolbook"/>
+              </a:rPr>
+              <a:t>halved 7 times: 2</a:t>
+            </a:r>
+            <a:r>
+              <a:rPr sz="2400" b="0" i="0" baseline="30000">
+                <a:solidFill>
+                  <a:srgbClr val="6B6B6B"/>
+                </a:solidFill>
+                <a:latin typeface="Century Schoolbook"/>
+              </a:rPr>
+              <a:t>-7</a:t>
+            </a:r>
+            <a:r>
+              <a:rPr sz="2400" b="0" i="0">
+                <a:solidFill>
+                  <a:srgbClr val="6B6B6B"/>
+                </a:solidFill>
+                <a:latin typeface="Century Schoolbook"/>
+              </a:rPr>
+              <a:t> = 1 over 2</a:t>
+            </a:r>
+            <a:r>
+              <a:rPr sz="2400" b="0" i="0" baseline="30000">
+                <a:solidFill>
+                  <a:srgbClr val="6B6B6B"/>
+                </a:solidFill>
+                <a:latin typeface="Century Schoolbook"/>
+              </a:rPr>
+              <a:t>7</a:t>
+            </a:r>
+          </a:p>
+        </p:txBody>
+      </p:sp>
+      <p:sp>
+        <p:nvSpPr>
+          <p:cNvPr id="13" name="TextBox 12"/>
+          <p:cNvSpPr txBox="1"/>
+          <p:nvPr/>
+        </p:nvSpPr>
+        <p:spPr>
+          <a:xfrm>
+            <a:off x="4738116" y="4899593"/>
+            <a:ext cx="1920240" cy="548640"/>
+          </a:xfrm>
+          <a:prstGeom prst="rect">
+            <a:avLst/>
+          </a:prstGeom>
+          <a:noFill/>
+        </p:spPr>
+        <p:txBody>
+          <a:bodyPr wrap="square" lIns="45720" rIns="45720" tIns="18288" bIns="18288" anchor="ctr">
+            <a:spAutoFit/>
+          </a:bodyPr>
+          <a:lstStyle/>
+          <a:p>
+            <a:pPr algn="l"/>
+            <a:r>
+              <a:rPr sz="3200" b="1" i="0">
+                <a:solidFill>
+                  <a:srgbClr val="9E1B32"/>
+                </a:solidFill>
+                <a:latin typeface="Century Schoolbook"/>
+              </a:rPr>
+              <a:t>Answer:</a:t>
             </a:r>
           </a:p>
         </p:txBody>
       </p:sp>
       <p:pic>
         <p:nvPicPr>
-          <p:cNvPr id="10" name="Picture 9" descr="9c05828c17955af2.png"/>
+          <p:cNvPr id="14" name="Picture 13" descr="b025bbe2352d111b.png"/>
           <p:cNvPicPr>
             <a:picLocks noChangeAspect="1"/>
           </p:cNvPicPr>
@@ -7028,274 +7077,7 @@
         </p:blipFill>
         <p:spPr>
           <a:xfrm>
-            <a:off x="8732095" y="1946147"/>
-            <a:ext cx="423672" cy="268224"/>
-          </a:xfrm>
-          <a:prstGeom prst="rect">
-            <a:avLst/>
-          </a:prstGeom>
-        </p:spPr>
-      </p:pic>
-      <p:sp>
-        <p:nvSpPr>
-          <p:cNvPr id="11" name="TextBox 10"/>
-          <p:cNvSpPr txBox="1"/>
-          <p:nvPr/>
-        </p:nvSpPr>
-        <p:spPr>
-          <a:xfrm>
-            <a:off x="9155767" y="1851660"/>
-            <a:ext cx="2242863" cy="457200"/>
-          </a:xfrm>
-          <a:prstGeom prst="rect">
-            <a:avLst/>
-          </a:prstGeom>
-          <a:noFill/>
-        </p:spPr>
-        <p:txBody>
-          <a:bodyPr wrap="none" lIns="45720" rIns="45720" tIns="18288" bIns="18288" anchor="ctr">
-            <a:noAutofit/>
-          </a:bodyPr>
-          <a:lstStyle/>
-          <a:p>
-            <a:pPr algn="l"/>
-            <a:r>
-              <a:rPr sz="2400" b="0" i="0">
-                <a:solidFill>
-                  <a:srgbClr val="1A1A1A"/>
-                </a:solidFill>
-                <a:latin typeface="Century Schoolbook"/>
-              </a:rPr>
-              <a:t>  of the paper.</a:t>
-            </a:r>
-          </a:p>
-        </p:txBody>
-      </p:sp>
-      <p:sp>
-        <p:nvSpPr>
-          <p:cNvPr id="12" name="TextBox 11"/>
-          <p:cNvSpPr txBox="1"/>
-          <p:nvPr/>
-        </p:nvSpPr>
-        <p:spPr>
-          <a:xfrm>
-            <a:off x="1234440" y="2487168"/>
-            <a:ext cx="10058400" cy="429370"/>
-          </a:xfrm>
-          <a:prstGeom prst="rect">
-            <a:avLst/>
-          </a:prstGeom>
-          <a:noFill/>
-        </p:spPr>
-        <p:txBody>
-          <a:bodyPr wrap="square" lIns="45720" rIns="45720" tIns="18288" bIns="18288" anchor="t">
-            <a:spAutoFit/>
-          </a:bodyPr>
-          <a:lstStyle/>
-          <a:p>
-            <a:pPr algn="l"/>
-            <a:r>
-              <a:rPr sz="2400" b="0" i="0">
-                <a:solidFill>
-                  <a:srgbClr val="1A1A1A"/>
-                </a:solidFill>
-                <a:latin typeface="Century Schoolbook"/>
-              </a:rPr>
-              <a:t>The paper is 30 centimeters long.</a:t>
-            </a:r>
-          </a:p>
-        </p:txBody>
-      </p:sp>
-      <p:sp>
-        <p:nvSpPr>
-          <p:cNvPr id="13" name="TextBox 12"/>
-          <p:cNvSpPr txBox="1"/>
-          <p:nvPr/>
-        </p:nvSpPr>
-        <p:spPr>
-          <a:xfrm>
-            <a:off x="1234440" y="3003406"/>
-            <a:ext cx="3698968" cy="457200"/>
-          </a:xfrm>
-          <a:prstGeom prst="rect">
-            <a:avLst/>
-          </a:prstGeom>
-          <a:noFill/>
-        </p:spPr>
-        <p:txBody>
-          <a:bodyPr wrap="none" lIns="45720" rIns="45720" tIns="18288" bIns="18288" anchor="ctr">
-            <a:noAutofit/>
-          </a:bodyPr>
-          <a:lstStyle/>
-          <a:p>
-            <a:pPr algn="l"/>
-            <a:r>
-              <a:rPr sz="2400" b="1" i="0">
-                <a:solidFill>
-                  <a:srgbClr val="1A1A1A"/>
-                </a:solidFill>
-                <a:latin typeface="Century Schoolbook"/>
-              </a:rPr>
-              <a:t>What is the value of  </a:t>
-            </a:r>
-          </a:p>
-        </p:txBody>
-      </p:sp>
-      <p:pic>
-        <p:nvPicPr>
-          <p:cNvPr id="14" name="Picture 13" descr="9c05828c17955af2.png"/>
-          <p:cNvPicPr>
-            <a:picLocks noChangeAspect="1"/>
-          </p:cNvPicPr>
-          <p:nvPr/>
-        </p:nvPicPr>
-        <p:blipFill>
-          <a:blip r:embed="rId2"/>
-          <a:stretch>
-            <a:fillRect/>
-          </a:stretch>
-        </p:blipFill>
-        <p:spPr>
-          <a:xfrm>
-            <a:off x="4796248" y="3097894"/>
-            <a:ext cx="423672" cy="268224"/>
-          </a:xfrm>
-          <a:prstGeom prst="rect">
-            <a:avLst/>
-          </a:prstGeom>
-        </p:spPr>
-      </p:pic>
-      <p:sp>
-        <p:nvSpPr>
-          <p:cNvPr id="15" name="TextBox 14"/>
-          <p:cNvSpPr txBox="1"/>
-          <p:nvPr/>
-        </p:nvSpPr>
-        <p:spPr>
-          <a:xfrm>
-            <a:off x="5219920" y="3003406"/>
-            <a:ext cx="4191225" cy="457200"/>
-          </a:xfrm>
-          <a:prstGeom prst="rect">
-            <a:avLst/>
-          </a:prstGeom>
-          <a:noFill/>
-        </p:spPr>
-        <p:txBody>
-          <a:bodyPr wrap="none" lIns="45720" rIns="45720" tIns="18288" bIns="18288" anchor="ctr">
-            <a:noAutofit/>
-          </a:bodyPr>
-          <a:lstStyle/>
-          <a:p>
-            <a:pPr algn="l"/>
-            <a:r>
-              <a:rPr sz="2400" b="1" i="0">
-                <a:solidFill>
-                  <a:srgbClr val="1A1A1A"/>
-                </a:solidFill>
-                <a:latin typeface="Century Schoolbook"/>
-              </a:rPr>
-              <a:t> ?  Write it as a fraction.</a:t>
-            </a:r>
-          </a:p>
-        </p:txBody>
-      </p:sp>
-      <p:sp>
-        <p:nvSpPr>
-          <p:cNvPr id="16" name="TextBox 15"/>
-          <p:cNvSpPr txBox="1"/>
-          <p:nvPr/>
-        </p:nvSpPr>
-        <p:spPr>
-          <a:xfrm>
-            <a:off x="1828800" y="3730354"/>
-            <a:ext cx="8503920" cy="548640"/>
-          </a:xfrm>
-          <a:prstGeom prst="rect">
-            <a:avLst/>
-          </a:prstGeom>
-          <a:noFill/>
-        </p:spPr>
-        <p:txBody>
-          <a:bodyPr wrap="square" lIns="45720" rIns="45720" tIns="18288" bIns="18288" anchor="t">
-            <a:spAutoFit/>
-          </a:bodyPr>
-          <a:lstStyle/>
-          <a:p>
-            <a:pPr algn="ctr"/>
-            <a:r>
-              <a:rPr sz="2400" b="0" i="0">
-                <a:solidFill>
-                  <a:srgbClr val="6B6B6B"/>
-                </a:solidFill>
-                <a:latin typeface="Century Schoolbook"/>
-              </a:rPr>
-              <a:t>1 over 2</a:t>
-            </a:r>
-            <a:r>
-              <a:rPr sz="2400" b="0" i="0" baseline="30000">
-                <a:solidFill>
-                  <a:srgbClr val="6B6B6B"/>
-                </a:solidFill>
-                <a:latin typeface="Century Schoolbook"/>
-              </a:rPr>
-              <a:t>7</a:t>
-            </a:r>
-          </a:p>
-        </p:txBody>
-      </p:sp>
-      <p:sp>
-        <p:nvSpPr>
-          <p:cNvPr id="17" name="TextBox 16"/>
-          <p:cNvSpPr txBox="1"/>
-          <p:nvPr/>
-        </p:nvSpPr>
-        <p:spPr>
-          <a:xfrm>
-            <a:off x="4738116" y="4818888"/>
-            <a:ext cx="1920240" cy="548640"/>
-          </a:xfrm>
-          <a:prstGeom prst="rect">
-            <a:avLst/>
-          </a:prstGeom>
-          <a:noFill/>
-        </p:spPr>
-        <p:txBody>
-          <a:bodyPr wrap="square" lIns="45720" rIns="45720" tIns="18288" bIns="18288" anchor="ctr">
-            <a:spAutoFit/>
-          </a:bodyPr>
-          <a:lstStyle/>
-          <a:p>
-            <a:pPr algn="l"/>
-            <a:r>
-              <a:rPr sz="3200" b="1" i="0">
-                <a:solidFill>
-                  <a:srgbClr val="9E1B32"/>
-                </a:solidFill>
-                <a:latin typeface="Century Schoolbook"/>
-              </a:rPr>
-              <a:t>Answer:</a:t>
-            </a:r>
-          </a:p>
-        </p:txBody>
-      </p:sp>
-      <p:pic>
-        <p:nvPicPr>
-          <p:cNvPr id="18" name="Picture 17" descr="b025bbe2352d111b.png"/>
-          <p:cNvPicPr>
-            <a:picLocks noChangeAspect="1"/>
-          </p:cNvPicPr>
-          <p:nvPr/>
-        </p:nvPicPr>
-        <p:blipFill>
-          <a:blip r:embed="rId3"/>
-          <a:stretch>
-            <a:fillRect/>
-          </a:stretch>
-        </p:blipFill>
-        <p:spPr>
-          <a:xfrm>
-            <a:off x="6658356" y="4663440"/>
+            <a:off x="6658356" y="4744145"/>
             <a:ext cx="765048" cy="859536"/>
           </a:xfrm>
           <a:prstGeom prst="rect">
